--- a/Final_Project_ PPT.pptx
+++ b/Final_Project_ PPT.pptx
@@ -1,51 +1,51 @@
 
 <file path=ppt/presentation.xml><?xml version="1.0" encoding="utf-8"?>
-<p:presentation xmlns:a="http://schemas.openxmlformats.org/drawingml/2006/main" xmlns:r="http://schemas.openxmlformats.org/officeDocument/2006/relationships" xmlns:mc="http://schemas.openxmlformats.org/markup-compatibility/2006" xmlns:mv="urn:schemas-microsoft-com:mac:vml" xmlns:p="http://schemas.openxmlformats.org/presentationml/2006/main" xmlns:c="http://schemas.openxmlformats.org/drawingml/2006/chart" xmlns:dgm="http://schemas.openxmlformats.org/drawingml/2006/diagram" xmlns:o="urn:schemas-microsoft-com:office:office" xmlns:v="urn:schemas-microsoft-com:vml" xmlns:pvml="urn:schemas-microsoft-com:office:powerpoint" xmlns:com="http://schemas.openxmlformats.org/drawingml/2006/compatibility" xmlns:p14="http://schemas.microsoft.com/office/powerpoint/2010/main" xmlns:p15="http://schemas.microsoft.com/office/powerpoint/2012/main" xmlns:ahyp="http://schemas.microsoft.com/office/drawing/2018/hyperlinkcolor" autoCompressPictures="0" embedTrueTypeFonts="1" strictFirstAndLastChars="0" saveSubsetFonts="1">
+<p:presentation xmlns:a="http://schemas.openxmlformats.org/drawingml/2006/main" xmlns:r="http://schemas.openxmlformats.org/officeDocument/2006/relationships" xmlns:p="http://schemas.openxmlformats.org/presentationml/2006/main" strictFirstAndLastChars="0" embedTrueTypeFonts="1" saveSubsetFonts="1" autoCompressPictures="0">
   <p:sldMasterIdLst>
-    <p:sldMasterId id="2147483659" r:id="rId4"/>
+    <p:sldMasterId id="2147483659" r:id="rId1"/>
   </p:sldMasterIdLst>
   <p:notesMasterIdLst>
-    <p:notesMasterId r:id="rId5"/>
+    <p:notesMasterId r:id="rId19"/>
   </p:notesMasterIdLst>
   <p:sldIdLst>
-    <p:sldId id="256" r:id="rId6"/>
-    <p:sldId id="257" r:id="rId7"/>
-    <p:sldId id="258" r:id="rId8"/>
-    <p:sldId id="259" r:id="rId9"/>
-    <p:sldId id="260" r:id="rId10"/>
-    <p:sldId id="261" r:id="rId11"/>
-    <p:sldId id="262" r:id="rId12"/>
-    <p:sldId id="263" r:id="rId13"/>
-    <p:sldId id="264" r:id="rId14"/>
-    <p:sldId id="265" r:id="rId15"/>
-    <p:sldId id="266" r:id="rId16"/>
-    <p:sldId id="267" r:id="rId17"/>
-    <p:sldId id="268" r:id="rId18"/>
-    <p:sldId id="269" r:id="rId19"/>
-    <p:sldId id="270" r:id="rId20"/>
-    <p:sldId id="271" r:id="rId21"/>
-    <p:sldId id="272" r:id="rId22"/>
+    <p:sldId id="256" r:id="rId2"/>
+    <p:sldId id="257" r:id="rId3"/>
+    <p:sldId id="258" r:id="rId4"/>
+    <p:sldId id="259" r:id="rId5"/>
+    <p:sldId id="260" r:id="rId6"/>
+    <p:sldId id="261" r:id="rId7"/>
+    <p:sldId id="262" r:id="rId8"/>
+    <p:sldId id="263" r:id="rId9"/>
+    <p:sldId id="264" r:id="rId10"/>
+    <p:sldId id="265" r:id="rId11"/>
+    <p:sldId id="266" r:id="rId12"/>
+    <p:sldId id="267" r:id="rId13"/>
+    <p:sldId id="268" r:id="rId14"/>
+    <p:sldId id="269" r:id="rId15"/>
+    <p:sldId id="270" r:id="rId16"/>
+    <p:sldId id="271" r:id="rId17"/>
+    <p:sldId id="272" r:id="rId18"/>
   </p:sldIdLst>
-  <p:sldSz cy="5143500" cx="9144000"/>
+  <p:sldSz cx="9144000" cy="5143500" type="screen16x9"/>
   <p:notesSz cx="6858000" cy="9144000"/>
   <p:embeddedFontLst>
     <p:embeddedFont>
-      <p:font typeface="Raleway"/>
-      <p:regular r:id="rId23"/>
-      <p:bold r:id="rId24"/>
-      <p:italic r:id="rId25"/>
-      <p:boldItalic r:id="rId26"/>
+      <p:font typeface="Lato" panose="020F0502020204030203" pitchFamily="34" charset="0"/>
+      <p:regular r:id="rId20"/>
+      <p:bold r:id="rId21"/>
+      <p:italic r:id="rId22"/>
+      <p:boldItalic r:id="rId23"/>
     </p:embeddedFont>
     <p:embeddedFont>
-      <p:font typeface="Lato"/>
-      <p:regular r:id="rId27"/>
-      <p:bold r:id="rId28"/>
-      <p:italic r:id="rId29"/>
-      <p:boldItalic r:id="rId30"/>
+      <p:font typeface="Raleway" pitchFamily="2" charset="77"/>
+      <p:regular r:id="rId24"/>
+      <p:bold r:id="rId25"/>
+      <p:italic r:id="rId26"/>
+      <p:boldItalic r:id="rId27"/>
     </p:embeddedFont>
   </p:embeddedFontLst>
   <p:defaultTextStyle>
-    <a:defPPr lvl="0" marR="0" rtl="0" algn="l">
+    <a:defPPr marR="0" lvl="0" algn="l" rtl="0">
       <a:lnSpc>
         <a:spcPct val="100000"/>
       </a:lnSpc>
@@ -56,7 +56,7 @@
         <a:spcPts val="0"/>
       </a:spcAft>
     </a:defPPr>
-    <a:lvl1pPr lvl="0" marR="0" rtl="0" algn="l">
+    <a:lvl1pPr marR="0" lvl="0" algn="l" rtl="0">
       <a:lnSpc>
         <a:spcPct val="100000"/>
       </a:lnSpc>
@@ -70,7 +70,7 @@
         <a:srgbClr val="000000"/>
       </a:buClr>
       <a:buFont typeface="Arial"/>
-      <a:defRPr b="0" i="0" sz="1400" u="none" cap="none" strike="noStrike">
+      <a:defRPr sz="1400" b="0" i="0" u="none" strike="noStrike" cap="none">
         <a:solidFill>
           <a:srgbClr val="000000"/>
         </a:solidFill>
@@ -80,7 +80,7 @@
         <a:sym typeface="Arial"/>
       </a:defRPr>
     </a:lvl1pPr>
-    <a:lvl2pPr lvl="1" marR="0" rtl="0" algn="l">
+    <a:lvl2pPr marR="0" lvl="1" algn="l" rtl="0">
       <a:lnSpc>
         <a:spcPct val="100000"/>
       </a:lnSpc>
@@ -94,7 +94,7 @@
         <a:srgbClr val="000000"/>
       </a:buClr>
       <a:buFont typeface="Arial"/>
-      <a:defRPr b="0" i="0" sz="1400" u="none" cap="none" strike="noStrike">
+      <a:defRPr sz="1400" b="0" i="0" u="none" strike="noStrike" cap="none">
         <a:solidFill>
           <a:srgbClr val="000000"/>
         </a:solidFill>
@@ -104,7 +104,7 @@
         <a:sym typeface="Arial"/>
       </a:defRPr>
     </a:lvl2pPr>
-    <a:lvl3pPr lvl="2" marR="0" rtl="0" algn="l">
+    <a:lvl3pPr marR="0" lvl="2" algn="l" rtl="0">
       <a:lnSpc>
         <a:spcPct val="100000"/>
       </a:lnSpc>
@@ -118,7 +118,7 @@
         <a:srgbClr val="000000"/>
       </a:buClr>
       <a:buFont typeface="Arial"/>
-      <a:defRPr b="0" i="0" sz="1400" u="none" cap="none" strike="noStrike">
+      <a:defRPr sz="1400" b="0" i="0" u="none" strike="noStrike" cap="none">
         <a:solidFill>
           <a:srgbClr val="000000"/>
         </a:solidFill>
@@ -128,7 +128,7 @@
         <a:sym typeface="Arial"/>
       </a:defRPr>
     </a:lvl3pPr>
-    <a:lvl4pPr lvl="3" marR="0" rtl="0" algn="l">
+    <a:lvl4pPr marR="0" lvl="3" algn="l" rtl="0">
       <a:lnSpc>
         <a:spcPct val="100000"/>
       </a:lnSpc>
@@ -142,7 +142,7 @@
         <a:srgbClr val="000000"/>
       </a:buClr>
       <a:buFont typeface="Arial"/>
-      <a:defRPr b="0" i="0" sz="1400" u="none" cap="none" strike="noStrike">
+      <a:defRPr sz="1400" b="0" i="0" u="none" strike="noStrike" cap="none">
         <a:solidFill>
           <a:srgbClr val="000000"/>
         </a:solidFill>
@@ -152,7 +152,7 @@
         <a:sym typeface="Arial"/>
       </a:defRPr>
     </a:lvl4pPr>
-    <a:lvl5pPr lvl="4" marR="0" rtl="0" algn="l">
+    <a:lvl5pPr marR="0" lvl="4" algn="l" rtl="0">
       <a:lnSpc>
         <a:spcPct val="100000"/>
       </a:lnSpc>
@@ -166,7 +166,7 @@
         <a:srgbClr val="000000"/>
       </a:buClr>
       <a:buFont typeface="Arial"/>
-      <a:defRPr b="0" i="0" sz="1400" u="none" cap="none" strike="noStrike">
+      <a:defRPr sz="1400" b="0" i="0" u="none" strike="noStrike" cap="none">
         <a:solidFill>
           <a:srgbClr val="000000"/>
         </a:solidFill>
@@ -176,7 +176,7 @@
         <a:sym typeface="Arial"/>
       </a:defRPr>
     </a:lvl5pPr>
-    <a:lvl6pPr lvl="5" marR="0" rtl="0" algn="l">
+    <a:lvl6pPr marR="0" lvl="5" algn="l" rtl="0">
       <a:lnSpc>
         <a:spcPct val="100000"/>
       </a:lnSpc>
@@ -190,7 +190,7 @@
         <a:srgbClr val="000000"/>
       </a:buClr>
       <a:buFont typeface="Arial"/>
-      <a:defRPr b="0" i="0" sz="1400" u="none" cap="none" strike="noStrike">
+      <a:defRPr sz="1400" b="0" i="0" u="none" strike="noStrike" cap="none">
         <a:solidFill>
           <a:srgbClr val="000000"/>
         </a:solidFill>
@@ -200,7 +200,7 @@
         <a:sym typeface="Arial"/>
       </a:defRPr>
     </a:lvl6pPr>
-    <a:lvl7pPr lvl="6" marR="0" rtl="0" algn="l">
+    <a:lvl7pPr marR="0" lvl="6" algn="l" rtl="0">
       <a:lnSpc>
         <a:spcPct val="100000"/>
       </a:lnSpc>
@@ -214,7 +214,7 @@
         <a:srgbClr val="000000"/>
       </a:buClr>
       <a:buFont typeface="Arial"/>
-      <a:defRPr b="0" i="0" sz="1400" u="none" cap="none" strike="noStrike">
+      <a:defRPr sz="1400" b="0" i="0" u="none" strike="noStrike" cap="none">
         <a:solidFill>
           <a:srgbClr val="000000"/>
         </a:solidFill>
@@ -224,7 +224,7 @@
         <a:sym typeface="Arial"/>
       </a:defRPr>
     </a:lvl7pPr>
-    <a:lvl8pPr lvl="7" marR="0" rtl="0" algn="l">
+    <a:lvl8pPr marR="0" lvl="7" algn="l" rtl="0">
       <a:lnSpc>
         <a:spcPct val="100000"/>
       </a:lnSpc>
@@ -238,7 +238,7 @@
         <a:srgbClr val="000000"/>
       </a:buClr>
       <a:buFont typeface="Arial"/>
-      <a:defRPr b="0" i="0" sz="1400" u="none" cap="none" strike="noStrike">
+      <a:defRPr sz="1400" b="0" i="0" u="none" strike="noStrike" cap="none">
         <a:solidFill>
           <a:srgbClr val="000000"/>
         </a:solidFill>
@@ -248,7 +248,7 @@
         <a:sym typeface="Arial"/>
       </a:defRPr>
     </a:lvl8pPr>
-    <a:lvl9pPr lvl="8" marR="0" rtl="0" algn="l">
+    <a:lvl9pPr marR="0" lvl="8" algn="l" rtl="0">
       <a:lnSpc>
         <a:spcPct val="100000"/>
       </a:lnSpc>
@@ -262,7 +262,7 @@
         <a:srgbClr val="000000"/>
       </a:buClr>
       <a:buFont typeface="Arial"/>
-      <a:defRPr b="0" i="0" sz="1400" u="none" cap="none" strike="noStrike">
+      <a:defRPr sz="1400" b="0" i="0" u="none" strike="noStrike" cap="none">
         <a:solidFill>
           <a:srgbClr val="000000"/>
         </a:solidFill>
@@ -275,7 +275,7 @@
   </p:defaultTextStyle>
   <p:extLst>
     <p:ext uri="{EFAFB233-063F-42B5-8137-9DF3F51BA10A}">
-      <p15:sldGuideLst>
+      <p15:sldGuideLst xmlns:p15="http://schemas.microsoft.com/office/powerpoint/2012/main">
         <p15:guide id="1" orient="horz" pos="1620">
           <p15:clr>
             <a:srgbClr val="747775"/>
@@ -293,11 +293,16 @@
 </file>
 
 <file path=ppt/notesMasters/notesMaster1.xml><?xml version="1.0" encoding="utf-8"?>
-<p:notesMaster xmlns:a="http://schemas.openxmlformats.org/drawingml/2006/main" xmlns:r="http://schemas.openxmlformats.org/officeDocument/2006/relationships" xmlns:mc="http://schemas.openxmlformats.org/markup-compatibility/2006" xmlns:mv="urn:schemas-microsoft-com:mac:vml" xmlns:p="http://schemas.openxmlformats.org/presentationml/2006/main" xmlns:c="http://schemas.openxmlformats.org/drawingml/2006/chart" xmlns:dgm="http://schemas.openxmlformats.org/drawingml/2006/diagram" xmlns:o="urn:schemas-microsoft-com:office:office" xmlns:v="urn:schemas-microsoft-com:vml" xmlns:pvml="urn:schemas-microsoft-com:office:powerpoint" xmlns:com="http://schemas.openxmlformats.org/drawingml/2006/compatibility" xmlns:p14="http://schemas.microsoft.com/office/powerpoint/2010/main" xmlns:p15="http://schemas.microsoft.com/office/powerpoint/2012/main" xmlns:ahyp="http://schemas.microsoft.com/office/drawing/2018/hyperlinkcolor">
+<p:notesMaster xmlns:a="http://schemas.openxmlformats.org/drawingml/2006/main" xmlns:r="http://schemas.openxmlformats.org/officeDocument/2006/relationships" xmlns:p="http://schemas.openxmlformats.org/presentationml/2006/main">
   <p:cSld>
+    <p:bg>
+      <p:bgRef idx="1001">
+        <a:schemeClr val="bg1"/>
+      </p:bgRef>
+    </p:bg>
     <p:spTree>
       <p:nvGrpSpPr>
-        <p:cNvPr id="2" name="Shape 2"/>
+        <p:cNvPr id="1" name="Shape 2"/>
         <p:cNvGrpSpPr/>
         <p:nvPr/>
       </p:nvGrpSpPr>
@@ -312,9 +317,11 @@
       <p:sp>
         <p:nvSpPr>
           <p:cNvPr id="3" name="Google Shape;3;n"/>
-          <p:cNvSpPr/>
+          <p:cNvSpPr>
+            <a:spLocks noGrp="1" noRot="1" noChangeAspect="1"/>
+          </p:cNvSpPr>
           <p:nvPr>
-            <p:ph idx="2" type="sldImg"/>
+            <p:ph type="sldImg" idx="2"/>
           </p:nvPr>
         </p:nvSpPr>
         <p:spPr>
@@ -323,9 +330,13 @@
             <a:ext cx="6096075" cy="3429000"/>
           </a:xfrm>
           <a:custGeom>
-            <a:rect b="b" l="l" r="r" t="t"/>
+            <a:avLst/>
+            <a:gdLst/>
+            <a:ahLst/>
+            <a:cxnLst/>
+            <a:rect l="l" t="t" r="r" b="b"/>
             <a:pathLst>
-              <a:path extrusionOk="0" h="120000" w="120000">
+              <a:path w="120000" h="120000" extrusionOk="0">
                 <a:moveTo>
                   <a:pt x="0" y="0"/>
                 </a:moveTo>
@@ -343,23 +354,25 @@
             </a:pathLst>
           </a:custGeom>
           <a:noFill/>
-          <a:ln cap="flat" cmpd="sng" w="9525">
+          <a:ln w="9525" cap="flat" cmpd="sng">
             <a:solidFill>
               <a:srgbClr val="000000"/>
             </a:solidFill>
             <a:prstDash val="solid"/>
             <a:round/>
-            <a:headEnd len="sm" w="sm" type="none"/>
-            <a:tailEnd len="sm" w="sm" type="none"/>
+            <a:headEnd type="none" w="sm" len="sm"/>
+            <a:tailEnd type="none" w="sm" len="sm"/>
           </a:ln>
         </p:spPr>
       </p:sp>
       <p:sp>
         <p:nvSpPr>
           <p:cNvPr id="4" name="Google Shape;4;n"/>
-          <p:cNvSpPr txBox="1"/>
+          <p:cNvSpPr txBox="1">
+            <a:spLocks noGrp="1"/>
+          </p:cNvSpPr>
           <p:nvPr>
-            <p:ph idx="1" type="body"/>
+            <p:ph type="body" idx="1"/>
           </p:nvPr>
         </p:nvSpPr>
         <p:spPr>
@@ -376,11 +389,11 @@
           </a:ln>
         </p:spPr>
         <p:txBody>
-          <a:bodyPr anchorCtr="0" anchor="t" bIns="91425" lIns="91425" spcFirstLastPara="1" rIns="91425" wrap="square" tIns="91425">
+          <a:bodyPr spcFirstLastPara="1" wrap="square" lIns="91425" tIns="91425" rIns="91425" bIns="91425" anchor="t" anchorCtr="0">
             <a:noAutofit/>
           </a:bodyPr>
           <a:lstStyle>
-            <a:lvl1pPr indent="-298450" lvl="0" marL="457200">
+            <a:lvl1pPr marL="457200" lvl="0" indent="-298450">
               <a:spcBef>
                 <a:spcPts val="0"/>
               </a:spcBef>
@@ -391,7 +404,7 @@
               <a:buChar char="●"/>
               <a:defRPr sz="1100"/>
             </a:lvl1pPr>
-            <a:lvl2pPr indent="-298450" lvl="1" marL="914400">
+            <a:lvl2pPr marL="914400" lvl="1" indent="-298450">
               <a:spcBef>
                 <a:spcPts val="0"/>
               </a:spcBef>
@@ -402,7 +415,7 @@
               <a:buChar char="○"/>
               <a:defRPr sz="1100"/>
             </a:lvl2pPr>
-            <a:lvl3pPr indent="-298450" lvl="2" marL="1371600">
+            <a:lvl3pPr marL="1371600" lvl="2" indent="-298450">
               <a:spcBef>
                 <a:spcPts val="0"/>
               </a:spcBef>
@@ -413,7 +426,7 @@
               <a:buChar char="■"/>
               <a:defRPr sz="1100"/>
             </a:lvl3pPr>
-            <a:lvl4pPr indent="-298450" lvl="3" marL="1828800">
+            <a:lvl4pPr marL="1828800" lvl="3" indent="-298450">
               <a:spcBef>
                 <a:spcPts val="0"/>
               </a:spcBef>
@@ -424,7 +437,7 @@
               <a:buChar char="●"/>
               <a:defRPr sz="1100"/>
             </a:lvl4pPr>
-            <a:lvl5pPr indent="-298450" lvl="4" marL="2286000">
+            <a:lvl5pPr marL="2286000" lvl="4" indent="-298450">
               <a:spcBef>
                 <a:spcPts val="0"/>
               </a:spcBef>
@@ -435,7 +448,7 @@
               <a:buChar char="○"/>
               <a:defRPr sz="1100"/>
             </a:lvl5pPr>
-            <a:lvl6pPr indent="-298450" lvl="5" marL="2743200">
+            <a:lvl6pPr marL="2743200" lvl="5" indent="-298450">
               <a:spcBef>
                 <a:spcPts val="0"/>
               </a:spcBef>
@@ -446,7 +459,7 @@
               <a:buChar char="■"/>
               <a:defRPr sz="1100"/>
             </a:lvl6pPr>
-            <a:lvl7pPr indent="-298450" lvl="6" marL="3200400">
+            <a:lvl7pPr marL="3200400" lvl="6" indent="-298450">
               <a:spcBef>
                 <a:spcPts val="0"/>
               </a:spcBef>
@@ -457,7 +470,7 @@
               <a:buChar char="●"/>
               <a:defRPr sz="1100"/>
             </a:lvl7pPr>
-            <a:lvl8pPr indent="-298450" lvl="7" marL="3657600">
+            <a:lvl8pPr marL="3657600" lvl="7" indent="-298450">
               <a:spcBef>
                 <a:spcPts val="0"/>
               </a:spcBef>
@@ -468,7 +481,7 @@
               <a:buChar char="○"/>
               <a:defRPr sz="1100"/>
             </a:lvl8pPr>
-            <a:lvl9pPr indent="-298450" lvl="8" marL="4114800">
+            <a:lvl9pPr marL="4114800" lvl="8" indent="-298450">
               <a:spcBef>
                 <a:spcPts val="0"/>
               </a:spcBef>
@@ -480,14 +493,16 @@
               <a:defRPr sz="1100"/>
             </a:lvl9pPr>
           </a:lstStyle>
-          <a:p/>
+          <a:p>
+            <a:endParaRPr/>
+          </a:p>
         </p:txBody>
       </p:sp>
     </p:spTree>
   </p:cSld>
-  <p:clrMap accent1="accent1" accent2="accent2" accent3="accent3" accent4="accent4" accent5="accent5" accent6="accent6" bg1="lt1" bg2="dk2" tx1="dk1" tx2="lt2" folHlink="folHlink" hlink="hlink"/>
+  <p:clrMap bg1="lt1" tx1="dk1" bg2="dk2" tx2="lt2" accent1="accent1" accent2="accent2" accent3="accent3" accent4="accent4" accent5="accent5" accent6="accent6" hlink="hlink" folHlink="folHlink"/>
   <p:notesStyle>
-    <a:defPPr lvl="0" marR="0" rtl="0" algn="l">
+    <a:defPPr marR="0" lvl="0" algn="l" rtl="0">
       <a:lnSpc>
         <a:spcPct val="100000"/>
       </a:lnSpc>
@@ -498,7 +513,7 @@
         <a:spcPts val="0"/>
       </a:spcAft>
     </a:defPPr>
-    <a:lvl1pPr lvl="0" marR="0" rtl="0" algn="l">
+    <a:lvl1pPr marR="0" lvl="0" algn="l" rtl="0">
       <a:lnSpc>
         <a:spcPct val="100000"/>
       </a:lnSpc>
@@ -512,7 +527,7 @@
         <a:srgbClr val="000000"/>
       </a:buClr>
       <a:buFont typeface="Arial"/>
-      <a:defRPr b="0" i="0" sz="1400" u="none" cap="none" strike="noStrike">
+      <a:defRPr sz="1400" b="0" i="0" u="none" strike="noStrike" cap="none">
         <a:solidFill>
           <a:srgbClr val="000000"/>
         </a:solidFill>
@@ -522,7 +537,7 @@
         <a:sym typeface="Arial"/>
       </a:defRPr>
     </a:lvl1pPr>
-    <a:lvl2pPr lvl="1" marR="0" rtl="0" algn="l">
+    <a:lvl2pPr marR="0" lvl="1" algn="l" rtl="0">
       <a:lnSpc>
         <a:spcPct val="100000"/>
       </a:lnSpc>
@@ -536,7 +551,7 @@
         <a:srgbClr val="000000"/>
       </a:buClr>
       <a:buFont typeface="Arial"/>
-      <a:defRPr b="0" i="0" sz="1400" u="none" cap="none" strike="noStrike">
+      <a:defRPr sz="1400" b="0" i="0" u="none" strike="noStrike" cap="none">
         <a:solidFill>
           <a:srgbClr val="000000"/>
         </a:solidFill>
@@ -546,7 +561,7 @@
         <a:sym typeface="Arial"/>
       </a:defRPr>
     </a:lvl2pPr>
-    <a:lvl3pPr lvl="2" marR="0" rtl="0" algn="l">
+    <a:lvl3pPr marR="0" lvl="2" algn="l" rtl="0">
       <a:lnSpc>
         <a:spcPct val="100000"/>
       </a:lnSpc>
@@ -560,7 +575,7 @@
         <a:srgbClr val="000000"/>
       </a:buClr>
       <a:buFont typeface="Arial"/>
-      <a:defRPr b="0" i="0" sz="1400" u="none" cap="none" strike="noStrike">
+      <a:defRPr sz="1400" b="0" i="0" u="none" strike="noStrike" cap="none">
         <a:solidFill>
           <a:srgbClr val="000000"/>
         </a:solidFill>
@@ -570,7 +585,7 @@
         <a:sym typeface="Arial"/>
       </a:defRPr>
     </a:lvl3pPr>
-    <a:lvl4pPr lvl="3" marR="0" rtl="0" algn="l">
+    <a:lvl4pPr marR="0" lvl="3" algn="l" rtl="0">
       <a:lnSpc>
         <a:spcPct val="100000"/>
       </a:lnSpc>
@@ -584,7 +599,7 @@
         <a:srgbClr val="000000"/>
       </a:buClr>
       <a:buFont typeface="Arial"/>
-      <a:defRPr b="0" i="0" sz="1400" u="none" cap="none" strike="noStrike">
+      <a:defRPr sz="1400" b="0" i="0" u="none" strike="noStrike" cap="none">
         <a:solidFill>
           <a:srgbClr val="000000"/>
         </a:solidFill>
@@ -594,7 +609,7 @@
         <a:sym typeface="Arial"/>
       </a:defRPr>
     </a:lvl4pPr>
-    <a:lvl5pPr lvl="4" marR="0" rtl="0" algn="l">
+    <a:lvl5pPr marR="0" lvl="4" algn="l" rtl="0">
       <a:lnSpc>
         <a:spcPct val="100000"/>
       </a:lnSpc>
@@ -608,7 +623,7 @@
         <a:srgbClr val="000000"/>
       </a:buClr>
       <a:buFont typeface="Arial"/>
-      <a:defRPr b="0" i="0" sz="1400" u="none" cap="none" strike="noStrike">
+      <a:defRPr sz="1400" b="0" i="0" u="none" strike="noStrike" cap="none">
         <a:solidFill>
           <a:srgbClr val="000000"/>
         </a:solidFill>
@@ -618,7 +633,7 @@
         <a:sym typeface="Arial"/>
       </a:defRPr>
     </a:lvl5pPr>
-    <a:lvl6pPr lvl="5" marR="0" rtl="0" algn="l">
+    <a:lvl6pPr marR="0" lvl="5" algn="l" rtl="0">
       <a:lnSpc>
         <a:spcPct val="100000"/>
       </a:lnSpc>
@@ -632,7 +647,7 @@
         <a:srgbClr val="000000"/>
       </a:buClr>
       <a:buFont typeface="Arial"/>
-      <a:defRPr b="0" i="0" sz="1400" u="none" cap="none" strike="noStrike">
+      <a:defRPr sz="1400" b="0" i="0" u="none" strike="noStrike" cap="none">
         <a:solidFill>
           <a:srgbClr val="000000"/>
         </a:solidFill>
@@ -642,7 +657,7 @@
         <a:sym typeface="Arial"/>
       </a:defRPr>
     </a:lvl6pPr>
-    <a:lvl7pPr lvl="6" marR="0" rtl="0" algn="l">
+    <a:lvl7pPr marR="0" lvl="6" algn="l" rtl="0">
       <a:lnSpc>
         <a:spcPct val="100000"/>
       </a:lnSpc>
@@ -656,7 +671,7 @@
         <a:srgbClr val="000000"/>
       </a:buClr>
       <a:buFont typeface="Arial"/>
-      <a:defRPr b="0" i="0" sz="1400" u="none" cap="none" strike="noStrike">
+      <a:defRPr sz="1400" b="0" i="0" u="none" strike="noStrike" cap="none">
         <a:solidFill>
           <a:srgbClr val="000000"/>
         </a:solidFill>
@@ -666,7 +681,7 @@
         <a:sym typeface="Arial"/>
       </a:defRPr>
     </a:lvl7pPr>
-    <a:lvl8pPr lvl="7" marR="0" rtl="0" algn="l">
+    <a:lvl8pPr marR="0" lvl="7" algn="l" rtl="0">
       <a:lnSpc>
         <a:spcPct val="100000"/>
       </a:lnSpc>
@@ -680,7 +695,7 @@
         <a:srgbClr val="000000"/>
       </a:buClr>
       <a:buFont typeface="Arial"/>
-      <a:defRPr b="0" i="0" sz="1400" u="none" cap="none" strike="noStrike">
+      <a:defRPr sz="1400" b="0" i="0" u="none" strike="noStrike" cap="none">
         <a:solidFill>
           <a:srgbClr val="000000"/>
         </a:solidFill>
@@ -690,7 +705,7 @@
         <a:sym typeface="Arial"/>
       </a:defRPr>
     </a:lvl8pPr>
-    <a:lvl9pPr lvl="8" marR="0" rtl="0" algn="l">
+    <a:lvl9pPr marR="0" lvl="8" algn="l" rtl="0">
       <a:lnSpc>
         <a:spcPct val="100000"/>
       </a:lnSpc>
@@ -704,7 +719,7 @@
         <a:srgbClr val="000000"/>
       </a:buClr>
       <a:buFont typeface="Arial"/>
-      <a:defRPr b="0" i="0" sz="1400" u="none" cap="none" strike="noStrike">
+      <a:defRPr sz="1400" b="0" i="0" u="none" strike="noStrike" cap="none">
         <a:solidFill>
           <a:srgbClr val="000000"/>
         </a:solidFill>
@@ -719,11 +734,11 @@
 </file>
 
 <file path=ppt/notesSlides/notesSlide1.xml><?xml version="1.0" encoding="utf-8"?>
-<p:notes xmlns:a="http://schemas.openxmlformats.org/drawingml/2006/main" xmlns:r="http://schemas.openxmlformats.org/officeDocument/2006/relationships" xmlns:mc="http://schemas.openxmlformats.org/markup-compatibility/2006" xmlns:mv="urn:schemas-microsoft-com:mac:vml" xmlns:p="http://schemas.openxmlformats.org/presentationml/2006/main" xmlns:c="http://schemas.openxmlformats.org/drawingml/2006/chart" xmlns:dgm="http://schemas.openxmlformats.org/drawingml/2006/diagram" xmlns:o="urn:schemas-microsoft-com:office:office" xmlns:v="urn:schemas-microsoft-com:vml" xmlns:pvml="urn:schemas-microsoft-com:office:powerpoint" xmlns:com="http://schemas.openxmlformats.org/drawingml/2006/compatibility" xmlns:p14="http://schemas.microsoft.com/office/powerpoint/2010/main" xmlns:p15="http://schemas.microsoft.com/office/powerpoint/2012/main" xmlns:ahyp="http://schemas.microsoft.com/office/drawing/2018/hyperlinkcolor" showMasterPhAnim="0" showMasterSp="0">
+<p:notes xmlns:a="http://schemas.openxmlformats.org/drawingml/2006/main" xmlns:r="http://schemas.openxmlformats.org/officeDocument/2006/relationships" xmlns:p="http://schemas.openxmlformats.org/presentationml/2006/main" showMasterSp="0" showMasterPhAnim="0">
   <p:cSld>
     <p:spTree>
       <p:nvGrpSpPr>
-        <p:cNvPr id="82" name="Shape 82"/>
+        <p:cNvPr id="1" name="Shape 82"/>
         <p:cNvGrpSpPr/>
         <p:nvPr/>
       </p:nvGrpSpPr>
@@ -738,9 +753,11 @@
       <p:sp>
         <p:nvSpPr>
           <p:cNvPr id="83" name="Google Shape;83;p:notes"/>
-          <p:cNvSpPr/>
+          <p:cNvSpPr>
+            <a:spLocks noGrp="1" noRot="1" noChangeAspect="1"/>
+          </p:cNvSpPr>
           <p:nvPr>
-            <p:ph idx="2" type="sldImg"/>
+            <p:ph type="sldImg" idx="2"/>
           </p:nvPr>
         </p:nvSpPr>
         <p:spPr>
@@ -749,9 +766,13 @@
             <a:ext cx="6096075" cy="3429000"/>
           </a:xfrm>
           <a:custGeom>
-            <a:rect b="b" l="l" r="r" t="t"/>
+            <a:avLst/>
+            <a:gdLst/>
+            <a:ahLst/>
+            <a:cxnLst/>
+            <a:rect l="l" t="t" r="r" b="b"/>
             <a:pathLst>
-              <a:path extrusionOk="0" h="120000" w="120000">
+              <a:path w="120000" h="120000" extrusionOk="0">
                 <a:moveTo>
                   <a:pt x="0" y="0"/>
                 </a:moveTo>
@@ -773,9 +794,11 @@
       <p:sp>
         <p:nvSpPr>
           <p:cNvPr id="84" name="Google Shape;84;p:notes"/>
-          <p:cNvSpPr txBox="1"/>
+          <p:cNvSpPr txBox="1">
+            <a:spLocks noGrp="1"/>
+          </p:cNvSpPr>
           <p:nvPr>
-            <p:ph idx="1" type="body"/>
+            <p:ph type="body" idx="1"/>
           </p:nvPr>
         </p:nvSpPr>
         <p:spPr>
@@ -788,12 +811,12 @@
           </a:prstGeom>
         </p:spPr>
         <p:txBody>
-          <a:bodyPr anchorCtr="0" anchor="t" bIns="91425" lIns="91425" spcFirstLastPara="1" rIns="91425" wrap="square" tIns="91425">
+          <a:bodyPr spcFirstLastPara="1" wrap="square" lIns="91425" tIns="91425" rIns="91425" bIns="91425" anchor="t" anchorCtr="0">
             <a:noAutofit/>
           </a:bodyPr>
           <a:lstStyle/>
           <a:p>
-            <a:pPr indent="0" lvl="0" marL="0" rtl="0" algn="l">
+            <a:pPr marL="0" lvl="0" indent="0" algn="l" rtl="0">
               <a:spcBef>
                 <a:spcPts val="0"/>
               </a:spcBef>
@@ -802,9 +825,6 @@
               </a:spcAft>
               <a:buNone/>
             </a:pPr>
-            <a:r>
-              <a:t/>
-            </a:r>
             <a:endParaRPr/>
           </a:p>
         </p:txBody>
@@ -818,11 +838,11 @@
 </file>
 
 <file path=ppt/notesSlides/notesSlide10.xml><?xml version="1.0" encoding="utf-8"?>
-<p:notes xmlns:a="http://schemas.openxmlformats.org/drawingml/2006/main" xmlns:r="http://schemas.openxmlformats.org/officeDocument/2006/relationships" xmlns:mc="http://schemas.openxmlformats.org/markup-compatibility/2006" xmlns:mv="urn:schemas-microsoft-com:mac:vml" xmlns:p="http://schemas.openxmlformats.org/presentationml/2006/main" xmlns:c="http://schemas.openxmlformats.org/drawingml/2006/chart" xmlns:dgm="http://schemas.openxmlformats.org/drawingml/2006/diagram" xmlns:o="urn:schemas-microsoft-com:office:office" xmlns:v="urn:schemas-microsoft-com:vml" xmlns:pvml="urn:schemas-microsoft-com:office:powerpoint" xmlns:com="http://schemas.openxmlformats.org/drawingml/2006/compatibility" xmlns:p14="http://schemas.microsoft.com/office/powerpoint/2010/main" xmlns:p15="http://schemas.microsoft.com/office/powerpoint/2012/main" xmlns:ahyp="http://schemas.microsoft.com/office/drawing/2018/hyperlinkcolor" showMasterPhAnim="0" showMasterSp="0">
+<p:notes xmlns:a="http://schemas.openxmlformats.org/drawingml/2006/main" xmlns:r="http://schemas.openxmlformats.org/officeDocument/2006/relationships" xmlns:p="http://schemas.openxmlformats.org/presentationml/2006/main" showMasterSp="0" showMasterPhAnim="0">
   <p:cSld>
     <p:spTree>
       <p:nvGrpSpPr>
-        <p:cNvPr id="147" name="Shape 147"/>
+        <p:cNvPr id="1" name="Shape 147"/>
         <p:cNvGrpSpPr/>
         <p:nvPr/>
       </p:nvGrpSpPr>
@@ -837,9 +857,11 @@
       <p:sp>
         <p:nvSpPr>
           <p:cNvPr id="148" name="Google Shape;148;g37284b79113_0_0:notes"/>
-          <p:cNvSpPr/>
+          <p:cNvSpPr>
+            <a:spLocks noGrp="1" noRot="1" noChangeAspect="1"/>
+          </p:cNvSpPr>
           <p:nvPr>
-            <p:ph idx="2" type="sldImg"/>
+            <p:ph type="sldImg" idx="2"/>
           </p:nvPr>
         </p:nvSpPr>
         <p:spPr>
@@ -848,9 +870,13 @@
             <a:ext cx="6096000" cy="3429000"/>
           </a:xfrm>
           <a:custGeom>
-            <a:rect b="b" l="l" r="r" t="t"/>
+            <a:avLst/>
+            <a:gdLst/>
+            <a:ahLst/>
+            <a:cxnLst/>
+            <a:rect l="l" t="t" r="r" b="b"/>
             <a:pathLst>
-              <a:path extrusionOk="0" h="120000" w="120000">
+              <a:path w="120000" h="120000" extrusionOk="0">
                 <a:moveTo>
                   <a:pt x="0" y="0"/>
                 </a:moveTo>
@@ -872,9 +898,11 @@
       <p:sp>
         <p:nvSpPr>
           <p:cNvPr id="149" name="Google Shape;149;g37284b79113_0_0:notes"/>
-          <p:cNvSpPr txBox="1"/>
+          <p:cNvSpPr txBox="1">
+            <a:spLocks noGrp="1"/>
+          </p:cNvSpPr>
           <p:nvPr>
-            <p:ph idx="1" type="body"/>
+            <p:ph type="body" idx="1"/>
           </p:nvPr>
         </p:nvSpPr>
         <p:spPr>
@@ -887,12 +915,12 @@
           </a:prstGeom>
         </p:spPr>
         <p:txBody>
-          <a:bodyPr anchorCtr="0" anchor="t" bIns="91425" lIns="91425" spcFirstLastPara="1" rIns="91425" wrap="square" tIns="91425">
+          <a:bodyPr spcFirstLastPara="1" wrap="square" lIns="91425" tIns="91425" rIns="91425" bIns="91425" anchor="t" anchorCtr="0">
             <a:noAutofit/>
           </a:bodyPr>
           <a:lstStyle/>
           <a:p>
-            <a:pPr indent="0" lvl="0" marL="0" rtl="0" algn="l">
+            <a:pPr marL="0" lvl="0" indent="0" algn="l" rtl="0">
               <a:spcBef>
                 <a:spcPts val="0"/>
               </a:spcBef>
@@ -901,9 +929,6 @@
               </a:spcAft>
               <a:buNone/>
             </a:pPr>
-            <a:r>
-              <a:t/>
-            </a:r>
             <a:endParaRPr/>
           </a:p>
         </p:txBody>
@@ -917,11 +942,11 @@
 </file>
 
 <file path=ppt/notesSlides/notesSlide11.xml><?xml version="1.0" encoding="utf-8"?>
-<p:notes xmlns:a="http://schemas.openxmlformats.org/drawingml/2006/main" xmlns:r="http://schemas.openxmlformats.org/officeDocument/2006/relationships" xmlns:mc="http://schemas.openxmlformats.org/markup-compatibility/2006" xmlns:mv="urn:schemas-microsoft-com:mac:vml" xmlns:p="http://schemas.openxmlformats.org/presentationml/2006/main" xmlns:c="http://schemas.openxmlformats.org/drawingml/2006/chart" xmlns:dgm="http://schemas.openxmlformats.org/drawingml/2006/diagram" xmlns:o="urn:schemas-microsoft-com:office:office" xmlns:v="urn:schemas-microsoft-com:vml" xmlns:pvml="urn:schemas-microsoft-com:office:powerpoint" xmlns:com="http://schemas.openxmlformats.org/drawingml/2006/compatibility" xmlns:p14="http://schemas.microsoft.com/office/powerpoint/2010/main" xmlns:p15="http://schemas.microsoft.com/office/powerpoint/2012/main" xmlns:ahyp="http://schemas.microsoft.com/office/drawing/2018/hyperlinkcolor" showMasterPhAnim="0" showMasterSp="0">
+<p:notes xmlns:a="http://schemas.openxmlformats.org/drawingml/2006/main" xmlns:r="http://schemas.openxmlformats.org/officeDocument/2006/relationships" xmlns:p="http://schemas.openxmlformats.org/presentationml/2006/main" showMasterSp="0" showMasterPhAnim="0">
   <p:cSld>
     <p:spTree>
       <p:nvGrpSpPr>
-        <p:cNvPr id="153" name="Shape 153"/>
+        <p:cNvPr id="1" name="Shape 153"/>
         <p:cNvGrpSpPr/>
         <p:nvPr/>
       </p:nvGrpSpPr>
@@ -936,9 +961,11 @@
       <p:sp>
         <p:nvSpPr>
           <p:cNvPr id="154" name="Google Shape;154;g345101c2ffb_0_32:notes"/>
-          <p:cNvSpPr/>
+          <p:cNvSpPr>
+            <a:spLocks noGrp="1" noRot="1" noChangeAspect="1"/>
+          </p:cNvSpPr>
           <p:nvPr>
-            <p:ph idx="2" type="sldImg"/>
+            <p:ph type="sldImg" idx="2"/>
           </p:nvPr>
         </p:nvSpPr>
         <p:spPr>
@@ -947,9 +974,13 @@
             <a:ext cx="6096000" cy="3429000"/>
           </a:xfrm>
           <a:custGeom>
-            <a:rect b="b" l="l" r="r" t="t"/>
+            <a:avLst/>
+            <a:gdLst/>
+            <a:ahLst/>
+            <a:cxnLst/>
+            <a:rect l="l" t="t" r="r" b="b"/>
             <a:pathLst>
-              <a:path extrusionOk="0" h="120000" w="120000">
+              <a:path w="120000" h="120000" extrusionOk="0">
                 <a:moveTo>
                   <a:pt x="0" y="0"/>
                 </a:moveTo>
@@ -971,9 +1002,11 @@
       <p:sp>
         <p:nvSpPr>
           <p:cNvPr id="155" name="Google Shape;155;g345101c2ffb_0_32:notes"/>
-          <p:cNvSpPr txBox="1"/>
+          <p:cNvSpPr txBox="1">
+            <a:spLocks noGrp="1"/>
+          </p:cNvSpPr>
           <p:nvPr>
-            <p:ph idx="1" type="body"/>
+            <p:ph type="body" idx="1"/>
           </p:nvPr>
         </p:nvSpPr>
         <p:spPr>
@@ -986,12 +1019,12 @@
           </a:prstGeom>
         </p:spPr>
         <p:txBody>
-          <a:bodyPr anchorCtr="0" anchor="t" bIns="91425" lIns="91425" spcFirstLastPara="1" rIns="91425" wrap="square" tIns="91425">
+          <a:bodyPr spcFirstLastPara="1" wrap="square" lIns="91425" tIns="91425" rIns="91425" bIns="91425" anchor="t" anchorCtr="0">
             <a:noAutofit/>
           </a:bodyPr>
           <a:lstStyle/>
           <a:p>
-            <a:pPr indent="0" lvl="0" marL="0" rtl="0" algn="l">
+            <a:pPr marL="0" lvl="0" indent="0" algn="l" rtl="0">
               <a:spcBef>
                 <a:spcPts val="0"/>
               </a:spcBef>
@@ -1000,9 +1033,6 @@
               </a:spcAft>
               <a:buNone/>
             </a:pPr>
-            <a:r>
-              <a:t/>
-            </a:r>
             <a:endParaRPr/>
           </a:p>
         </p:txBody>
@@ -1016,11 +1046,11 @@
 </file>
 
 <file path=ppt/notesSlides/notesSlide12.xml><?xml version="1.0" encoding="utf-8"?>
-<p:notes xmlns:a="http://schemas.openxmlformats.org/drawingml/2006/main" xmlns:r="http://schemas.openxmlformats.org/officeDocument/2006/relationships" xmlns:mc="http://schemas.openxmlformats.org/markup-compatibility/2006" xmlns:mv="urn:schemas-microsoft-com:mac:vml" xmlns:p="http://schemas.openxmlformats.org/presentationml/2006/main" xmlns:c="http://schemas.openxmlformats.org/drawingml/2006/chart" xmlns:dgm="http://schemas.openxmlformats.org/drawingml/2006/diagram" xmlns:o="urn:schemas-microsoft-com:office:office" xmlns:v="urn:schemas-microsoft-com:vml" xmlns:pvml="urn:schemas-microsoft-com:office:powerpoint" xmlns:com="http://schemas.openxmlformats.org/drawingml/2006/compatibility" xmlns:p14="http://schemas.microsoft.com/office/powerpoint/2010/main" xmlns:p15="http://schemas.microsoft.com/office/powerpoint/2012/main" xmlns:ahyp="http://schemas.microsoft.com/office/drawing/2018/hyperlinkcolor" showMasterPhAnim="0" showMasterSp="0">
+<p:notes xmlns:a="http://schemas.openxmlformats.org/drawingml/2006/main" xmlns:r="http://schemas.openxmlformats.org/officeDocument/2006/relationships" xmlns:p="http://schemas.openxmlformats.org/presentationml/2006/main" showMasterSp="0" showMasterPhAnim="0">
   <p:cSld>
     <p:spTree>
       <p:nvGrpSpPr>
-        <p:cNvPr id="159" name="Shape 159"/>
+        <p:cNvPr id="1" name="Shape 159"/>
         <p:cNvGrpSpPr/>
         <p:nvPr/>
       </p:nvGrpSpPr>
@@ -1035,9 +1065,11 @@
       <p:sp>
         <p:nvSpPr>
           <p:cNvPr id="160" name="Google Shape;160;g37284b79113_0_5:notes"/>
-          <p:cNvSpPr/>
+          <p:cNvSpPr>
+            <a:spLocks noGrp="1" noRot="1" noChangeAspect="1"/>
+          </p:cNvSpPr>
           <p:nvPr>
-            <p:ph idx="2" type="sldImg"/>
+            <p:ph type="sldImg" idx="2"/>
           </p:nvPr>
         </p:nvSpPr>
         <p:spPr>
@@ -1046,9 +1078,13 @@
             <a:ext cx="6096000" cy="3429000"/>
           </a:xfrm>
           <a:custGeom>
-            <a:rect b="b" l="l" r="r" t="t"/>
+            <a:avLst/>
+            <a:gdLst/>
+            <a:ahLst/>
+            <a:cxnLst/>
+            <a:rect l="l" t="t" r="r" b="b"/>
             <a:pathLst>
-              <a:path extrusionOk="0" h="120000" w="120000">
+              <a:path w="120000" h="120000" extrusionOk="0">
                 <a:moveTo>
                   <a:pt x="0" y="0"/>
                 </a:moveTo>
@@ -1070,9 +1106,11 @@
       <p:sp>
         <p:nvSpPr>
           <p:cNvPr id="161" name="Google Shape;161;g37284b79113_0_5:notes"/>
-          <p:cNvSpPr txBox="1"/>
+          <p:cNvSpPr txBox="1">
+            <a:spLocks noGrp="1"/>
+          </p:cNvSpPr>
           <p:nvPr>
-            <p:ph idx="1" type="body"/>
+            <p:ph type="body" idx="1"/>
           </p:nvPr>
         </p:nvSpPr>
         <p:spPr>
@@ -1085,12 +1123,12 @@
           </a:prstGeom>
         </p:spPr>
         <p:txBody>
-          <a:bodyPr anchorCtr="0" anchor="t" bIns="91425" lIns="91425" spcFirstLastPara="1" rIns="91425" wrap="square" tIns="91425">
+          <a:bodyPr spcFirstLastPara="1" wrap="square" lIns="91425" tIns="91425" rIns="91425" bIns="91425" anchor="t" anchorCtr="0">
             <a:noAutofit/>
           </a:bodyPr>
           <a:lstStyle/>
           <a:p>
-            <a:pPr indent="0" lvl="0" marL="0" rtl="0" algn="l">
+            <a:pPr marL="0" lvl="0" indent="0" algn="l" rtl="0">
               <a:spcBef>
                 <a:spcPts val="0"/>
               </a:spcBef>
@@ -1099,9 +1137,6 @@
               </a:spcAft>
               <a:buNone/>
             </a:pPr>
-            <a:r>
-              <a:t/>
-            </a:r>
             <a:endParaRPr/>
           </a:p>
         </p:txBody>
@@ -1115,11 +1150,11 @@
 </file>
 
 <file path=ppt/notesSlides/notesSlide13.xml><?xml version="1.0" encoding="utf-8"?>
-<p:notes xmlns:a="http://schemas.openxmlformats.org/drawingml/2006/main" xmlns:r="http://schemas.openxmlformats.org/officeDocument/2006/relationships" xmlns:mc="http://schemas.openxmlformats.org/markup-compatibility/2006" xmlns:mv="urn:schemas-microsoft-com:mac:vml" xmlns:p="http://schemas.openxmlformats.org/presentationml/2006/main" xmlns:c="http://schemas.openxmlformats.org/drawingml/2006/chart" xmlns:dgm="http://schemas.openxmlformats.org/drawingml/2006/diagram" xmlns:o="urn:schemas-microsoft-com:office:office" xmlns:v="urn:schemas-microsoft-com:vml" xmlns:pvml="urn:schemas-microsoft-com:office:powerpoint" xmlns:com="http://schemas.openxmlformats.org/drawingml/2006/compatibility" xmlns:p14="http://schemas.microsoft.com/office/powerpoint/2010/main" xmlns:p15="http://schemas.microsoft.com/office/powerpoint/2012/main" xmlns:ahyp="http://schemas.microsoft.com/office/drawing/2018/hyperlinkcolor" showMasterPhAnim="0" showMasterSp="0">
+<p:notes xmlns:a="http://schemas.openxmlformats.org/drawingml/2006/main" xmlns:r="http://schemas.openxmlformats.org/officeDocument/2006/relationships" xmlns:p="http://schemas.openxmlformats.org/presentationml/2006/main" showMasterSp="0" showMasterPhAnim="0">
   <p:cSld>
     <p:spTree>
       <p:nvGrpSpPr>
-        <p:cNvPr id="165" name="Shape 165"/>
+        <p:cNvPr id="1" name="Shape 165"/>
         <p:cNvGrpSpPr/>
         <p:nvPr/>
       </p:nvGrpSpPr>
@@ -1134,9 +1169,11 @@
       <p:sp>
         <p:nvSpPr>
           <p:cNvPr id="166" name="Google Shape;166;g36383930737_0_45:notes"/>
-          <p:cNvSpPr/>
+          <p:cNvSpPr>
+            <a:spLocks noGrp="1" noRot="1" noChangeAspect="1"/>
+          </p:cNvSpPr>
           <p:nvPr>
-            <p:ph idx="2" type="sldImg"/>
+            <p:ph type="sldImg" idx="2"/>
           </p:nvPr>
         </p:nvSpPr>
         <p:spPr>
@@ -1145,9 +1182,13 @@
             <a:ext cx="6096000" cy="3429000"/>
           </a:xfrm>
           <a:custGeom>
-            <a:rect b="b" l="l" r="r" t="t"/>
+            <a:avLst/>
+            <a:gdLst/>
+            <a:ahLst/>
+            <a:cxnLst/>
+            <a:rect l="l" t="t" r="r" b="b"/>
             <a:pathLst>
-              <a:path extrusionOk="0" h="120000" w="120000">
+              <a:path w="120000" h="120000" extrusionOk="0">
                 <a:moveTo>
                   <a:pt x="0" y="0"/>
                 </a:moveTo>
@@ -1169,9 +1210,11 @@
       <p:sp>
         <p:nvSpPr>
           <p:cNvPr id="167" name="Google Shape;167;g36383930737_0_45:notes"/>
-          <p:cNvSpPr txBox="1"/>
+          <p:cNvSpPr txBox="1">
+            <a:spLocks noGrp="1"/>
+          </p:cNvSpPr>
           <p:nvPr>
-            <p:ph idx="1" type="body"/>
+            <p:ph type="body" idx="1"/>
           </p:nvPr>
         </p:nvSpPr>
         <p:spPr>
@@ -1184,12 +1227,12 @@
           </a:prstGeom>
         </p:spPr>
         <p:txBody>
-          <a:bodyPr anchorCtr="0" anchor="t" bIns="91425" lIns="91425" spcFirstLastPara="1" rIns="91425" wrap="square" tIns="91425">
+          <a:bodyPr spcFirstLastPara="1" wrap="square" lIns="91425" tIns="91425" rIns="91425" bIns="91425" anchor="t" anchorCtr="0">
             <a:noAutofit/>
           </a:bodyPr>
           <a:lstStyle/>
           <a:p>
-            <a:pPr indent="0" lvl="0" marL="0" rtl="0" algn="l">
+            <a:pPr marL="0" lvl="0" indent="0" algn="l" rtl="0">
               <a:spcBef>
                 <a:spcPts val="0"/>
               </a:spcBef>
@@ -1198,9 +1241,6 @@
               </a:spcAft>
               <a:buNone/>
             </a:pPr>
-            <a:r>
-              <a:t/>
-            </a:r>
             <a:endParaRPr/>
           </a:p>
         </p:txBody>
@@ -1214,11 +1254,11 @@
 </file>
 
 <file path=ppt/notesSlides/notesSlide14.xml><?xml version="1.0" encoding="utf-8"?>
-<p:notes xmlns:a="http://schemas.openxmlformats.org/drawingml/2006/main" xmlns:r="http://schemas.openxmlformats.org/officeDocument/2006/relationships" xmlns:mc="http://schemas.openxmlformats.org/markup-compatibility/2006" xmlns:mv="urn:schemas-microsoft-com:mac:vml" xmlns:p="http://schemas.openxmlformats.org/presentationml/2006/main" xmlns:c="http://schemas.openxmlformats.org/drawingml/2006/chart" xmlns:dgm="http://schemas.openxmlformats.org/drawingml/2006/diagram" xmlns:o="urn:schemas-microsoft-com:office:office" xmlns:v="urn:schemas-microsoft-com:vml" xmlns:pvml="urn:schemas-microsoft-com:office:powerpoint" xmlns:com="http://schemas.openxmlformats.org/drawingml/2006/compatibility" xmlns:p14="http://schemas.microsoft.com/office/powerpoint/2010/main" xmlns:p15="http://schemas.microsoft.com/office/powerpoint/2012/main" xmlns:ahyp="http://schemas.microsoft.com/office/drawing/2018/hyperlinkcolor" showMasterPhAnim="0" showMasterSp="0">
+<p:notes xmlns:a="http://schemas.openxmlformats.org/drawingml/2006/main" xmlns:r="http://schemas.openxmlformats.org/officeDocument/2006/relationships" xmlns:p="http://schemas.openxmlformats.org/presentationml/2006/main" showMasterSp="0" showMasterPhAnim="0">
   <p:cSld>
     <p:spTree>
       <p:nvGrpSpPr>
-        <p:cNvPr id="176" name="Shape 176"/>
+        <p:cNvPr id="1" name="Shape 176"/>
         <p:cNvGrpSpPr/>
         <p:nvPr/>
       </p:nvGrpSpPr>
@@ -1233,20 +1273,26 @@
       <p:sp>
         <p:nvSpPr>
           <p:cNvPr id="177" name="Google Shape;177;g345101c2ffb_0_0:notes"/>
-          <p:cNvSpPr/>
+          <p:cNvSpPr>
+            <a:spLocks noGrp="1" noRot="1" noChangeAspect="1"/>
+          </p:cNvSpPr>
           <p:nvPr>
-            <p:ph idx="2" type="sldImg"/>
+            <p:ph type="sldImg" idx="2"/>
           </p:nvPr>
         </p:nvSpPr>
         <p:spPr>
           <a:xfrm>
-            <a:off x="381300" y="685800"/>
+            <a:off x="381000" y="685800"/>
             <a:ext cx="6096000" cy="3429000"/>
           </a:xfrm>
           <a:custGeom>
-            <a:rect b="b" l="l" r="r" t="t"/>
+            <a:avLst/>
+            <a:gdLst/>
+            <a:ahLst/>
+            <a:cxnLst/>
+            <a:rect l="l" t="t" r="r" b="b"/>
             <a:pathLst>
-              <a:path extrusionOk="0" h="120000" w="120000">
+              <a:path w="120000" h="120000" extrusionOk="0">
                 <a:moveTo>
                   <a:pt x="0" y="0"/>
                 </a:moveTo>
@@ -1268,9 +1314,11 @@
       <p:sp>
         <p:nvSpPr>
           <p:cNvPr id="178" name="Google Shape;178;g345101c2ffb_0_0:notes"/>
-          <p:cNvSpPr txBox="1"/>
+          <p:cNvSpPr txBox="1">
+            <a:spLocks noGrp="1"/>
+          </p:cNvSpPr>
           <p:nvPr>
-            <p:ph idx="1" type="body"/>
+            <p:ph type="body" idx="1"/>
           </p:nvPr>
         </p:nvSpPr>
         <p:spPr>
@@ -1283,12 +1331,12 @@
           </a:prstGeom>
         </p:spPr>
         <p:txBody>
-          <a:bodyPr anchorCtr="0" anchor="t" bIns="91425" lIns="91425" spcFirstLastPara="1" rIns="91425" wrap="square" tIns="91425">
+          <a:bodyPr spcFirstLastPara="1" wrap="square" lIns="91425" tIns="91425" rIns="91425" bIns="91425" anchor="t" anchorCtr="0">
             <a:noAutofit/>
           </a:bodyPr>
           <a:lstStyle/>
           <a:p>
-            <a:pPr indent="0" lvl="0" marL="0" rtl="0" algn="l">
+            <a:pPr marL="0" lvl="0" indent="0" algn="l" rtl="0">
               <a:spcBef>
                 <a:spcPts val="0"/>
               </a:spcBef>
@@ -1297,9 +1345,6 @@
               </a:spcAft>
               <a:buNone/>
             </a:pPr>
-            <a:r>
-              <a:t/>
-            </a:r>
             <a:endParaRPr/>
           </a:p>
         </p:txBody>
@@ -1313,11 +1358,11 @@
 </file>
 
 <file path=ppt/notesSlides/notesSlide15.xml><?xml version="1.0" encoding="utf-8"?>
-<p:notes xmlns:a="http://schemas.openxmlformats.org/drawingml/2006/main" xmlns:r="http://schemas.openxmlformats.org/officeDocument/2006/relationships" xmlns:mc="http://schemas.openxmlformats.org/markup-compatibility/2006" xmlns:mv="urn:schemas-microsoft-com:mac:vml" xmlns:p="http://schemas.openxmlformats.org/presentationml/2006/main" xmlns:c="http://schemas.openxmlformats.org/drawingml/2006/chart" xmlns:dgm="http://schemas.openxmlformats.org/drawingml/2006/diagram" xmlns:o="urn:schemas-microsoft-com:office:office" xmlns:v="urn:schemas-microsoft-com:vml" xmlns:pvml="urn:schemas-microsoft-com:office:powerpoint" xmlns:com="http://schemas.openxmlformats.org/drawingml/2006/compatibility" xmlns:p14="http://schemas.microsoft.com/office/powerpoint/2010/main" xmlns:p15="http://schemas.microsoft.com/office/powerpoint/2012/main" xmlns:ahyp="http://schemas.microsoft.com/office/drawing/2018/hyperlinkcolor" showMasterPhAnim="0" showMasterSp="0">
+<p:notes xmlns:a="http://schemas.openxmlformats.org/drawingml/2006/main" xmlns:r="http://schemas.openxmlformats.org/officeDocument/2006/relationships" xmlns:p="http://schemas.openxmlformats.org/presentationml/2006/main" showMasterSp="0" showMasterPhAnim="0">
   <p:cSld>
     <p:spTree>
       <p:nvGrpSpPr>
-        <p:cNvPr id="182" name="Shape 182"/>
+        <p:cNvPr id="1" name="Shape 182"/>
         <p:cNvGrpSpPr/>
         <p:nvPr/>
       </p:nvGrpSpPr>
@@ -1332,9 +1377,11 @@
       <p:sp>
         <p:nvSpPr>
           <p:cNvPr id="183" name="Google Shape;183;g345101c2ffb_0_9:notes"/>
-          <p:cNvSpPr/>
+          <p:cNvSpPr>
+            <a:spLocks noGrp="1" noRot="1" noChangeAspect="1"/>
+          </p:cNvSpPr>
           <p:nvPr>
-            <p:ph idx="2" type="sldImg"/>
+            <p:ph type="sldImg" idx="2"/>
           </p:nvPr>
         </p:nvSpPr>
         <p:spPr>
@@ -1343,9 +1390,13 @@
             <a:ext cx="6096000" cy="3429000"/>
           </a:xfrm>
           <a:custGeom>
-            <a:rect b="b" l="l" r="r" t="t"/>
+            <a:avLst/>
+            <a:gdLst/>
+            <a:ahLst/>
+            <a:cxnLst/>
+            <a:rect l="l" t="t" r="r" b="b"/>
             <a:pathLst>
-              <a:path extrusionOk="0" h="120000" w="120000">
+              <a:path w="120000" h="120000" extrusionOk="0">
                 <a:moveTo>
                   <a:pt x="0" y="0"/>
                 </a:moveTo>
@@ -1367,9 +1418,11 @@
       <p:sp>
         <p:nvSpPr>
           <p:cNvPr id="184" name="Google Shape;184;g345101c2ffb_0_9:notes"/>
-          <p:cNvSpPr txBox="1"/>
+          <p:cNvSpPr txBox="1">
+            <a:spLocks noGrp="1"/>
+          </p:cNvSpPr>
           <p:nvPr>
-            <p:ph idx="1" type="body"/>
+            <p:ph type="body" idx="1"/>
           </p:nvPr>
         </p:nvSpPr>
         <p:spPr>
@@ -1382,12 +1435,12 @@
           </a:prstGeom>
         </p:spPr>
         <p:txBody>
-          <a:bodyPr anchorCtr="0" anchor="t" bIns="91425" lIns="91425" spcFirstLastPara="1" rIns="91425" wrap="square" tIns="91425">
+          <a:bodyPr spcFirstLastPara="1" wrap="square" lIns="91425" tIns="91425" rIns="91425" bIns="91425" anchor="t" anchorCtr="0">
             <a:noAutofit/>
           </a:bodyPr>
           <a:lstStyle/>
           <a:p>
-            <a:pPr indent="0" lvl="0" marL="0" rtl="0" algn="l">
+            <a:pPr marL="0" lvl="0" indent="0" algn="l" rtl="0">
               <a:spcBef>
                 <a:spcPts val="0"/>
               </a:spcBef>
@@ -1396,9 +1449,6 @@
               </a:spcAft>
               <a:buNone/>
             </a:pPr>
-            <a:r>
-              <a:t/>
-            </a:r>
             <a:endParaRPr/>
           </a:p>
         </p:txBody>
@@ -1412,11 +1462,11 @@
 </file>
 
 <file path=ppt/notesSlides/notesSlide16.xml><?xml version="1.0" encoding="utf-8"?>
-<p:notes xmlns:a="http://schemas.openxmlformats.org/drawingml/2006/main" xmlns:r="http://schemas.openxmlformats.org/officeDocument/2006/relationships" xmlns:mc="http://schemas.openxmlformats.org/markup-compatibility/2006" xmlns:mv="urn:schemas-microsoft-com:mac:vml" xmlns:p="http://schemas.openxmlformats.org/presentationml/2006/main" xmlns:c="http://schemas.openxmlformats.org/drawingml/2006/chart" xmlns:dgm="http://schemas.openxmlformats.org/drawingml/2006/diagram" xmlns:o="urn:schemas-microsoft-com:office:office" xmlns:v="urn:schemas-microsoft-com:vml" xmlns:pvml="urn:schemas-microsoft-com:office:powerpoint" xmlns:com="http://schemas.openxmlformats.org/drawingml/2006/compatibility" xmlns:p14="http://schemas.microsoft.com/office/powerpoint/2010/main" xmlns:p15="http://schemas.microsoft.com/office/powerpoint/2012/main" xmlns:ahyp="http://schemas.microsoft.com/office/drawing/2018/hyperlinkcolor" showMasterPhAnim="0" showMasterSp="0">
+<p:notes xmlns:a="http://schemas.openxmlformats.org/drawingml/2006/main" xmlns:r="http://schemas.openxmlformats.org/officeDocument/2006/relationships" xmlns:p="http://schemas.openxmlformats.org/presentationml/2006/main" showMasterSp="0" showMasterPhAnim="0">
   <p:cSld>
     <p:spTree>
       <p:nvGrpSpPr>
-        <p:cNvPr id="188" name="Shape 188"/>
+        <p:cNvPr id="1" name="Shape 188"/>
         <p:cNvGrpSpPr/>
         <p:nvPr/>
       </p:nvGrpSpPr>
@@ -1431,9 +1481,11 @@
       <p:sp>
         <p:nvSpPr>
           <p:cNvPr id="189" name="Google Shape;189;g345101c2ffb_0_14:notes"/>
-          <p:cNvSpPr/>
+          <p:cNvSpPr>
+            <a:spLocks noGrp="1" noRot="1" noChangeAspect="1"/>
+          </p:cNvSpPr>
           <p:nvPr>
-            <p:ph idx="2" type="sldImg"/>
+            <p:ph type="sldImg" idx="2"/>
           </p:nvPr>
         </p:nvSpPr>
         <p:spPr>
@@ -1442,9 +1494,13 @@
             <a:ext cx="6096000" cy="3429000"/>
           </a:xfrm>
           <a:custGeom>
-            <a:rect b="b" l="l" r="r" t="t"/>
+            <a:avLst/>
+            <a:gdLst/>
+            <a:ahLst/>
+            <a:cxnLst/>
+            <a:rect l="l" t="t" r="r" b="b"/>
             <a:pathLst>
-              <a:path extrusionOk="0" h="120000" w="120000">
+              <a:path w="120000" h="120000" extrusionOk="0">
                 <a:moveTo>
                   <a:pt x="0" y="0"/>
                 </a:moveTo>
@@ -1466,9 +1522,11 @@
       <p:sp>
         <p:nvSpPr>
           <p:cNvPr id="190" name="Google Shape;190;g345101c2ffb_0_14:notes"/>
-          <p:cNvSpPr txBox="1"/>
+          <p:cNvSpPr txBox="1">
+            <a:spLocks noGrp="1"/>
+          </p:cNvSpPr>
           <p:nvPr>
-            <p:ph idx="1" type="body"/>
+            <p:ph type="body" idx="1"/>
           </p:nvPr>
         </p:nvSpPr>
         <p:spPr>
@@ -1481,12 +1539,12 @@
           </a:prstGeom>
         </p:spPr>
         <p:txBody>
-          <a:bodyPr anchorCtr="0" anchor="t" bIns="91425" lIns="91425" spcFirstLastPara="1" rIns="91425" wrap="square" tIns="91425">
+          <a:bodyPr spcFirstLastPara="1" wrap="square" lIns="91425" tIns="91425" rIns="91425" bIns="91425" anchor="t" anchorCtr="0">
             <a:noAutofit/>
           </a:bodyPr>
           <a:lstStyle/>
           <a:p>
-            <a:pPr indent="0" lvl="0" marL="0" rtl="0" algn="l">
+            <a:pPr marL="0" lvl="0" indent="0" algn="l" rtl="0">
               <a:spcBef>
                 <a:spcPts val="0"/>
               </a:spcBef>
@@ -1495,9 +1553,6 @@
               </a:spcAft>
               <a:buNone/>
             </a:pPr>
-            <a:r>
-              <a:t/>
-            </a:r>
             <a:endParaRPr/>
           </a:p>
         </p:txBody>
@@ -1511,11 +1566,11 @@
 </file>
 
 <file path=ppt/notesSlides/notesSlide17.xml><?xml version="1.0" encoding="utf-8"?>
-<p:notes xmlns:a="http://schemas.openxmlformats.org/drawingml/2006/main" xmlns:r="http://schemas.openxmlformats.org/officeDocument/2006/relationships" xmlns:mc="http://schemas.openxmlformats.org/markup-compatibility/2006" xmlns:mv="urn:schemas-microsoft-com:mac:vml" xmlns:p="http://schemas.openxmlformats.org/presentationml/2006/main" xmlns:c="http://schemas.openxmlformats.org/drawingml/2006/chart" xmlns:dgm="http://schemas.openxmlformats.org/drawingml/2006/diagram" xmlns:o="urn:schemas-microsoft-com:office:office" xmlns:v="urn:schemas-microsoft-com:vml" xmlns:pvml="urn:schemas-microsoft-com:office:powerpoint" xmlns:com="http://schemas.openxmlformats.org/drawingml/2006/compatibility" xmlns:p14="http://schemas.microsoft.com/office/powerpoint/2010/main" xmlns:p15="http://schemas.microsoft.com/office/powerpoint/2012/main" xmlns:ahyp="http://schemas.microsoft.com/office/drawing/2018/hyperlinkcolor" showMasterPhAnim="0" showMasterSp="0">
+<p:notes xmlns:a="http://schemas.openxmlformats.org/drawingml/2006/main" xmlns:r="http://schemas.openxmlformats.org/officeDocument/2006/relationships" xmlns:p="http://schemas.openxmlformats.org/presentationml/2006/main" showMasterSp="0" showMasterPhAnim="0">
   <p:cSld>
     <p:spTree>
       <p:nvGrpSpPr>
-        <p:cNvPr id="194" name="Shape 194"/>
+        <p:cNvPr id="1" name="Shape 194"/>
         <p:cNvGrpSpPr/>
         <p:nvPr/>
       </p:nvGrpSpPr>
@@ -1530,9 +1585,11 @@
       <p:sp>
         <p:nvSpPr>
           <p:cNvPr id="195" name="Google Shape;195;g344c25ace76_1_50:notes"/>
-          <p:cNvSpPr/>
+          <p:cNvSpPr>
+            <a:spLocks noGrp="1" noRot="1" noChangeAspect="1"/>
+          </p:cNvSpPr>
           <p:nvPr>
-            <p:ph idx="2" type="sldImg"/>
+            <p:ph type="sldImg" idx="2"/>
           </p:nvPr>
         </p:nvSpPr>
         <p:spPr>
@@ -1541,9 +1598,13 @@
             <a:ext cx="6096000" cy="3429000"/>
           </a:xfrm>
           <a:custGeom>
-            <a:rect b="b" l="l" r="r" t="t"/>
+            <a:avLst/>
+            <a:gdLst/>
+            <a:ahLst/>
+            <a:cxnLst/>
+            <a:rect l="l" t="t" r="r" b="b"/>
             <a:pathLst>
-              <a:path extrusionOk="0" h="120000" w="120000">
+              <a:path w="120000" h="120000" extrusionOk="0">
                 <a:moveTo>
                   <a:pt x="0" y="0"/>
                 </a:moveTo>
@@ -1565,9 +1626,11 @@
       <p:sp>
         <p:nvSpPr>
           <p:cNvPr id="196" name="Google Shape;196;g344c25ace76_1_50:notes"/>
-          <p:cNvSpPr txBox="1"/>
+          <p:cNvSpPr txBox="1">
+            <a:spLocks noGrp="1"/>
+          </p:cNvSpPr>
           <p:nvPr>
-            <p:ph idx="1" type="body"/>
+            <p:ph type="body" idx="1"/>
           </p:nvPr>
         </p:nvSpPr>
         <p:spPr>
@@ -1580,12 +1643,12 @@
           </a:prstGeom>
         </p:spPr>
         <p:txBody>
-          <a:bodyPr anchorCtr="0" anchor="t" bIns="91425" lIns="91425" spcFirstLastPara="1" rIns="91425" wrap="square" tIns="91425">
+          <a:bodyPr spcFirstLastPara="1" wrap="square" lIns="91425" tIns="91425" rIns="91425" bIns="91425" anchor="t" anchorCtr="0">
             <a:noAutofit/>
           </a:bodyPr>
           <a:lstStyle/>
           <a:p>
-            <a:pPr indent="0" lvl="0" marL="0" rtl="0" algn="l">
+            <a:pPr marL="0" lvl="0" indent="0" algn="l" rtl="0">
               <a:spcBef>
                 <a:spcPts val="0"/>
               </a:spcBef>
@@ -1594,9 +1657,6 @@
               </a:spcAft>
               <a:buNone/>
             </a:pPr>
-            <a:r>
-              <a:t/>
-            </a:r>
             <a:endParaRPr/>
           </a:p>
         </p:txBody>
@@ -1610,11 +1670,11 @@
 </file>
 
 <file path=ppt/notesSlides/notesSlide2.xml><?xml version="1.0" encoding="utf-8"?>
-<p:notes xmlns:a="http://schemas.openxmlformats.org/drawingml/2006/main" xmlns:r="http://schemas.openxmlformats.org/officeDocument/2006/relationships" xmlns:mc="http://schemas.openxmlformats.org/markup-compatibility/2006" xmlns:mv="urn:schemas-microsoft-com:mac:vml" xmlns:p="http://schemas.openxmlformats.org/presentationml/2006/main" xmlns:c="http://schemas.openxmlformats.org/drawingml/2006/chart" xmlns:dgm="http://schemas.openxmlformats.org/drawingml/2006/diagram" xmlns:o="urn:schemas-microsoft-com:office:office" xmlns:v="urn:schemas-microsoft-com:vml" xmlns:pvml="urn:schemas-microsoft-com:office:powerpoint" xmlns:com="http://schemas.openxmlformats.org/drawingml/2006/compatibility" xmlns:p14="http://schemas.microsoft.com/office/powerpoint/2010/main" xmlns:p15="http://schemas.microsoft.com/office/powerpoint/2012/main" xmlns:ahyp="http://schemas.microsoft.com/office/drawing/2018/hyperlinkcolor" showMasterPhAnim="0" showMasterSp="0">
+<p:notes xmlns:a="http://schemas.openxmlformats.org/drawingml/2006/main" xmlns:r="http://schemas.openxmlformats.org/officeDocument/2006/relationships" xmlns:p="http://schemas.openxmlformats.org/presentationml/2006/main" showMasterSp="0" showMasterPhAnim="0">
   <p:cSld>
     <p:spTree>
       <p:nvGrpSpPr>
-        <p:cNvPr id="89" name="Shape 89"/>
+        <p:cNvPr id="1" name="Shape 89"/>
         <p:cNvGrpSpPr/>
         <p:nvPr/>
       </p:nvGrpSpPr>
@@ -1629,9 +1689,11 @@
       <p:sp>
         <p:nvSpPr>
           <p:cNvPr id="90" name="Google Shape;90;g344ae19f78f_0_122:notes"/>
-          <p:cNvSpPr/>
+          <p:cNvSpPr>
+            <a:spLocks noGrp="1" noRot="1" noChangeAspect="1"/>
+          </p:cNvSpPr>
           <p:nvPr>
-            <p:ph idx="2" type="sldImg"/>
+            <p:ph type="sldImg" idx="2"/>
           </p:nvPr>
         </p:nvSpPr>
         <p:spPr>
@@ -1640,9 +1702,13 @@
             <a:ext cx="6096000" cy="3429000"/>
           </a:xfrm>
           <a:custGeom>
-            <a:rect b="b" l="l" r="r" t="t"/>
+            <a:avLst/>
+            <a:gdLst/>
+            <a:ahLst/>
+            <a:cxnLst/>
+            <a:rect l="l" t="t" r="r" b="b"/>
             <a:pathLst>
-              <a:path extrusionOk="0" h="120000" w="120000">
+              <a:path w="120000" h="120000" extrusionOk="0">
                 <a:moveTo>
                   <a:pt x="0" y="0"/>
                 </a:moveTo>
@@ -1664,9 +1730,11 @@
       <p:sp>
         <p:nvSpPr>
           <p:cNvPr id="91" name="Google Shape;91;g344ae19f78f_0_122:notes"/>
-          <p:cNvSpPr txBox="1"/>
+          <p:cNvSpPr txBox="1">
+            <a:spLocks noGrp="1"/>
+          </p:cNvSpPr>
           <p:nvPr>
-            <p:ph idx="1" type="body"/>
+            <p:ph type="body" idx="1"/>
           </p:nvPr>
         </p:nvSpPr>
         <p:spPr>
@@ -1679,12 +1747,12 @@
           </a:prstGeom>
         </p:spPr>
         <p:txBody>
-          <a:bodyPr anchorCtr="0" anchor="t" bIns="91425" lIns="91425" spcFirstLastPara="1" rIns="91425" wrap="square" tIns="91425">
+          <a:bodyPr spcFirstLastPara="1" wrap="square" lIns="91425" tIns="91425" rIns="91425" bIns="91425" anchor="t" anchorCtr="0">
             <a:noAutofit/>
           </a:bodyPr>
           <a:lstStyle/>
           <a:p>
-            <a:pPr indent="0" lvl="0" marL="0" rtl="0" algn="l">
+            <a:pPr marL="0" lvl="0" indent="0" algn="l" rtl="0">
               <a:spcBef>
                 <a:spcPts val="0"/>
               </a:spcBef>
@@ -1693,9 +1761,6 @@
               </a:spcAft>
               <a:buNone/>
             </a:pPr>
-            <a:r>
-              <a:t/>
-            </a:r>
             <a:endParaRPr/>
           </a:p>
         </p:txBody>
@@ -1709,11 +1774,11 @@
 </file>
 
 <file path=ppt/notesSlides/notesSlide3.xml><?xml version="1.0" encoding="utf-8"?>
-<p:notes xmlns:a="http://schemas.openxmlformats.org/drawingml/2006/main" xmlns:r="http://schemas.openxmlformats.org/officeDocument/2006/relationships" xmlns:mc="http://schemas.openxmlformats.org/markup-compatibility/2006" xmlns:mv="urn:schemas-microsoft-com:mac:vml" xmlns:p="http://schemas.openxmlformats.org/presentationml/2006/main" xmlns:c="http://schemas.openxmlformats.org/drawingml/2006/chart" xmlns:dgm="http://schemas.openxmlformats.org/drawingml/2006/diagram" xmlns:o="urn:schemas-microsoft-com:office:office" xmlns:v="urn:schemas-microsoft-com:vml" xmlns:pvml="urn:schemas-microsoft-com:office:powerpoint" xmlns:com="http://schemas.openxmlformats.org/drawingml/2006/compatibility" xmlns:p14="http://schemas.microsoft.com/office/powerpoint/2010/main" xmlns:p15="http://schemas.microsoft.com/office/powerpoint/2012/main" xmlns:ahyp="http://schemas.microsoft.com/office/drawing/2018/hyperlinkcolor" showMasterPhAnim="0" showMasterSp="0">
+<p:notes xmlns:a="http://schemas.openxmlformats.org/drawingml/2006/main" xmlns:r="http://schemas.openxmlformats.org/officeDocument/2006/relationships" xmlns:p="http://schemas.openxmlformats.org/presentationml/2006/main" showMasterSp="0" showMasterPhAnim="0">
   <p:cSld>
     <p:spTree>
       <p:nvGrpSpPr>
-        <p:cNvPr id="95" name="Shape 95"/>
+        <p:cNvPr id="1" name="Shape 95"/>
         <p:cNvGrpSpPr/>
         <p:nvPr/>
       </p:nvGrpSpPr>
@@ -1728,9 +1793,11 @@
       <p:sp>
         <p:nvSpPr>
           <p:cNvPr id="96" name="Google Shape;96;g36383930737_0_11:notes"/>
-          <p:cNvSpPr/>
+          <p:cNvSpPr>
+            <a:spLocks noGrp="1" noRot="1" noChangeAspect="1"/>
+          </p:cNvSpPr>
           <p:nvPr>
-            <p:ph idx="2" type="sldImg"/>
+            <p:ph type="sldImg" idx="2"/>
           </p:nvPr>
         </p:nvSpPr>
         <p:spPr>
@@ -1739,9 +1806,13 @@
             <a:ext cx="6096000" cy="3429000"/>
           </a:xfrm>
           <a:custGeom>
-            <a:rect b="b" l="l" r="r" t="t"/>
+            <a:avLst/>
+            <a:gdLst/>
+            <a:ahLst/>
+            <a:cxnLst/>
+            <a:rect l="l" t="t" r="r" b="b"/>
             <a:pathLst>
-              <a:path extrusionOk="0" h="120000" w="120000">
+              <a:path w="120000" h="120000" extrusionOk="0">
                 <a:moveTo>
                   <a:pt x="0" y="0"/>
                 </a:moveTo>
@@ -1763,9 +1834,11 @@
       <p:sp>
         <p:nvSpPr>
           <p:cNvPr id="97" name="Google Shape;97;g36383930737_0_11:notes"/>
-          <p:cNvSpPr txBox="1"/>
+          <p:cNvSpPr txBox="1">
+            <a:spLocks noGrp="1"/>
+          </p:cNvSpPr>
           <p:nvPr>
-            <p:ph idx="1" type="body"/>
+            <p:ph type="body" idx="1"/>
           </p:nvPr>
         </p:nvSpPr>
         <p:spPr>
@@ -1778,12 +1851,12 @@
           </a:prstGeom>
         </p:spPr>
         <p:txBody>
-          <a:bodyPr anchorCtr="0" anchor="t" bIns="91425" lIns="91425" spcFirstLastPara="1" rIns="91425" wrap="square" tIns="91425">
+          <a:bodyPr spcFirstLastPara="1" wrap="square" lIns="91425" tIns="91425" rIns="91425" bIns="91425" anchor="t" anchorCtr="0">
             <a:noAutofit/>
           </a:bodyPr>
           <a:lstStyle/>
           <a:p>
-            <a:pPr indent="0" lvl="0" marL="0" rtl="0" algn="l">
+            <a:pPr marL="0" lvl="0" indent="0" algn="l" rtl="0">
               <a:spcBef>
                 <a:spcPts val="0"/>
               </a:spcBef>
@@ -1792,9 +1865,6 @@
               </a:spcAft>
               <a:buNone/>
             </a:pPr>
-            <a:r>
-              <a:t/>
-            </a:r>
             <a:endParaRPr/>
           </a:p>
         </p:txBody>
@@ -1808,11 +1878,11 @@
 </file>
 
 <file path=ppt/notesSlides/notesSlide4.xml><?xml version="1.0" encoding="utf-8"?>
-<p:notes xmlns:a="http://schemas.openxmlformats.org/drawingml/2006/main" xmlns:r="http://schemas.openxmlformats.org/officeDocument/2006/relationships" xmlns:mc="http://schemas.openxmlformats.org/markup-compatibility/2006" xmlns:mv="urn:schemas-microsoft-com:mac:vml" xmlns:p="http://schemas.openxmlformats.org/presentationml/2006/main" xmlns:c="http://schemas.openxmlformats.org/drawingml/2006/chart" xmlns:dgm="http://schemas.openxmlformats.org/drawingml/2006/diagram" xmlns:o="urn:schemas-microsoft-com:office:office" xmlns:v="urn:schemas-microsoft-com:vml" xmlns:pvml="urn:schemas-microsoft-com:office:powerpoint" xmlns:com="http://schemas.openxmlformats.org/drawingml/2006/compatibility" xmlns:p14="http://schemas.microsoft.com/office/powerpoint/2010/main" xmlns:p15="http://schemas.microsoft.com/office/powerpoint/2012/main" xmlns:ahyp="http://schemas.microsoft.com/office/drawing/2018/hyperlinkcolor" showMasterPhAnim="0" showMasterSp="0">
+<p:notes xmlns:a="http://schemas.openxmlformats.org/drawingml/2006/main" xmlns:r="http://schemas.openxmlformats.org/officeDocument/2006/relationships" xmlns:p="http://schemas.openxmlformats.org/presentationml/2006/main" showMasterSp="0" showMasterPhAnim="0">
   <p:cSld>
     <p:spTree>
       <p:nvGrpSpPr>
-        <p:cNvPr id="101" name="Shape 101"/>
+        <p:cNvPr id="1" name="Shape 101"/>
         <p:cNvGrpSpPr/>
         <p:nvPr/>
       </p:nvGrpSpPr>
@@ -1827,9 +1897,11 @@
       <p:sp>
         <p:nvSpPr>
           <p:cNvPr id="102" name="Google Shape;102;g36383930737_0_19:notes"/>
-          <p:cNvSpPr/>
+          <p:cNvSpPr>
+            <a:spLocks noGrp="1" noRot="1" noChangeAspect="1"/>
+          </p:cNvSpPr>
           <p:nvPr>
-            <p:ph idx="2" type="sldImg"/>
+            <p:ph type="sldImg" idx="2"/>
           </p:nvPr>
         </p:nvSpPr>
         <p:spPr>
@@ -1838,9 +1910,13 @@
             <a:ext cx="6096000" cy="3429000"/>
           </a:xfrm>
           <a:custGeom>
-            <a:rect b="b" l="l" r="r" t="t"/>
+            <a:avLst/>
+            <a:gdLst/>
+            <a:ahLst/>
+            <a:cxnLst/>
+            <a:rect l="l" t="t" r="r" b="b"/>
             <a:pathLst>
-              <a:path extrusionOk="0" h="120000" w="120000">
+              <a:path w="120000" h="120000" extrusionOk="0">
                 <a:moveTo>
                   <a:pt x="0" y="0"/>
                 </a:moveTo>
@@ -1862,9 +1938,11 @@
       <p:sp>
         <p:nvSpPr>
           <p:cNvPr id="103" name="Google Shape;103;g36383930737_0_19:notes"/>
-          <p:cNvSpPr txBox="1"/>
+          <p:cNvSpPr txBox="1">
+            <a:spLocks noGrp="1"/>
+          </p:cNvSpPr>
           <p:nvPr>
-            <p:ph idx="1" type="body"/>
+            <p:ph type="body" idx="1"/>
           </p:nvPr>
         </p:nvSpPr>
         <p:spPr>
@@ -1877,12 +1955,12 @@
           </a:prstGeom>
         </p:spPr>
         <p:txBody>
-          <a:bodyPr anchorCtr="0" anchor="t" bIns="91425" lIns="91425" spcFirstLastPara="1" rIns="91425" wrap="square" tIns="91425">
+          <a:bodyPr spcFirstLastPara="1" wrap="square" lIns="91425" tIns="91425" rIns="91425" bIns="91425" anchor="t" anchorCtr="0">
             <a:noAutofit/>
           </a:bodyPr>
           <a:lstStyle/>
           <a:p>
-            <a:pPr indent="0" lvl="0" marL="0" rtl="0" algn="l">
+            <a:pPr marL="0" lvl="0" indent="0" algn="l" rtl="0">
               <a:spcBef>
                 <a:spcPts val="0"/>
               </a:spcBef>
@@ -1891,9 +1969,6 @@
               </a:spcAft>
               <a:buNone/>
             </a:pPr>
-            <a:r>
-              <a:t/>
-            </a:r>
             <a:endParaRPr/>
           </a:p>
         </p:txBody>
@@ -1907,11 +1982,11 @@
 </file>
 
 <file path=ppt/notesSlides/notesSlide5.xml><?xml version="1.0" encoding="utf-8"?>
-<p:notes xmlns:a="http://schemas.openxmlformats.org/drawingml/2006/main" xmlns:r="http://schemas.openxmlformats.org/officeDocument/2006/relationships" xmlns:mc="http://schemas.openxmlformats.org/markup-compatibility/2006" xmlns:mv="urn:schemas-microsoft-com:mac:vml" xmlns:p="http://schemas.openxmlformats.org/presentationml/2006/main" xmlns:c="http://schemas.openxmlformats.org/drawingml/2006/chart" xmlns:dgm="http://schemas.openxmlformats.org/drawingml/2006/diagram" xmlns:o="urn:schemas-microsoft-com:office:office" xmlns:v="urn:schemas-microsoft-com:vml" xmlns:pvml="urn:schemas-microsoft-com:office:powerpoint" xmlns:com="http://schemas.openxmlformats.org/drawingml/2006/compatibility" xmlns:p14="http://schemas.microsoft.com/office/powerpoint/2010/main" xmlns:p15="http://schemas.microsoft.com/office/powerpoint/2012/main" xmlns:ahyp="http://schemas.microsoft.com/office/drawing/2018/hyperlinkcolor" showMasterPhAnim="0" showMasterSp="0">
+<p:notes xmlns:a="http://schemas.openxmlformats.org/drawingml/2006/main" xmlns:r="http://schemas.openxmlformats.org/officeDocument/2006/relationships" xmlns:p="http://schemas.openxmlformats.org/presentationml/2006/main" showMasterSp="0" showMasterPhAnim="0">
   <p:cSld>
     <p:spTree>
       <p:nvGrpSpPr>
-        <p:cNvPr id="107" name="Shape 107"/>
+        <p:cNvPr id="1" name="Shape 107"/>
         <p:cNvGrpSpPr/>
         <p:nvPr/>
       </p:nvGrpSpPr>
@@ -1926,9 +2001,11 @@
       <p:sp>
         <p:nvSpPr>
           <p:cNvPr id="108" name="Google Shape;108;g36383930737_0_32:notes"/>
-          <p:cNvSpPr/>
+          <p:cNvSpPr>
+            <a:spLocks noGrp="1" noRot="1" noChangeAspect="1"/>
+          </p:cNvSpPr>
           <p:nvPr>
-            <p:ph idx="2" type="sldImg"/>
+            <p:ph type="sldImg" idx="2"/>
           </p:nvPr>
         </p:nvSpPr>
         <p:spPr>
@@ -1937,9 +2014,13 @@
             <a:ext cx="6096000" cy="3429000"/>
           </a:xfrm>
           <a:custGeom>
-            <a:rect b="b" l="l" r="r" t="t"/>
+            <a:avLst/>
+            <a:gdLst/>
+            <a:ahLst/>
+            <a:cxnLst/>
+            <a:rect l="l" t="t" r="r" b="b"/>
             <a:pathLst>
-              <a:path extrusionOk="0" h="120000" w="120000">
+              <a:path w="120000" h="120000" extrusionOk="0">
                 <a:moveTo>
                   <a:pt x="0" y="0"/>
                 </a:moveTo>
@@ -1961,9 +2042,11 @@
       <p:sp>
         <p:nvSpPr>
           <p:cNvPr id="109" name="Google Shape;109;g36383930737_0_32:notes"/>
-          <p:cNvSpPr txBox="1"/>
+          <p:cNvSpPr txBox="1">
+            <a:spLocks noGrp="1"/>
+          </p:cNvSpPr>
           <p:nvPr>
-            <p:ph idx="1" type="body"/>
+            <p:ph type="body" idx="1"/>
           </p:nvPr>
         </p:nvSpPr>
         <p:spPr>
@@ -1976,12 +2059,12 @@
           </a:prstGeom>
         </p:spPr>
         <p:txBody>
-          <a:bodyPr anchorCtr="0" anchor="t" bIns="91425" lIns="91425" spcFirstLastPara="1" rIns="91425" wrap="square" tIns="91425">
+          <a:bodyPr spcFirstLastPara="1" wrap="square" lIns="91425" tIns="91425" rIns="91425" bIns="91425" anchor="t" anchorCtr="0">
             <a:noAutofit/>
           </a:bodyPr>
           <a:lstStyle/>
           <a:p>
-            <a:pPr indent="0" lvl="0" marL="0" rtl="0" algn="l">
+            <a:pPr marL="0" lvl="0" indent="0" algn="l" rtl="0">
               <a:spcBef>
                 <a:spcPts val="0"/>
               </a:spcBef>
@@ -1990,9 +2073,6 @@
               </a:spcAft>
               <a:buNone/>
             </a:pPr>
-            <a:r>
-              <a:t/>
-            </a:r>
             <a:endParaRPr/>
           </a:p>
         </p:txBody>
@@ -2006,11 +2086,11 @@
 </file>
 
 <file path=ppt/notesSlides/notesSlide6.xml><?xml version="1.0" encoding="utf-8"?>
-<p:notes xmlns:a="http://schemas.openxmlformats.org/drawingml/2006/main" xmlns:r="http://schemas.openxmlformats.org/officeDocument/2006/relationships" xmlns:mc="http://schemas.openxmlformats.org/markup-compatibility/2006" xmlns:mv="urn:schemas-microsoft-com:mac:vml" xmlns:p="http://schemas.openxmlformats.org/presentationml/2006/main" xmlns:c="http://schemas.openxmlformats.org/drawingml/2006/chart" xmlns:dgm="http://schemas.openxmlformats.org/drawingml/2006/diagram" xmlns:o="urn:schemas-microsoft-com:office:office" xmlns:v="urn:schemas-microsoft-com:vml" xmlns:pvml="urn:schemas-microsoft-com:office:powerpoint" xmlns:com="http://schemas.openxmlformats.org/drawingml/2006/compatibility" xmlns:p14="http://schemas.microsoft.com/office/powerpoint/2010/main" xmlns:p15="http://schemas.microsoft.com/office/powerpoint/2012/main" xmlns:ahyp="http://schemas.microsoft.com/office/drawing/2018/hyperlinkcolor" showMasterPhAnim="0" showMasterSp="0">
+<p:notes xmlns:a="http://schemas.openxmlformats.org/drawingml/2006/main" xmlns:r="http://schemas.openxmlformats.org/officeDocument/2006/relationships" xmlns:p="http://schemas.openxmlformats.org/presentationml/2006/main" showMasterSp="0" showMasterPhAnim="0">
   <p:cSld>
     <p:spTree>
       <p:nvGrpSpPr>
-        <p:cNvPr id="113" name="Shape 113"/>
+        <p:cNvPr id="1" name="Shape 113"/>
         <p:cNvGrpSpPr/>
         <p:nvPr/>
       </p:nvGrpSpPr>
@@ -2025,9 +2105,11 @@
       <p:sp>
         <p:nvSpPr>
           <p:cNvPr id="114" name="Google Shape;114;g372aaa810a0_0_7:notes"/>
-          <p:cNvSpPr/>
+          <p:cNvSpPr>
+            <a:spLocks noGrp="1" noRot="1" noChangeAspect="1"/>
+          </p:cNvSpPr>
           <p:nvPr>
-            <p:ph idx="2" type="sldImg"/>
+            <p:ph type="sldImg" idx="2"/>
           </p:nvPr>
         </p:nvSpPr>
         <p:spPr>
@@ -2036,9 +2118,13 @@
             <a:ext cx="6096000" cy="3429000"/>
           </a:xfrm>
           <a:custGeom>
-            <a:rect b="b" l="l" r="r" t="t"/>
+            <a:avLst/>
+            <a:gdLst/>
+            <a:ahLst/>
+            <a:cxnLst/>
+            <a:rect l="l" t="t" r="r" b="b"/>
             <a:pathLst>
-              <a:path extrusionOk="0" h="120000" w="120000">
+              <a:path w="120000" h="120000" extrusionOk="0">
                 <a:moveTo>
                   <a:pt x="0" y="0"/>
                 </a:moveTo>
@@ -2060,9 +2146,11 @@
       <p:sp>
         <p:nvSpPr>
           <p:cNvPr id="115" name="Google Shape;115;g372aaa810a0_0_7:notes"/>
-          <p:cNvSpPr txBox="1"/>
+          <p:cNvSpPr txBox="1">
+            <a:spLocks noGrp="1"/>
+          </p:cNvSpPr>
           <p:nvPr>
-            <p:ph idx="1" type="body"/>
+            <p:ph type="body" idx="1"/>
           </p:nvPr>
         </p:nvSpPr>
         <p:spPr>
@@ -2075,12 +2163,12 @@
           </a:prstGeom>
         </p:spPr>
         <p:txBody>
-          <a:bodyPr anchorCtr="0" anchor="t" bIns="91425" lIns="91425" spcFirstLastPara="1" rIns="91425" wrap="square" tIns="91425">
+          <a:bodyPr spcFirstLastPara="1" wrap="square" lIns="91425" tIns="91425" rIns="91425" bIns="91425" anchor="t" anchorCtr="0">
             <a:noAutofit/>
           </a:bodyPr>
           <a:lstStyle/>
           <a:p>
-            <a:pPr indent="0" lvl="0" marL="0" rtl="0" algn="l">
+            <a:pPr marL="0" lvl="0" indent="0" algn="l" rtl="0">
               <a:spcBef>
                 <a:spcPts val="0"/>
               </a:spcBef>
@@ -2089,9 +2177,6 @@
               </a:spcAft>
               <a:buNone/>
             </a:pPr>
-            <a:r>
-              <a:t/>
-            </a:r>
             <a:endParaRPr/>
           </a:p>
         </p:txBody>
@@ -2105,11 +2190,11 @@
 </file>
 
 <file path=ppt/notesSlides/notesSlide7.xml><?xml version="1.0" encoding="utf-8"?>
-<p:notes xmlns:a="http://schemas.openxmlformats.org/drawingml/2006/main" xmlns:r="http://schemas.openxmlformats.org/officeDocument/2006/relationships" xmlns:mc="http://schemas.openxmlformats.org/markup-compatibility/2006" xmlns:mv="urn:schemas-microsoft-com:mac:vml" xmlns:p="http://schemas.openxmlformats.org/presentationml/2006/main" xmlns:c="http://schemas.openxmlformats.org/drawingml/2006/chart" xmlns:dgm="http://schemas.openxmlformats.org/drawingml/2006/diagram" xmlns:o="urn:schemas-microsoft-com:office:office" xmlns:v="urn:schemas-microsoft-com:vml" xmlns:pvml="urn:schemas-microsoft-com:office:powerpoint" xmlns:com="http://schemas.openxmlformats.org/drawingml/2006/compatibility" xmlns:p14="http://schemas.microsoft.com/office/powerpoint/2010/main" xmlns:p15="http://schemas.microsoft.com/office/powerpoint/2012/main" xmlns:ahyp="http://schemas.microsoft.com/office/drawing/2018/hyperlinkcolor" showMasterPhAnim="0" showMasterSp="0">
+<p:notes xmlns:a="http://schemas.openxmlformats.org/drawingml/2006/main" xmlns:r="http://schemas.openxmlformats.org/officeDocument/2006/relationships" xmlns:p="http://schemas.openxmlformats.org/presentationml/2006/main" showMasterSp="0" showMasterPhAnim="0">
   <p:cSld>
     <p:spTree>
       <p:nvGrpSpPr>
-        <p:cNvPr id="119" name="Shape 119"/>
+        <p:cNvPr id="1" name="Shape 119"/>
         <p:cNvGrpSpPr/>
         <p:nvPr/>
       </p:nvGrpSpPr>
@@ -2124,9 +2209,11 @@
       <p:sp>
         <p:nvSpPr>
           <p:cNvPr id="120" name="Google Shape;120;g36383930737_0_26:notes"/>
-          <p:cNvSpPr/>
+          <p:cNvSpPr>
+            <a:spLocks noGrp="1" noRot="1" noChangeAspect="1"/>
+          </p:cNvSpPr>
           <p:nvPr>
-            <p:ph idx="2" type="sldImg"/>
+            <p:ph type="sldImg" idx="2"/>
           </p:nvPr>
         </p:nvSpPr>
         <p:spPr>
@@ -2135,9 +2222,13 @@
             <a:ext cx="6096000" cy="3429000"/>
           </a:xfrm>
           <a:custGeom>
-            <a:rect b="b" l="l" r="r" t="t"/>
+            <a:avLst/>
+            <a:gdLst/>
+            <a:ahLst/>
+            <a:cxnLst/>
+            <a:rect l="l" t="t" r="r" b="b"/>
             <a:pathLst>
-              <a:path extrusionOk="0" h="120000" w="120000">
+              <a:path w="120000" h="120000" extrusionOk="0">
                 <a:moveTo>
                   <a:pt x="0" y="0"/>
                 </a:moveTo>
@@ -2159,9 +2250,11 @@
       <p:sp>
         <p:nvSpPr>
           <p:cNvPr id="121" name="Google Shape;121;g36383930737_0_26:notes"/>
-          <p:cNvSpPr txBox="1"/>
+          <p:cNvSpPr txBox="1">
+            <a:spLocks noGrp="1"/>
+          </p:cNvSpPr>
           <p:nvPr>
-            <p:ph idx="1" type="body"/>
+            <p:ph type="body" idx="1"/>
           </p:nvPr>
         </p:nvSpPr>
         <p:spPr>
@@ -2174,12 +2267,12 @@
           </a:prstGeom>
         </p:spPr>
         <p:txBody>
-          <a:bodyPr anchorCtr="0" anchor="t" bIns="91425" lIns="91425" spcFirstLastPara="1" rIns="91425" wrap="square" tIns="91425">
+          <a:bodyPr spcFirstLastPara="1" wrap="square" lIns="91425" tIns="91425" rIns="91425" bIns="91425" anchor="t" anchorCtr="0">
             <a:noAutofit/>
           </a:bodyPr>
           <a:lstStyle/>
           <a:p>
-            <a:pPr indent="0" lvl="0" marL="0" rtl="0" algn="l">
+            <a:pPr marL="0" lvl="0" indent="0" algn="l" rtl="0">
               <a:spcBef>
                 <a:spcPts val="0"/>
               </a:spcBef>
@@ -2188,9 +2281,6 @@
               </a:spcAft>
               <a:buNone/>
             </a:pPr>
-            <a:r>
-              <a:t/>
-            </a:r>
             <a:endParaRPr/>
           </a:p>
         </p:txBody>
@@ -2204,11 +2294,11 @@
 </file>
 
 <file path=ppt/notesSlides/notesSlide8.xml><?xml version="1.0" encoding="utf-8"?>
-<p:notes xmlns:a="http://schemas.openxmlformats.org/drawingml/2006/main" xmlns:r="http://schemas.openxmlformats.org/officeDocument/2006/relationships" xmlns:mc="http://schemas.openxmlformats.org/markup-compatibility/2006" xmlns:mv="urn:schemas-microsoft-com:mac:vml" xmlns:p="http://schemas.openxmlformats.org/presentationml/2006/main" xmlns:c="http://schemas.openxmlformats.org/drawingml/2006/chart" xmlns:dgm="http://schemas.openxmlformats.org/drawingml/2006/diagram" xmlns:o="urn:schemas-microsoft-com:office:office" xmlns:v="urn:schemas-microsoft-com:vml" xmlns:pvml="urn:schemas-microsoft-com:office:powerpoint" xmlns:com="http://schemas.openxmlformats.org/drawingml/2006/compatibility" xmlns:p14="http://schemas.microsoft.com/office/powerpoint/2010/main" xmlns:p15="http://schemas.microsoft.com/office/powerpoint/2012/main" xmlns:ahyp="http://schemas.microsoft.com/office/drawing/2018/hyperlinkcolor" showMasterPhAnim="0" showMasterSp="0">
+<p:notes xmlns:a="http://schemas.openxmlformats.org/drawingml/2006/main" xmlns:r="http://schemas.openxmlformats.org/officeDocument/2006/relationships" xmlns:p="http://schemas.openxmlformats.org/presentationml/2006/main" showMasterSp="0" showMasterPhAnim="0">
   <p:cSld>
     <p:spTree>
       <p:nvGrpSpPr>
-        <p:cNvPr id="129" name="Shape 129"/>
+        <p:cNvPr id="1" name="Shape 129"/>
         <p:cNvGrpSpPr/>
         <p:nvPr/>
       </p:nvGrpSpPr>
@@ -2223,9 +2313,11 @@
       <p:sp>
         <p:nvSpPr>
           <p:cNvPr id="130" name="Google Shape;130;g345101c2ffb_0_45:notes"/>
-          <p:cNvSpPr/>
+          <p:cNvSpPr>
+            <a:spLocks noGrp="1" noRot="1" noChangeAspect="1"/>
+          </p:cNvSpPr>
           <p:nvPr>
-            <p:ph idx="2" type="sldImg"/>
+            <p:ph type="sldImg" idx="2"/>
           </p:nvPr>
         </p:nvSpPr>
         <p:spPr>
@@ -2234,9 +2326,13 @@
             <a:ext cx="6096000" cy="3429000"/>
           </a:xfrm>
           <a:custGeom>
-            <a:rect b="b" l="l" r="r" t="t"/>
+            <a:avLst/>
+            <a:gdLst/>
+            <a:ahLst/>
+            <a:cxnLst/>
+            <a:rect l="l" t="t" r="r" b="b"/>
             <a:pathLst>
-              <a:path extrusionOk="0" h="120000" w="120000">
+              <a:path w="120000" h="120000" extrusionOk="0">
                 <a:moveTo>
                   <a:pt x="0" y="0"/>
                 </a:moveTo>
@@ -2258,9 +2354,11 @@
       <p:sp>
         <p:nvSpPr>
           <p:cNvPr id="131" name="Google Shape;131;g345101c2ffb_0_45:notes"/>
-          <p:cNvSpPr txBox="1"/>
+          <p:cNvSpPr txBox="1">
+            <a:spLocks noGrp="1"/>
+          </p:cNvSpPr>
           <p:nvPr>
-            <p:ph idx="1" type="body"/>
+            <p:ph type="body" idx="1"/>
           </p:nvPr>
         </p:nvSpPr>
         <p:spPr>
@@ -2273,12 +2371,12 @@
           </a:prstGeom>
         </p:spPr>
         <p:txBody>
-          <a:bodyPr anchorCtr="0" anchor="t" bIns="91425" lIns="91425" spcFirstLastPara="1" rIns="91425" wrap="square" tIns="91425">
+          <a:bodyPr spcFirstLastPara="1" wrap="square" lIns="91425" tIns="91425" rIns="91425" bIns="91425" anchor="t" anchorCtr="0">
             <a:noAutofit/>
           </a:bodyPr>
           <a:lstStyle/>
           <a:p>
-            <a:pPr indent="0" lvl="0" marL="0" rtl="0" algn="l">
+            <a:pPr marL="0" lvl="0" indent="0" algn="l" rtl="0">
               <a:spcBef>
                 <a:spcPts val="0"/>
               </a:spcBef>
@@ -2287,9 +2385,6 @@
               </a:spcAft>
               <a:buNone/>
             </a:pPr>
-            <a:r>
-              <a:t/>
-            </a:r>
             <a:endParaRPr/>
           </a:p>
         </p:txBody>
@@ -2303,11 +2398,11 @@
 </file>
 
 <file path=ppt/notesSlides/notesSlide9.xml><?xml version="1.0" encoding="utf-8"?>
-<p:notes xmlns:a="http://schemas.openxmlformats.org/drawingml/2006/main" xmlns:r="http://schemas.openxmlformats.org/officeDocument/2006/relationships" xmlns:mc="http://schemas.openxmlformats.org/markup-compatibility/2006" xmlns:mv="urn:schemas-microsoft-com:mac:vml" xmlns:p="http://schemas.openxmlformats.org/presentationml/2006/main" xmlns:c="http://schemas.openxmlformats.org/drawingml/2006/chart" xmlns:dgm="http://schemas.openxmlformats.org/drawingml/2006/diagram" xmlns:o="urn:schemas-microsoft-com:office:office" xmlns:v="urn:schemas-microsoft-com:vml" xmlns:pvml="urn:schemas-microsoft-com:office:powerpoint" xmlns:com="http://schemas.openxmlformats.org/drawingml/2006/compatibility" xmlns:p14="http://schemas.microsoft.com/office/powerpoint/2010/main" xmlns:p15="http://schemas.microsoft.com/office/powerpoint/2012/main" xmlns:ahyp="http://schemas.microsoft.com/office/drawing/2018/hyperlinkcolor" showMasterPhAnim="0" showMasterSp="0">
+<p:notes xmlns:a="http://schemas.openxmlformats.org/drawingml/2006/main" xmlns:r="http://schemas.openxmlformats.org/officeDocument/2006/relationships" xmlns:p="http://schemas.openxmlformats.org/presentationml/2006/main" showMasterSp="0" showMasterPhAnim="0">
   <p:cSld>
     <p:spTree>
       <p:nvGrpSpPr>
-        <p:cNvPr id="139" name="Shape 139"/>
+        <p:cNvPr id="1" name="Shape 139"/>
         <p:cNvGrpSpPr/>
         <p:nvPr/>
       </p:nvGrpSpPr>
@@ -2322,9 +2417,11 @@
       <p:sp>
         <p:nvSpPr>
           <p:cNvPr id="140" name="Google Shape;140;g345101c2ffb_0_53:notes"/>
-          <p:cNvSpPr/>
+          <p:cNvSpPr>
+            <a:spLocks noGrp="1" noRot="1" noChangeAspect="1"/>
+          </p:cNvSpPr>
           <p:nvPr>
-            <p:ph idx="2" type="sldImg"/>
+            <p:ph type="sldImg" idx="2"/>
           </p:nvPr>
         </p:nvSpPr>
         <p:spPr>
@@ -2333,9 +2430,13 @@
             <a:ext cx="6096000" cy="3429000"/>
           </a:xfrm>
           <a:custGeom>
-            <a:rect b="b" l="l" r="r" t="t"/>
+            <a:avLst/>
+            <a:gdLst/>
+            <a:ahLst/>
+            <a:cxnLst/>
+            <a:rect l="l" t="t" r="r" b="b"/>
             <a:pathLst>
-              <a:path extrusionOk="0" h="120000" w="120000">
+              <a:path w="120000" h="120000" extrusionOk="0">
                 <a:moveTo>
                   <a:pt x="0" y="0"/>
                 </a:moveTo>
@@ -2357,9 +2458,11 @@
       <p:sp>
         <p:nvSpPr>
           <p:cNvPr id="141" name="Google Shape;141;g345101c2ffb_0_53:notes"/>
-          <p:cNvSpPr txBox="1"/>
+          <p:cNvSpPr txBox="1">
+            <a:spLocks noGrp="1"/>
+          </p:cNvSpPr>
           <p:nvPr>
-            <p:ph idx="1" type="body"/>
+            <p:ph type="body" idx="1"/>
           </p:nvPr>
         </p:nvSpPr>
         <p:spPr>
@@ -2372,12 +2475,12 @@
           </a:prstGeom>
         </p:spPr>
         <p:txBody>
-          <a:bodyPr anchorCtr="0" anchor="t" bIns="91425" lIns="91425" spcFirstLastPara="1" rIns="91425" wrap="square" tIns="91425">
+          <a:bodyPr spcFirstLastPara="1" wrap="square" lIns="91425" tIns="91425" rIns="91425" bIns="91425" anchor="t" anchorCtr="0">
             <a:noAutofit/>
           </a:bodyPr>
           <a:lstStyle/>
           <a:p>
-            <a:pPr indent="0" lvl="0" marL="0" rtl="0" algn="l">
+            <a:pPr marL="0" lvl="0" indent="0" algn="l" rtl="0">
               <a:spcBef>
                 <a:spcPts val="0"/>
               </a:spcBef>
@@ -2386,9 +2489,6 @@
               </a:spcAft>
               <a:buNone/>
             </a:pPr>
-            <a:r>
-              <a:t/>
-            </a:r>
             <a:endParaRPr/>
           </a:p>
         </p:txBody>
@@ -2402,18 +2502,19 @@
 </file>
 
 <file path=ppt/slideLayouts/slideLayout1.xml><?xml version="1.0" encoding="utf-8"?>
-<p:sldLayout xmlns:a="http://schemas.openxmlformats.org/drawingml/2006/main" xmlns:r="http://schemas.openxmlformats.org/officeDocument/2006/relationships" xmlns:mc="http://schemas.openxmlformats.org/markup-compatibility/2006" xmlns:mv="urn:schemas-microsoft-com:mac:vml" xmlns:p="http://schemas.openxmlformats.org/presentationml/2006/main" xmlns:c="http://schemas.openxmlformats.org/drawingml/2006/chart" xmlns:dgm="http://schemas.openxmlformats.org/drawingml/2006/diagram" xmlns:o="urn:schemas-microsoft-com:office:office" xmlns:v="urn:schemas-microsoft-com:vml" xmlns:pvml="urn:schemas-microsoft-com:office:powerpoint" xmlns:com="http://schemas.openxmlformats.org/drawingml/2006/compatibility" xmlns:p14="http://schemas.microsoft.com/office/powerpoint/2010/main" xmlns:p15="http://schemas.microsoft.com/office/powerpoint/2012/main" xmlns:ahyp="http://schemas.microsoft.com/office/drawing/2018/hyperlinkcolor" matchingName="Title slide" type="title">
+<p:sldLayout xmlns:a="http://schemas.openxmlformats.org/drawingml/2006/main" xmlns:r="http://schemas.openxmlformats.org/officeDocument/2006/relationships" xmlns:p="http://schemas.openxmlformats.org/presentationml/2006/main" matchingName="Title slide" type="title">
   <p:cSld name="TITLE">
     <p:bg>
       <p:bgPr>
         <a:solidFill>
           <a:schemeClr val="lt2"/>
         </a:solidFill>
+        <a:effectLst/>
       </p:bgPr>
     </p:bg>
     <p:spTree>
       <p:nvGrpSpPr>
-        <p:cNvPr id="9" name="Shape 9"/>
+        <p:cNvPr id="1" name="Shape 9"/>
         <p:cNvGrpSpPr/>
         <p:nvPr/>
       </p:nvGrpSpPr>
@@ -2447,12 +2548,12 @@
           </a:ln>
         </p:spPr>
         <p:txBody>
-          <a:bodyPr anchorCtr="0" anchor="ctr" bIns="91425" lIns="91425" spcFirstLastPara="1" rIns="91425" wrap="square" tIns="91425">
+          <a:bodyPr spcFirstLastPara="1" wrap="square" lIns="91425" tIns="91425" rIns="91425" bIns="91425" anchor="ctr" anchorCtr="0">
             <a:noAutofit/>
           </a:bodyPr>
           <a:lstStyle/>
           <a:p>
-            <a:pPr indent="0" lvl="0" marL="0" rtl="0" algn="l">
+            <a:pPr marL="0" lvl="0" indent="0" algn="l" rtl="0">
               <a:spcBef>
                 <a:spcPts val="0"/>
               </a:spcBef>
@@ -2461,9 +2562,6 @@
               </a:spcAft>
               <a:buNone/>
             </a:pPr>
-            <a:r>
-              <a:t/>
-            </a:r>
             <a:endParaRPr/>
           </a:p>
         </p:txBody>
@@ -2504,12 +2602,12 @@
             </a:ln>
           </p:spPr>
           <p:txBody>
-            <a:bodyPr anchorCtr="0" anchor="ctr" bIns="91425" lIns="91425" spcFirstLastPara="1" rIns="91425" wrap="square" tIns="91425">
+            <a:bodyPr spcFirstLastPara="1" wrap="square" lIns="91425" tIns="91425" rIns="91425" bIns="91425" anchor="ctr" anchorCtr="0">
               <a:noAutofit/>
             </a:bodyPr>
             <a:lstStyle/>
             <a:p>
-              <a:pPr indent="0" lvl="0" marL="0" rtl="0" algn="l">
+              <a:pPr marL="0" lvl="0" indent="0" algn="l" rtl="0">
                 <a:spcBef>
                   <a:spcPts val="0"/>
                 </a:spcBef>
@@ -2518,9 +2616,6 @@
                 </a:spcAft>
                 <a:buNone/>
               </a:pPr>
-              <a:r>
-                <a:t/>
-              </a:r>
               <a:endParaRPr/>
             </a:p>
           </p:txBody>
@@ -2547,12 +2642,12 @@
             </a:ln>
           </p:spPr>
           <p:txBody>
-            <a:bodyPr anchorCtr="0" anchor="ctr" bIns="91425" lIns="91425" spcFirstLastPara="1" rIns="91425" wrap="square" tIns="91425">
+            <a:bodyPr spcFirstLastPara="1" wrap="square" lIns="91425" tIns="91425" rIns="91425" bIns="91425" anchor="ctr" anchorCtr="0">
               <a:noAutofit/>
             </a:bodyPr>
             <a:lstStyle/>
             <a:p>
-              <a:pPr indent="0" lvl="0" marL="0" rtl="0" algn="l">
+              <a:pPr marL="0" lvl="0" indent="0" algn="l" rtl="0">
                 <a:spcBef>
                   <a:spcPts val="0"/>
                 </a:spcBef>
@@ -2561,9 +2656,6 @@
                 </a:spcAft>
                 <a:buNone/>
               </a:pPr>
-              <a:r>
-                <a:t/>
-              </a:r>
               <a:endParaRPr/>
             </a:p>
           </p:txBody>
@@ -2572,7 +2664,9 @@
       <p:sp>
         <p:nvSpPr>
           <p:cNvPr id="14" name="Google Shape;14;p2"/>
-          <p:cNvSpPr txBox="1"/>
+          <p:cNvSpPr txBox="1">
+            <a:spLocks noGrp="1"/>
+          </p:cNvSpPr>
           <p:nvPr>
             <p:ph type="ctrTitle"/>
           </p:nvPr>
@@ -2587,7 +2681,7 @@
           </a:prstGeom>
         </p:spPr>
         <p:txBody>
-          <a:bodyPr anchorCtr="0" anchor="t" bIns="91425" lIns="91425" spcFirstLastPara="1" rIns="91425" wrap="square" tIns="91425">
+          <a:bodyPr spcFirstLastPara="1" wrap="square" lIns="91425" tIns="91425" rIns="91425" bIns="91425" anchor="t" anchorCtr="0">
             <a:normAutofit/>
           </a:bodyPr>
           <a:lstStyle>
@@ -2691,15 +2785,19 @@
               <a:defRPr sz="4200"/>
             </a:lvl9pPr>
           </a:lstStyle>
-          <a:p/>
+          <a:p>
+            <a:endParaRPr/>
+          </a:p>
         </p:txBody>
       </p:sp>
       <p:sp>
         <p:nvSpPr>
           <p:cNvPr id="15" name="Google Shape;15;p2"/>
-          <p:cNvSpPr txBox="1"/>
+          <p:cNvSpPr txBox="1">
+            <a:spLocks noGrp="1"/>
+          </p:cNvSpPr>
           <p:nvPr>
-            <p:ph idx="1" type="subTitle"/>
+            <p:ph type="subTitle" idx="1"/>
           </p:nvPr>
         </p:nvSpPr>
         <p:spPr>
@@ -2712,7 +2810,7 @@
           </a:prstGeom>
         </p:spPr>
         <p:txBody>
-          <a:bodyPr anchorCtr="0" anchor="t" bIns="91425" lIns="91425" spcFirstLastPara="1" rIns="91425" wrap="square" tIns="91425">
+          <a:bodyPr spcFirstLastPara="1" wrap="square" lIns="91425" tIns="91425" rIns="91425" bIns="91425" anchor="t" anchorCtr="0">
             <a:normAutofit/>
           </a:bodyPr>
           <a:lstStyle>
@@ -2843,15 +2941,19 @@
               <a:defRPr sz="1600"/>
             </a:lvl9pPr>
           </a:lstStyle>
-          <a:p/>
+          <a:p>
+            <a:endParaRPr/>
+          </a:p>
         </p:txBody>
       </p:sp>
       <p:sp>
         <p:nvSpPr>
           <p:cNvPr id="16" name="Google Shape;16;p2"/>
-          <p:cNvSpPr txBox="1"/>
+          <p:cNvSpPr txBox="1">
+            <a:spLocks noGrp="1"/>
+          </p:cNvSpPr>
           <p:nvPr>
-            <p:ph idx="12" type="sldNum"/>
+            <p:ph type="sldNum" idx="12"/>
           </p:nvPr>
         </p:nvSpPr>
         <p:spPr>
@@ -2864,7 +2966,7 @@
           </a:prstGeom>
         </p:spPr>
         <p:txBody>
-          <a:bodyPr anchorCtr="0" anchor="ctr" bIns="91425" lIns="91425" spcFirstLastPara="1" rIns="91425" wrap="square" tIns="91425">
+          <a:bodyPr spcFirstLastPara="1" wrap="square" lIns="91425" tIns="91425" rIns="91425" bIns="91425" anchor="ctr" anchorCtr="0">
             <a:normAutofit/>
           </a:bodyPr>
           <a:lstStyle>
@@ -2906,7 +3008,7 @@
             </a:lvl9pPr>
           </a:lstStyle>
           <a:p>
-            <a:pPr indent="0" lvl="0" marL="0" rtl="0" algn="r">
+            <a:pPr marL="0" lvl="0" indent="0" algn="r" rtl="0">
               <a:spcBef>
                 <a:spcPts val="0"/>
               </a:spcBef>
@@ -2932,18 +3034,19 @@
 </file>
 
 <file path=ppt/slideLayouts/slideLayout10.xml><?xml version="1.0" encoding="utf-8"?>
-<p:sldLayout xmlns:a="http://schemas.openxmlformats.org/drawingml/2006/main" xmlns:r="http://schemas.openxmlformats.org/officeDocument/2006/relationships" xmlns:mc="http://schemas.openxmlformats.org/markup-compatibility/2006" xmlns:mv="urn:schemas-microsoft-com:mac:vml" xmlns:p="http://schemas.openxmlformats.org/presentationml/2006/main" xmlns:c="http://schemas.openxmlformats.org/drawingml/2006/chart" xmlns:dgm="http://schemas.openxmlformats.org/drawingml/2006/diagram" xmlns:o="urn:schemas-microsoft-com:office:office" xmlns:v="urn:schemas-microsoft-com:vml" xmlns:pvml="urn:schemas-microsoft-com:office:powerpoint" xmlns:com="http://schemas.openxmlformats.org/drawingml/2006/compatibility" xmlns:p14="http://schemas.microsoft.com/office/powerpoint/2010/main" xmlns:p15="http://schemas.microsoft.com/office/powerpoint/2012/main" xmlns:ahyp="http://schemas.microsoft.com/office/drawing/2018/hyperlinkcolor" matchingName="Big number">
+<p:sldLayout xmlns:a="http://schemas.openxmlformats.org/drawingml/2006/main" xmlns:r="http://schemas.openxmlformats.org/officeDocument/2006/relationships" xmlns:p="http://schemas.openxmlformats.org/presentationml/2006/main" matchingName="Big number">
   <p:cSld name="BIG_NUMBER">
     <p:bg>
       <p:bgPr>
         <a:solidFill>
           <a:schemeClr val="dk1"/>
         </a:solidFill>
+        <a:effectLst/>
       </p:bgPr>
     </p:bg>
     <p:spTree>
       <p:nvGrpSpPr>
-        <p:cNvPr id="73" name="Shape 73"/>
+        <p:cNvPr id="1" name="Shape 73"/>
         <p:cNvGrpSpPr/>
         <p:nvPr/>
       </p:nvGrpSpPr>
@@ -2991,12 +3094,12 @@
             </a:ln>
           </p:spPr>
           <p:txBody>
-            <a:bodyPr anchorCtr="0" anchor="ctr" bIns="91425" lIns="91425" spcFirstLastPara="1" rIns="91425" wrap="square" tIns="91425">
+            <a:bodyPr spcFirstLastPara="1" wrap="square" lIns="91425" tIns="91425" rIns="91425" bIns="91425" anchor="ctr" anchorCtr="0">
               <a:noAutofit/>
             </a:bodyPr>
             <a:lstStyle/>
             <a:p>
-              <a:pPr indent="0" lvl="0" marL="0" rtl="0" algn="l">
+              <a:pPr marL="0" lvl="0" indent="0" algn="l" rtl="0">
                 <a:spcBef>
                   <a:spcPts val="0"/>
                 </a:spcBef>
@@ -3005,9 +3108,6 @@
                 </a:spcAft>
                 <a:buNone/>
               </a:pPr>
-              <a:r>
-                <a:t/>
-              </a:r>
               <a:endParaRPr/>
             </a:p>
           </p:txBody>
@@ -3034,12 +3134,12 @@
             </a:ln>
           </p:spPr>
           <p:txBody>
-            <a:bodyPr anchorCtr="0" anchor="ctr" bIns="91425" lIns="91425" spcFirstLastPara="1" rIns="91425" wrap="square" tIns="91425">
+            <a:bodyPr spcFirstLastPara="1" wrap="square" lIns="91425" tIns="91425" rIns="91425" bIns="91425" anchor="ctr" anchorCtr="0">
               <a:noAutofit/>
             </a:bodyPr>
             <a:lstStyle/>
             <a:p>
-              <a:pPr indent="0" lvl="0" marL="0" rtl="0" algn="l">
+              <a:pPr marL="0" lvl="0" indent="0" algn="l" rtl="0">
                 <a:spcBef>
                   <a:spcPts val="0"/>
                 </a:spcBef>
@@ -3048,9 +3148,6 @@
                 </a:spcAft>
                 <a:buNone/>
               </a:pPr>
-              <a:r>
-                <a:t/>
-              </a:r>
               <a:endParaRPr/>
             </a:p>
           </p:txBody>
@@ -3059,9 +3156,11 @@
       <p:sp>
         <p:nvSpPr>
           <p:cNvPr id="77" name="Google Shape;77;p11"/>
-          <p:cNvSpPr txBox="1"/>
+          <p:cNvSpPr txBox="1">
+            <a:spLocks noGrp="1"/>
+          </p:cNvSpPr>
           <p:nvPr>
-            <p:ph hasCustomPrompt="1" type="title"/>
+            <p:ph type="title" hasCustomPrompt="1"/>
           </p:nvPr>
         </p:nvSpPr>
         <p:spPr>
@@ -3074,7 +3173,7 @@
           </a:prstGeom>
         </p:spPr>
         <p:txBody>
-          <a:bodyPr anchorCtr="0" anchor="t" bIns="91425" lIns="91425" spcFirstLastPara="1" rIns="91425" wrap="square" tIns="91425">
+          <a:bodyPr spcFirstLastPara="1" wrap="square" lIns="91425" tIns="91425" rIns="91425" bIns="91425" anchor="t" anchorCtr="0">
             <a:normAutofit/>
           </a:bodyPr>
           <a:lstStyle>
@@ -3251,9 +3350,11 @@
       <p:sp>
         <p:nvSpPr>
           <p:cNvPr id="78" name="Google Shape;78;p11"/>
-          <p:cNvSpPr txBox="1"/>
+          <p:cNvSpPr txBox="1">
+            <a:spLocks noGrp="1"/>
+          </p:cNvSpPr>
           <p:nvPr>
-            <p:ph idx="1" type="body"/>
+            <p:ph type="body" idx="1"/>
           </p:nvPr>
         </p:nvSpPr>
         <p:spPr>
@@ -3266,11 +3367,11 @@
           </a:prstGeom>
         </p:spPr>
         <p:txBody>
-          <a:bodyPr anchorCtr="0" anchor="t" bIns="91425" lIns="91425" spcFirstLastPara="1" rIns="91425" wrap="square" tIns="91425">
+          <a:bodyPr spcFirstLastPara="1" wrap="square" lIns="91425" tIns="91425" rIns="91425" bIns="91425" anchor="t" anchorCtr="0">
             <a:normAutofit/>
           </a:bodyPr>
           <a:lstStyle>
-            <a:lvl1pPr indent="-311150" lvl="0" marL="457200">
+            <a:lvl1pPr marL="457200" lvl="0" indent="-311150">
               <a:spcBef>
                 <a:spcPts val="0"/>
               </a:spcBef>
@@ -3288,7 +3389,7 @@
                 </a:solidFill>
               </a:defRPr>
             </a:lvl1pPr>
-            <a:lvl2pPr indent="-298450" lvl="1" marL="914400">
+            <a:lvl2pPr marL="914400" lvl="1" indent="-298450">
               <a:spcBef>
                 <a:spcPts val="0"/>
               </a:spcBef>
@@ -3306,7 +3407,7 @@
                 </a:solidFill>
               </a:defRPr>
             </a:lvl2pPr>
-            <a:lvl3pPr indent="-298450" lvl="2" marL="1371600">
+            <a:lvl3pPr marL="1371600" lvl="2" indent="-298450">
               <a:spcBef>
                 <a:spcPts val="0"/>
               </a:spcBef>
@@ -3324,7 +3425,7 @@
                 </a:solidFill>
               </a:defRPr>
             </a:lvl3pPr>
-            <a:lvl4pPr indent="-298450" lvl="3" marL="1828800">
+            <a:lvl4pPr marL="1828800" lvl="3" indent="-298450">
               <a:spcBef>
                 <a:spcPts val="0"/>
               </a:spcBef>
@@ -3342,7 +3443,7 @@
                 </a:solidFill>
               </a:defRPr>
             </a:lvl4pPr>
-            <a:lvl5pPr indent="-298450" lvl="4" marL="2286000">
+            <a:lvl5pPr marL="2286000" lvl="4" indent="-298450">
               <a:spcBef>
                 <a:spcPts val="0"/>
               </a:spcBef>
@@ -3360,7 +3461,7 @@
                 </a:solidFill>
               </a:defRPr>
             </a:lvl5pPr>
-            <a:lvl6pPr indent="-298450" lvl="5" marL="2743200">
+            <a:lvl6pPr marL="2743200" lvl="5" indent="-298450">
               <a:spcBef>
                 <a:spcPts val="0"/>
               </a:spcBef>
@@ -3378,7 +3479,7 @@
                 </a:solidFill>
               </a:defRPr>
             </a:lvl6pPr>
-            <a:lvl7pPr indent="-298450" lvl="6" marL="3200400">
+            <a:lvl7pPr marL="3200400" lvl="6" indent="-298450">
               <a:spcBef>
                 <a:spcPts val="0"/>
               </a:spcBef>
@@ -3396,7 +3497,7 @@
                 </a:solidFill>
               </a:defRPr>
             </a:lvl7pPr>
-            <a:lvl8pPr indent="-298450" lvl="7" marL="3657600">
+            <a:lvl8pPr marL="3657600" lvl="7" indent="-298450">
               <a:spcBef>
                 <a:spcPts val="0"/>
               </a:spcBef>
@@ -3414,7 +3515,7 @@
                 </a:solidFill>
               </a:defRPr>
             </a:lvl8pPr>
-            <a:lvl9pPr indent="-298450" lvl="8" marL="4114800">
+            <a:lvl9pPr marL="4114800" lvl="8" indent="-298450">
               <a:spcBef>
                 <a:spcPts val="0"/>
               </a:spcBef>
@@ -3433,15 +3534,19 @@
               </a:defRPr>
             </a:lvl9pPr>
           </a:lstStyle>
-          <a:p/>
+          <a:p>
+            <a:endParaRPr/>
+          </a:p>
         </p:txBody>
       </p:sp>
       <p:sp>
         <p:nvSpPr>
           <p:cNvPr id="79" name="Google Shape;79;p11"/>
-          <p:cNvSpPr txBox="1"/>
+          <p:cNvSpPr txBox="1">
+            <a:spLocks noGrp="1"/>
+          </p:cNvSpPr>
           <p:nvPr>
-            <p:ph idx="12" type="sldNum"/>
+            <p:ph type="sldNum" idx="12"/>
           </p:nvPr>
         </p:nvSpPr>
         <p:spPr>
@@ -3454,7 +3559,7 @@
           </a:prstGeom>
         </p:spPr>
         <p:txBody>
-          <a:bodyPr anchorCtr="0" anchor="ctr" bIns="91425" lIns="91425" spcFirstLastPara="1" rIns="91425" wrap="square" tIns="91425">
+          <a:bodyPr spcFirstLastPara="1" wrap="square" lIns="91425" tIns="91425" rIns="91425" bIns="91425" anchor="ctr" anchorCtr="0">
             <a:normAutofit/>
           </a:bodyPr>
           <a:lstStyle>
@@ -3532,7 +3637,7 @@
             </a:lvl9pPr>
           </a:lstStyle>
           <a:p>
-            <a:pPr indent="0" lvl="0" marL="0" rtl="0" algn="r">
+            <a:pPr marL="0" lvl="0" indent="0" algn="r" rtl="0">
               <a:spcBef>
                 <a:spcPts val="0"/>
               </a:spcBef>
@@ -3558,11 +3663,11 @@
 </file>
 
 <file path=ppt/slideLayouts/slideLayout11.xml><?xml version="1.0" encoding="utf-8"?>
-<p:sldLayout xmlns:a="http://schemas.openxmlformats.org/drawingml/2006/main" xmlns:r="http://schemas.openxmlformats.org/officeDocument/2006/relationships" xmlns:mc="http://schemas.openxmlformats.org/markup-compatibility/2006" xmlns:mv="urn:schemas-microsoft-com:mac:vml" xmlns:p="http://schemas.openxmlformats.org/presentationml/2006/main" xmlns:c="http://schemas.openxmlformats.org/drawingml/2006/chart" xmlns:dgm="http://schemas.openxmlformats.org/drawingml/2006/diagram" xmlns:o="urn:schemas-microsoft-com:office:office" xmlns:v="urn:schemas-microsoft-com:vml" xmlns:pvml="urn:schemas-microsoft-com:office:powerpoint" xmlns:com="http://schemas.openxmlformats.org/drawingml/2006/compatibility" xmlns:p14="http://schemas.microsoft.com/office/powerpoint/2010/main" xmlns:p15="http://schemas.microsoft.com/office/powerpoint/2012/main" xmlns:ahyp="http://schemas.microsoft.com/office/drawing/2018/hyperlinkcolor" matchingName="Blank" type="blank">
+<p:sldLayout xmlns:a="http://schemas.openxmlformats.org/drawingml/2006/main" xmlns:r="http://schemas.openxmlformats.org/officeDocument/2006/relationships" xmlns:p="http://schemas.openxmlformats.org/presentationml/2006/main" matchingName="Blank" type="blank">
   <p:cSld name="BLANK">
     <p:spTree>
       <p:nvGrpSpPr>
-        <p:cNvPr id="80" name="Shape 80"/>
+        <p:cNvPr id="1" name="Shape 80"/>
         <p:cNvGrpSpPr/>
         <p:nvPr/>
       </p:nvGrpSpPr>
@@ -3577,9 +3682,11 @@
       <p:sp>
         <p:nvSpPr>
           <p:cNvPr id="81" name="Google Shape;81;p12"/>
-          <p:cNvSpPr txBox="1"/>
+          <p:cNvSpPr txBox="1">
+            <a:spLocks noGrp="1"/>
+          </p:cNvSpPr>
           <p:nvPr>
-            <p:ph idx="12" type="sldNum"/>
+            <p:ph type="sldNum" idx="12"/>
           </p:nvPr>
         </p:nvSpPr>
         <p:spPr>
@@ -3592,7 +3699,7 @@
           </a:prstGeom>
         </p:spPr>
         <p:txBody>
-          <a:bodyPr anchorCtr="0" anchor="ctr" bIns="91425" lIns="91425" spcFirstLastPara="1" rIns="91425" wrap="square" tIns="91425">
+          <a:bodyPr spcFirstLastPara="1" wrap="square" lIns="91425" tIns="91425" rIns="91425" bIns="91425" anchor="ctr" anchorCtr="0">
             <a:normAutofit/>
           </a:bodyPr>
           <a:lstStyle>
@@ -3634,7 +3741,7 @@
             </a:lvl9pPr>
           </a:lstStyle>
           <a:p>
-            <a:pPr indent="0" lvl="0" marL="0" rtl="0" algn="r">
+            <a:pPr marL="0" lvl="0" indent="0" algn="r" rtl="0">
               <a:spcBef>
                 <a:spcPts val="0"/>
               </a:spcBef>
@@ -3660,18 +3767,19 @@
 </file>
 
 <file path=ppt/slideLayouts/slideLayout2.xml><?xml version="1.0" encoding="utf-8"?>
-<p:sldLayout xmlns:a="http://schemas.openxmlformats.org/drawingml/2006/main" xmlns:r="http://schemas.openxmlformats.org/officeDocument/2006/relationships" xmlns:mc="http://schemas.openxmlformats.org/markup-compatibility/2006" xmlns:mv="urn:schemas-microsoft-com:mac:vml" xmlns:p="http://schemas.openxmlformats.org/presentationml/2006/main" xmlns:c="http://schemas.openxmlformats.org/drawingml/2006/chart" xmlns:dgm="http://schemas.openxmlformats.org/drawingml/2006/diagram" xmlns:o="urn:schemas-microsoft-com:office:office" xmlns:v="urn:schemas-microsoft-com:vml" xmlns:pvml="urn:schemas-microsoft-com:office:powerpoint" xmlns:com="http://schemas.openxmlformats.org/drawingml/2006/compatibility" xmlns:p14="http://schemas.microsoft.com/office/powerpoint/2010/main" xmlns:p15="http://schemas.microsoft.com/office/powerpoint/2012/main" xmlns:ahyp="http://schemas.microsoft.com/office/drawing/2018/hyperlinkcolor" matchingName="Section header" type="secHead">
+<p:sldLayout xmlns:a="http://schemas.openxmlformats.org/drawingml/2006/main" xmlns:r="http://schemas.openxmlformats.org/officeDocument/2006/relationships" xmlns:p="http://schemas.openxmlformats.org/presentationml/2006/main" matchingName="Section header" type="secHead">
   <p:cSld name="SECTION_HEADER">
     <p:bg>
       <p:bgPr>
         <a:solidFill>
           <a:schemeClr val="dk1"/>
         </a:solidFill>
+        <a:effectLst/>
       </p:bgPr>
     </p:bg>
     <p:spTree>
       <p:nvGrpSpPr>
-        <p:cNvPr id="17" name="Shape 17"/>
+        <p:cNvPr id="1" name="Shape 17"/>
         <p:cNvGrpSpPr/>
         <p:nvPr/>
       </p:nvGrpSpPr>
@@ -3719,12 +3827,12 @@
             </a:ln>
           </p:spPr>
           <p:txBody>
-            <a:bodyPr anchorCtr="0" anchor="ctr" bIns="91425" lIns="91425" spcFirstLastPara="1" rIns="91425" wrap="square" tIns="91425">
+            <a:bodyPr spcFirstLastPara="1" wrap="square" lIns="91425" tIns="91425" rIns="91425" bIns="91425" anchor="ctr" anchorCtr="0">
               <a:noAutofit/>
             </a:bodyPr>
             <a:lstStyle/>
             <a:p>
-              <a:pPr indent="0" lvl="0" marL="0" rtl="0" algn="l">
+              <a:pPr marL="0" lvl="0" indent="0" algn="l" rtl="0">
                 <a:spcBef>
                   <a:spcPts val="0"/>
                 </a:spcBef>
@@ -3733,9 +3841,6 @@
                 </a:spcAft>
                 <a:buNone/>
               </a:pPr>
-              <a:r>
-                <a:t/>
-              </a:r>
               <a:endParaRPr/>
             </a:p>
           </p:txBody>
@@ -3762,12 +3867,12 @@
             </a:ln>
           </p:spPr>
           <p:txBody>
-            <a:bodyPr anchorCtr="0" anchor="ctr" bIns="91425" lIns="91425" spcFirstLastPara="1" rIns="91425" wrap="square" tIns="91425">
+            <a:bodyPr spcFirstLastPara="1" wrap="square" lIns="91425" tIns="91425" rIns="91425" bIns="91425" anchor="ctr" anchorCtr="0">
               <a:noAutofit/>
             </a:bodyPr>
             <a:lstStyle/>
             <a:p>
-              <a:pPr indent="0" lvl="0" marL="0" rtl="0" algn="l">
+              <a:pPr marL="0" lvl="0" indent="0" algn="l" rtl="0">
                 <a:spcBef>
                   <a:spcPts val="0"/>
                 </a:spcBef>
@@ -3776,9 +3881,6 @@
                 </a:spcAft>
                 <a:buNone/>
               </a:pPr>
-              <a:r>
-                <a:t/>
-              </a:r>
               <a:endParaRPr/>
             </a:p>
           </p:txBody>
@@ -3787,7 +3889,9 @@
       <p:sp>
         <p:nvSpPr>
           <p:cNvPr id="21" name="Google Shape;21;p3"/>
-          <p:cNvSpPr txBox="1"/>
+          <p:cNvSpPr txBox="1">
+            <a:spLocks noGrp="1"/>
+          </p:cNvSpPr>
           <p:nvPr>
             <p:ph type="title"/>
           </p:nvPr>
@@ -3802,7 +3906,7 @@
           </a:prstGeom>
         </p:spPr>
         <p:txBody>
-          <a:bodyPr anchorCtr="0" anchor="t" bIns="91425" lIns="91425" spcFirstLastPara="1" rIns="91425" wrap="square" tIns="91425">
+          <a:bodyPr spcFirstLastPara="1" wrap="square" lIns="91425" tIns="91425" rIns="91425" bIns="91425" anchor="t" anchorCtr="0">
             <a:normAutofit/>
           </a:bodyPr>
           <a:lstStyle>
@@ -3969,15 +4073,19 @@
               </a:defRPr>
             </a:lvl9pPr>
           </a:lstStyle>
-          <a:p/>
+          <a:p>
+            <a:endParaRPr/>
+          </a:p>
         </p:txBody>
       </p:sp>
       <p:sp>
         <p:nvSpPr>
           <p:cNvPr id="22" name="Google Shape;22;p3"/>
-          <p:cNvSpPr txBox="1"/>
+          <p:cNvSpPr txBox="1">
+            <a:spLocks noGrp="1"/>
+          </p:cNvSpPr>
           <p:nvPr>
-            <p:ph idx="12" type="sldNum"/>
+            <p:ph type="sldNum" idx="12"/>
           </p:nvPr>
         </p:nvSpPr>
         <p:spPr>
@@ -3990,7 +4098,7 @@
           </a:prstGeom>
         </p:spPr>
         <p:txBody>
-          <a:bodyPr anchorCtr="0" anchor="ctr" bIns="91425" lIns="91425" spcFirstLastPara="1" rIns="91425" wrap="square" tIns="91425">
+          <a:bodyPr spcFirstLastPara="1" wrap="square" lIns="91425" tIns="91425" rIns="91425" bIns="91425" anchor="ctr" anchorCtr="0">
             <a:normAutofit/>
           </a:bodyPr>
           <a:lstStyle>
@@ -4068,7 +4176,7 @@
             </a:lvl9pPr>
           </a:lstStyle>
           <a:p>
-            <a:pPr indent="0" lvl="0" marL="0" rtl="0" algn="r">
+            <a:pPr marL="0" lvl="0" indent="0" algn="r" rtl="0">
               <a:spcBef>
                 <a:spcPts val="0"/>
               </a:spcBef>
@@ -4094,11 +4202,11 @@
 </file>
 
 <file path=ppt/slideLayouts/slideLayout3.xml><?xml version="1.0" encoding="utf-8"?>
-<p:sldLayout xmlns:a="http://schemas.openxmlformats.org/drawingml/2006/main" xmlns:r="http://schemas.openxmlformats.org/officeDocument/2006/relationships" xmlns:mc="http://schemas.openxmlformats.org/markup-compatibility/2006" xmlns:mv="urn:schemas-microsoft-com:mac:vml" xmlns:p="http://schemas.openxmlformats.org/presentationml/2006/main" xmlns:c="http://schemas.openxmlformats.org/drawingml/2006/chart" xmlns:dgm="http://schemas.openxmlformats.org/drawingml/2006/diagram" xmlns:o="urn:schemas-microsoft-com:office:office" xmlns:v="urn:schemas-microsoft-com:vml" xmlns:pvml="urn:schemas-microsoft-com:office:powerpoint" xmlns:com="http://schemas.openxmlformats.org/drawingml/2006/compatibility" xmlns:p14="http://schemas.microsoft.com/office/powerpoint/2010/main" xmlns:p15="http://schemas.microsoft.com/office/powerpoint/2012/main" xmlns:ahyp="http://schemas.microsoft.com/office/drawing/2018/hyperlinkcolor" matchingName="Title and body" type="tx">
+<p:sldLayout xmlns:a="http://schemas.openxmlformats.org/drawingml/2006/main" xmlns:r="http://schemas.openxmlformats.org/officeDocument/2006/relationships" xmlns:p="http://schemas.openxmlformats.org/presentationml/2006/main" matchingName="Title and body" type="tx">
   <p:cSld name="TITLE_AND_BODY">
     <p:spTree>
       <p:nvGrpSpPr>
-        <p:cNvPr id="23" name="Shape 23"/>
+        <p:cNvPr id="1" name="Shape 23"/>
         <p:cNvGrpSpPr/>
         <p:nvPr/>
       </p:nvGrpSpPr>
@@ -4132,12 +4240,12 @@
           </a:ln>
         </p:spPr>
         <p:txBody>
-          <a:bodyPr anchorCtr="0" anchor="ctr" bIns="91425" lIns="91425" spcFirstLastPara="1" rIns="91425" wrap="square" tIns="91425">
+          <a:bodyPr spcFirstLastPara="1" wrap="square" lIns="91425" tIns="91425" rIns="91425" bIns="91425" anchor="ctr" anchorCtr="0">
             <a:noAutofit/>
           </a:bodyPr>
           <a:lstStyle/>
           <a:p>
-            <a:pPr indent="0" lvl="0" marL="0" rtl="0" algn="l">
+            <a:pPr marL="0" lvl="0" indent="0" algn="l" rtl="0">
               <a:spcBef>
                 <a:spcPts val="0"/>
               </a:spcBef>
@@ -4146,9 +4254,6 @@
               </a:spcAft>
               <a:buNone/>
             </a:pPr>
-            <a:r>
-              <a:t/>
-            </a:r>
             <a:endParaRPr/>
           </a:p>
         </p:txBody>
@@ -4189,12 +4294,12 @@
             </a:ln>
           </p:spPr>
           <p:txBody>
-            <a:bodyPr anchorCtr="0" anchor="ctr" bIns="91425" lIns="91425" spcFirstLastPara="1" rIns="91425" wrap="square" tIns="91425">
+            <a:bodyPr spcFirstLastPara="1" wrap="square" lIns="91425" tIns="91425" rIns="91425" bIns="91425" anchor="ctr" anchorCtr="0">
               <a:noAutofit/>
             </a:bodyPr>
             <a:lstStyle/>
             <a:p>
-              <a:pPr indent="0" lvl="0" marL="0" rtl="0" algn="l">
+              <a:pPr marL="0" lvl="0" indent="0" algn="l" rtl="0">
                 <a:spcBef>
                   <a:spcPts val="0"/>
                 </a:spcBef>
@@ -4203,9 +4308,6 @@
                 </a:spcAft>
                 <a:buNone/>
               </a:pPr>
-              <a:r>
-                <a:t/>
-              </a:r>
               <a:endParaRPr/>
             </a:p>
           </p:txBody>
@@ -4232,12 +4334,12 @@
             </a:ln>
           </p:spPr>
           <p:txBody>
-            <a:bodyPr anchorCtr="0" anchor="ctr" bIns="91425" lIns="91425" spcFirstLastPara="1" rIns="91425" wrap="square" tIns="91425">
+            <a:bodyPr spcFirstLastPara="1" wrap="square" lIns="91425" tIns="91425" rIns="91425" bIns="91425" anchor="ctr" anchorCtr="0">
               <a:noAutofit/>
             </a:bodyPr>
             <a:lstStyle/>
             <a:p>
-              <a:pPr indent="0" lvl="0" marL="0" rtl="0" algn="l">
+              <a:pPr marL="0" lvl="0" indent="0" algn="l" rtl="0">
                 <a:spcBef>
                   <a:spcPts val="0"/>
                 </a:spcBef>
@@ -4246,9 +4348,6 @@
                 </a:spcAft>
                 <a:buNone/>
               </a:pPr>
-              <a:r>
-                <a:t/>
-              </a:r>
               <a:endParaRPr/>
             </a:p>
           </p:txBody>
@@ -4257,7 +4356,9 @@
       <p:sp>
         <p:nvSpPr>
           <p:cNvPr id="28" name="Google Shape;28;p4"/>
-          <p:cNvSpPr txBox="1"/>
+          <p:cNvSpPr txBox="1">
+            <a:spLocks noGrp="1"/>
+          </p:cNvSpPr>
           <p:nvPr>
             <p:ph type="title"/>
           </p:nvPr>
@@ -4272,7 +4373,7 @@
           </a:prstGeom>
         </p:spPr>
         <p:txBody>
-          <a:bodyPr anchorCtr="0" anchor="t" bIns="91425" lIns="91425" spcFirstLastPara="1" rIns="91425" wrap="square" tIns="91425">
+          <a:bodyPr spcFirstLastPara="1" wrap="square" lIns="91425" tIns="91425" rIns="91425" bIns="91425" anchor="t" anchorCtr="0">
             <a:normAutofit/>
           </a:bodyPr>
           <a:lstStyle>
@@ -4376,15 +4477,19 @@
               <a:defRPr sz="2600"/>
             </a:lvl9pPr>
           </a:lstStyle>
-          <a:p/>
+          <a:p>
+            <a:endParaRPr/>
+          </a:p>
         </p:txBody>
       </p:sp>
       <p:sp>
         <p:nvSpPr>
           <p:cNvPr id="29" name="Google Shape;29;p4"/>
-          <p:cNvSpPr txBox="1"/>
+          <p:cNvSpPr txBox="1">
+            <a:spLocks noGrp="1"/>
+          </p:cNvSpPr>
           <p:nvPr>
-            <p:ph idx="1" type="body"/>
+            <p:ph type="body" idx="1"/>
           </p:nvPr>
         </p:nvSpPr>
         <p:spPr>
@@ -4397,11 +4502,11 @@
           </a:prstGeom>
         </p:spPr>
         <p:txBody>
-          <a:bodyPr anchorCtr="0" anchor="t" bIns="91425" lIns="91425" spcFirstLastPara="1" rIns="91425" wrap="square" tIns="91425">
+          <a:bodyPr spcFirstLastPara="1" wrap="square" lIns="91425" tIns="91425" rIns="91425" bIns="91425" anchor="t" anchorCtr="0">
             <a:normAutofit/>
           </a:bodyPr>
           <a:lstStyle>
-            <a:lvl1pPr indent="-311150" lvl="0" marL="457200">
+            <a:lvl1pPr marL="457200" lvl="0" indent="-311150">
               <a:spcBef>
                 <a:spcPts val="0"/>
               </a:spcBef>
@@ -4412,7 +4517,7 @@
               <a:buChar char="●"/>
               <a:defRPr/>
             </a:lvl1pPr>
-            <a:lvl2pPr indent="-298450" lvl="1" marL="914400">
+            <a:lvl2pPr marL="914400" lvl="1" indent="-298450">
               <a:spcBef>
                 <a:spcPts val="0"/>
               </a:spcBef>
@@ -4423,7 +4528,7 @@
               <a:buChar char="○"/>
               <a:defRPr/>
             </a:lvl2pPr>
-            <a:lvl3pPr indent="-298450" lvl="2" marL="1371600">
+            <a:lvl3pPr marL="1371600" lvl="2" indent="-298450">
               <a:spcBef>
                 <a:spcPts val="0"/>
               </a:spcBef>
@@ -4434,7 +4539,7 @@
               <a:buChar char="■"/>
               <a:defRPr/>
             </a:lvl3pPr>
-            <a:lvl4pPr indent="-298450" lvl="3" marL="1828800">
+            <a:lvl4pPr marL="1828800" lvl="3" indent="-298450">
               <a:spcBef>
                 <a:spcPts val="0"/>
               </a:spcBef>
@@ -4445,7 +4550,7 @@
               <a:buChar char="●"/>
               <a:defRPr/>
             </a:lvl4pPr>
-            <a:lvl5pPr indent="-298450" lvl="4" marL="2286000">
+            <a:lvl5pPr marL="2286000" lvl="4" indent="-298450">
               <a:spcBef>
                 <a:spcPts val="0"/>
               </a:spcBef>
@@ -4456,7 +4561,7 @@
               <a:buChar char="○"/>
               <a:defRPr/>
             </a:lvl5pPr>
-            <a:lvl6pPr indent="-298450" lvl="5" marL="2743200">
+            <a:lvl6pPr marL="2743200" lvl="5" indent="-298450">
               <a:spcBef>
                 <a:spcPts val="0"/>
               </a:spcBef>
@@ -4467,7 +4572,7 @@
               <a:buChar char="■"/>
               <a:defRPr/>
             </a:lvl6pPr>
-            <a:lvl7pPr indent="-298450" lvl="6" marL="3200400">
+            <a:lvl7pPr marL="3200400" lvl="6" indent="-298450">
               <a:spcBef>
                 <a:spcPts val="0"/>
               </a:spcBef>
@@ -4478,7 +4583,7 @@
               <a:buChar char="●"/>
               <a:defRPr/>
             </a:lvl7pPr>
-            <a:lvl8pPr indent="-298450" lvl="7" marL="3657600">
+            <a:lvl8pPr marL="3657600" lvl="7" indent="-298450">
               <a:spcBef>
                 <a:spcPts val="0"/>
               </a:spcBef>
@@ -4489,7 +4594,7 @@
               <a:buChar char="○"/>
               <a:defRPr/>
             </a:lvl8pPr>
-            <a:lvl9pPr indent="-298450" lvl="8" marL="4114800">
+            <a:lvl9pPr marL="4114800" lvl="8" indent="-298450">
               <a:spcBef>
                 <a:spcPts val="0"/>
               </a:spcBef>
@@ -4501,15 +4606,19 @@
               <a:defRPr/>
             </a:lvl9pPr>
           </a:lstStyle>
-          <a:p/>
+          <a:p>
+            <a:endParaRPr/>
+          </a:p>
         </p:txBody>
       </p:sp>
       <p:sp>
         <p:nvSpPr>
           <p:cNvPr id="30" name="Google Shape;30;p4"/>
-          <p:cNvSpPr txBox="1"/>
+          <p:cNvSpPr txBox="1">
+            <a:spLocks noGrp="1"/>
+          </p:cNvSpPr>
           <p:nvPr>
-            <p:ph idx="12" type="sldNum"/>
+            <p:ph type="sldNum" idx="12"/>
           </p:nvPr>
         </p:nvSpPr>
         <p:spPr>
@@ -4522,7 +4631,7 @@
           </a:prstGeom>
         </p:spPr>
         <p:txBody>
-          <a:bodyPr anchorCtr="0" anchor="ctr" bIns="91425" lIns="91425" spcFirstLastPara="1" rIns="91425" wrap="square" tIns="91425">
+          <a:bodyPr spcFirstLastPara="1" wrap="square" lIns="91425" tIns="91425" rIns="91425" bIns="91425" anchor="ctr" anchorCtr="0">
             <a:normAutofit/>
           </a:bodyPr>
           <a:lstStyle>
@@ -4564,7 +4673,7 @@
             </a:lvl9pPr>
           </a:lstStyle>
           <a:p>
-            <a:pPr indent="0" lvl="0" marL="0" rtl="0" algn="r">
+            <a:pPr marL="0" lvl="0" indent="0" algn="r" rtl="0">
               <a:spcBef>
                 <a:spcPts val="0"/>
               </a:spcBef>
@@ -4590,11 +4699,11 @@
 </file>
 
 <file path=ppt/slideLayouts/slideLayout4.xml><?xml version="1.0" encoding="utf-8"?>
-<p:sldLayout xmlns:a="http://schemas.openxmlformats.org/drawingml/2006/main" xmlns:r="http://schemas.openxmlformats.org/officeDocument/2006/relationships" xmlns:mc="http://schemas.openxmlformats.org/markup-compatibility/2006" xmlns:mv="urn:schemas-microsoft-com:mac:vml" xmlns:p="http://schemas.openxmlformats.org/presentationml/2006/main" xmlns:c="http://schemas.openxmlformats.org/drawingml/2006/chart" xmlns:dgm="http://schemas.openxmlformats.org/drawingml/2006/diagram" xmlns:o="urn:schemas-microsoft-com:office:office" xmlns:v="urn:schemas-microsoft-com:vml" xmlns:pvml="urn:schemas-microsoft-com:office:powerpoint" xmlns:com="http://schemas.openxmlformats.org/drawingml/2006/compatibility" xmlns:p14="http://schemas.microsoft.com/office/powerpoint/2010/main" xmlns:p15="http://schemas.microsoft.com/office/powerpoint/2012/main" xmlns:ahyp="http://schemas.microsoft.com/office/drawing/2018/hyperlinkcolor" matchingName="Title and two columns" type="twoColTx">
+<p:sldLayout xmlns:a="http://schemas.openxmlformats.org/drawingml/2006/main" xmlns:r="http://schemas.openxmlformats.org/officeDocument/2006/relationships" xmlns:p="http://schemas.openxmlformats.org/presentationml/2006/main" matchingName="Title and two columns" type="twoColTx">
   <p:cSld name="TITLE_AND_TWO_COLUMNS">
     <p:spTree>
       <p:nvGrpSpPr>
-        <p:cNvPr id="31" name="Shape 31"/>
+        <p:cNvPr id="1" name="Shape 31"/>
         <p:cNvGrpSpPr/>
         <p:nvPr/>
       </p:nvGrpSpPr>
@@ -4628,12 +4737,12 @@
           </a:ln>
         </p:spPr>
         <p:txBody>
-          <a:bodyPr anchorCtr="0" anchor="ctr" bIns="91425" lIns="91425" spcFirstLastPara="1" rIns="91425" wrap="square" tIns="91425">
+          <a:bodyPr spcFirstLastPara="1" wrap="square" lIns="91425" tIns="91425" rIns="91425" bIns="91425" anchor="ctr" anchorCtr="0">
             <a:noAutofit/>
           </a:bodyPr>
           <a:lstStyle/>
           <a:p>
-            <a:pPr indent="0" lvl="0" marL="0" rtl="0" algn="l">
+            <a:pPr marL="0" lvl="0" indent="0" algn="l" rtl="0">
               <a:spcBef>
                 <a:spcPts val="0"/>
               </a:spcBef>
@@ -4642,9 +4751,6 @@
               </a:spcAft>
               <a:buNone/>
             </a:pPr>
-            <a:r>
-              <a:t/>
-            </a:r>
             <a:endParaRPr/>
           </a:p>
         </p:txBody>
@@ -4685,12 +4791,12 @@
             </a:ln>
           </p:spPr>
           <p:txBody>
-            <a:bodyPr anchorCtr="0" anchor="ctr" bIns="91425" lIns="91425" spcFirstLastPara="1" rIns="91425" wrap="square" tIns="91425">
+            <a:bodyPr spcFirstLastPara="1" wrap="square" lIns="91425" tIns="91425" rIns="91425" bIns="91425" anchor="ctr" anchorCtr="0">
               <a:noAutofit/>
             </a:bodyPr>
             <a:lstStyle/>
             <a:p>
-              <a:pPr indent="0" lvl="0" marL="0" rtl="0" algn="l">
+              <a:pPr marL="0" lvl="0" indent="0" algn="l" rtl="0">
                 <a:spcBef>
                   <a:spcPts val="0"/>
                 </a:spcBef>
@@ -4699,9 +4805,6 @@
                 </a:spcAft>
                 <a:buNone/>
               </a:pPr>
-              <a:r>
-                <a:t/>
-              </a:r>
               <a:endParaRPr/>
             </a:p>
           </p:txBody>
@@ -4728,12 +4831,12 @@
             </a:ln>
           </p:spPr>
           <p:txBody>
-            <a:bodyPr anchorCtr="0" anchor="ctr" bIns="91425" lIns="91425" spcFirstLastPara="1" rIns="91425" wrap="square" tIns="91425">
+            <a:bodyPr spcFirstLastPara="1" wrap="square" lIns="91425" tIns="91425" rIns="91425" bIns="91425" anchor="ctr" anchorCtr="0">
               <a:noAutofit/>
             </a:bodyPr>
             <a:lstStyle/>
             <a:p>
-              <a:pPr indent="0" lvl="0" marL="0" rtl="0" algn="l">
+              <a:pPr marL="0" lvl="0" indent="0" algn="l" rtl="0">
                 <a:spcBef>
                   <a:spcPts val="0"/>
                 </a:spcBef>
@@ -4742,9 +4845,6 @@
                 </a:spcAft>
                 <a:buNone/>
               </a:pPr>
-              <a:r>
-                <a:t/>
-              </a:r>
               <a:endParaRPr/>
             </a:p>
           </p:txBody>
@@ -4753,7 +4853,9 @@
       <p:sp>
         <p:nvSpPr>
           <p:cNvPr id="36" name="Google Shape;36;p5"/>
-          <p:cNvSpPr txBox="1"/>
+          <p:cNvSpPr txBox="1">
+            <a:spLocks noGrp="1"/>
+          </p:cNvSpPr>
           <p:nvPr>
             <p:ph type="title"/>
           </p:nvPr>
@@ -4768,7 +4870,7 @@
           </a:prstGeom>
         </p:spPr>
         <p:txBody>
-          <a:bodyPr anchorCtr="0" anchor="t" bIns="91425" lIns="91425" spcFirstLastPara="1" rIns="91425" wrap="square" tIns="91425">
+          <a:bodyPr spcFirstLastPara="1" wrap="square" lIns="91425" tIns="91425" rIns="91425" bIns="91425" anchor="t" anchorCtr="0">
             <a:normAutofit/>
           </a:bodyPr>
           <a:lstStyle>
@@ -4872,15 +4974,19 @@
               <a:defRPr sz="2600"/>
             </a:lvl9pPr>
           </a:lstStyle>
-          <a:p/>
+          <a:p>
+            <a:endParaRPr/>
+          </a:p>
         </p:txBody>
       </p:sp>
       <p:sp>
         <p:nvSpPr>
           <p:cNvPr id="37" name="Google Shape;37;p5"/>
-          <p:cNvSpPr txBox="1"/>
+          <p:cNvSpPr txBox="1">
+            <a:spLocks noGrp="1"/>
+          </p:cNvSpPr>
           <p:nvPr>
-            <p:ph idx="1" type="body"/>
+            <p:ph type="body" idx="1"/>
           </p:nvPr>
         </p:nvSpPr>
         <p:spPr>
@@ -4893,11 +4999,11 @@
           </a:prstGeom>
         </p:spPr>
         <p:txBody>
-          <a:bodyPr anchorCtr="0" anchor="t" bIns="91425" lIns="91425" spcFirstLastPara="1" rIns="91425" wrap="square" tIns="91425">
+          <a:bodyPr spcFirstLastPara="1" wrap="square" lIns="91425" tIns="91425" rIns="91425" bIns="91425" anchor="t" anchorCtr="0">
             <a:normAutofit/>
           </a:bodyPr>
           <a:lstStyle>
-            <a:lvl1pPr indent="-311150" lvl="0" marL="457200">
+            <a:lvl1pPr marL="457200" lvl="0" indent="-311150">
               <a:spcBef>
                 <a:spcPts val="0"/>
               </a:spcBef>
@@ -4908,7 +5014,7 @@
               <a:buChar char="●"/>
               <a:defRPr/>
             </a:lvl1pPr>
-            <a:lvl2pPr indent="-298450" lvl="1" marL="914400">
+            <a:lvl2pPr marL="914400" lvl="1" indent="-298450">
               <a:spcBef>
                 <a:spcPts val="0"/>
               </a:spcBef>
@@ -4919,7 +5025,7 @@
               <a:buChar char="○"/>
               <a:defRPr/>
             </a:lvl2pPr>
-            <a:lvl3pPr indent="-298450" lvl="2" marL="1371600">
+            <a:lvl3pPr marL="1371600" lvl="2" indent="-298450">
               <a:spcBef>
                 <a:spcPts val="0"/>
               </a:spcBef>
@@ -4930,7 +5036,7 @@
               <a:buChar char="■"/>
               <a:defRPr/>
             </a:lvl3pPr>
-            <a:lvl4pPr indent="-298450" lvl="3" marL="1828800">
+            <a:lvl4pPr marL="1828800" lvl="3" indent="-298450">
               <a:spcBef>
                 <a:spcPts val="0"/>
               </a:spcBef>
@@ -4941,7 +5047,7 @@
               <a:buChar char="●"/>
               <a:defRPr/>
             </a:lvl4pPr>
-            <a:lvl5pPr indent="-298450" lvl="4" marL="2286000">
+            <a:lvl5pPr marL="2286000" lvl="4" indent="-298450">
               <a:spcBef>
                 <a:spcPts val="0"/>
               </a:spcBef>
@@ -4952,7 +5058,7 @@
               <a:buChar char="○"/>
               <a:defRPr/>
             </a:lvl5pPr>
-            <a:lvl6pPr indent="-298450" lvl="5" marL="2743200">
+            <a:lvl6pPr marL="2743200" lvl="5" indent="-298450">
               <a:spcBef>
                 <a:spcPts val="0"/>
               </a:spcBef>
@@ -4963,7 +5069,7 @@
               <a:buChar char="■"/>
               <a:defRPr/>
             </a:lvl6pPr>
-            <a:lvl7pPr indent="-298450" lvl="6" marL="3200400">
+            <a:lvl7pPr marL="3200400" lvl="6" indent="-298450">
               <a:spcBef>
                 <a:spcPts val="0"/>
               </a:spcBef>
@@ -4974,7 +5080,7 @@
               <a:buChar char="●"/>
               <a:defRPr/>
             </a:lvl7pPr>
-            <a:lvl8pPr indent="-298450" lvl="7" marL="3657600">
+            <a:lvl8pPr marL="3657600" lvl="7" indent="-298450">
               <a:spcBef>
                 <a:spcPts val="0"/>
               </a:spcBef>
@@ -4985,7 +5091,7 @@
               <a:buChar char="○"/>
               <a:defRPr/>
             </a:lvl8pPr>
-            <a:lvl9pPr indent="-298450" lvl="8" marL="4114800">
+            <a:lvl9pPr marL="4114800" lvl="8" indent="-298450">
               <a:spcBef>
                 <a:spcPts val="0"/>
               </a:spcBef>
@@ -4997,15 +5103,19 @@
               <a:defRPr/>
             </a:lvl9pPr>
           </a:lstStyle>
-          <a:p/>
+          <a:p>
+            <a:endParaRPr/>
+          </a:p>
         </p:txBody>
       </p:sp>
       <p:sp>
         <p:nvSpPr>
           <p:cNvPr id="38" name="Google Shape;38;p5"/>
-          <p:cNvSpPr txBox="1"/>
+          <p:cNvSpPr txBox="1">
+            <a:spLocks noGrp="1"/>
+          </p:cNvSpPr>
           <p:nvPr>
-            <p:ph idx="2" type="body"/>
+            <p:ph type="body" idx="2"/>
           </p:nvPr>
         </p:nvSpPr>
         <p:spPr>
@@ -5018,11 +5128,11 @@
           </a:prstGeom>
         </p:spPr>
         <p:txBody>
-          <a:bodyPr anchorCtr="0" anchor="t" bIns="91425" lIns="91425" spcFirstLastPara="1" rIns="91425" wrap="square" tIns="91425">
+          <a:bodyPr spcFirstLastPara="1" wrap="square" lIns="91425" tIns="91425" rIns="91425" bIns="91425" anchor="t" anchorCtr="0">
             <a:normAutofit/>
           </a:bodyPr>
           <a:lstStyle>
-            <a:lvl1pPr indent="-311150" lvl="0" marL="457200">
+            <a:lvl1pPr marL="457200" lvl="0" indent="-311150">
               <a:spcBef>
                 <a:spcPts val="0"/>
               </a:spcBef>
@@ -5033,7 +5143,7 @@
               <a:buChar char="●"/>
               <a:defRPr/>
             </a:lvl1pPr>
-            <a:lvl2pPr indent="-298450" lvl="1" marL="914400">
+            <a:lvl2pPr marL="914400" lvl="1" indent="-298450">
               <a:spcBef>
                 <a:spcPts val="0"/>
               </a:spcBef>
@@ -5044,7 +5154,7 @@
               <a:buChar char="○"/>
               <a:defRPr/>
             </a:lvl2pPr>
-            <a:lvl3pPr indent="-298450" lvl="2" marL="1371600">
+            <a:lvl3pPr marL="1371600" lvl="2" indent="-298450">
               <a:spcBef>
                 <a:spcPts val="0"/>
               </a:spcBef>
@@ -5055,7 +5165,7 @@
               <a:buChar char="■"/>
               <a:defRPr/>
             </a:lvl3pPr>
-            <a:lvl4pPr indent="-298450" lvl="3" marL="1828800">
+            <a:lvl4pPr marL="1828800" lvl="3" indent="-298450">
               <a:spcBef>
                 <a:spcPts val="0"/>
               </a:spcBef>
@@ -5066,7 +5176,7 @@
               <a:buChar char="●"/>
               <a:defRPr/>
             </a:lvl4pPr>
-            <a:lvl5pPr indent="-298450" lvl="4" marL="2286000">
+            <a:lvl5pPr marL="2286000" lvl="4" indent="-298450">
               <a:spcBef>
                 <a:spcPts val="0"/>
               </a:spcBef>
@@ -5077,7 +5187,7 @@
               <a:buChar char="○"/>
               <a:defRPr/>
             </a:lvl5pPr>
-            <a:lvl6pPr indent="-298450" lvl="5" marL="2743200">
+            <a:lvl6pPr marL="2743200" lvl="5" indent="-298450">
               <a:spcBef>
                 <a:spcPts val="0"/>
               </a:spcBef>
@@ -5088,7 +5198,7 @@
               <a:buChar char="■"/>
               <a:defRPr/>
             </a:lvl6pPr>
-            <a:lvl7pPr indent="-298450" lvl="6" marL="3200400">
+            <a:lvl7pPr marL="3200400" lvl="6" indent="-298450">
               <a:spcBef>
                 <a:spcPts val="0"/>
               </a:spcBef>
@@ -5099,7 +5209,7 @@
               <a:buChar char="●"/>
               <a:defRPr/>
             </a:lvl7pPr>
-            <a:lvl8pPr indent="-298450" lvl="7" marL="3657600">
+            <a:lvl8pPr marL="3657600" lvl="7" indent="-298450">
               <a:spcBef>
                 <a:spcPts val="0"/>
               </a:spcBef>
@@ -5110,7 +5220,7 @@
               <a:buChar char="○"/>
               <a:defRPr/>
             </a:lvl8pPr>
-            <a:lvl9pPr indent="-298450" lvl="8" marL="4114800">
+            <a:lvl9pPr marL="4114800" lvl="8" indent="-298450">
               <a:spcBef>
                 <a:spcPts val="0"/>
               </a:spcBef>
@@ -5122,15 +5232,19 @@
               <a:defRPr/>
             </a:lvl9pPr>
           </a:lstStyle>
-          <a:p/>
+          <a:p>
+            <a:endParaRPr/>
+          </a:p>
         </p:txBody>
       </p:sp>
       <p:sp>
         <p:nvSpPr>
           <p:cNvPr id="39" name="Google Shape;39;p5"/>
-          <p:cNvSpPr txBox="1"/>
+          <p:cNvSpPr txBox="1">
+            <a:spLocks noGrp="1"/>
+          </p:cNvSpPr>
           <p:nvPr>
-            <p:ph idx="12" type="sldNum"/>
+            <p:ph type="sldNum" idx="12"/>
           </p:nvPr>
         </p:nvSpPr>
         <p:spPr>
@@ -5143,7 +5257,7 @@
           </a:prstGeom>
         </p:spPr>
         <p:txBody>
-          <a:bodyPr anchorCtr="0" anchor="ctr" bIns="91425" lIns="91425" spcFirstLastPara="1" rIns="91425" wrap="square" tIns="91425">
+          <a:bodyPr spcFirstLastPara="1" wrap="square" lIns="91425" tIns="91425" rIns="91425" bIns="91425" anchor="ctr" anchorCtr="0">
             <a:normAutofit/>
           </a:bodyPr>
           <a:lstStyle>
@@ -5185,7 +5299,7 @@
             </a:lvl9pPr>
           </a:lstStyle>
           <a:p>
-            <a:pPr indent="0" lvl="0" marL="0" rtl="0" algn="r">
+            <a:pPr marL="0" lvl="0" indent="0" algn="r" rtl="0">
               <a:spcBef>
                 <a:spcPts val="0"/>
               </a:spcBef>
@@ -5211,11 +5325,11 @@
 </file>
 
 <file path=ppt/slideLayouts/slideLayout5.xml><?xml version="1.0" encoding="utf-8"?>
-<p:sldLayout xmlns:a="http://schemas.openxmlformats.org/drawingml/2006/main" xmlns:r="http://schemas.openxmlformats.org/officeDocument/2006/relationships" xmlns:mc="http://schemas.openxmlformats.org/markup-compatibility/2006" xmlns:mv="urn:schemas-microsoft-com:mac:vml" xmlns:p="http://schemas.openxmlformats.org/presentationml/2006/main" xmlns:c="http://schemas.openxmlformats.org/drawingml/2006/chart" xmlns:dgm="http://schemas.openxmlformats.org/drawingml/2006/diagram" xmlns:o="urn:schemas-microsoft-com:office:office" xmlns:v="urn:schemas-microsoft-com:vml" xmlns:pvml="urn:schemas-microsoft-com:office:powerpoint" xmlns:com="http://schemas.openxmlformats.org/drawingml/2006/compatibility" xmlns:p14="http://schemas.microsoft.com/office/powerpoint/2010/main" xmlns:p15="http://schemas.microsoft.com/office/powerpoint/2012/main" xmlns:ahyp="http://schemas.microsoft.com/office/drawing/2018/hyperlinkcolor" matchingName="Title only" type="titleOnly">
+<p:sldLayout xmlns:a="http://schemas.openxmlformats.org/drawingml/2006/main" xmlns:r="http://schemas.openxmlformats.org/officeDocument/2006/relationships" xmlns:p="http://schemas.openxmlformats.org/presentationml/2006/main" matchingName="Title only" type="titleOnly">
   <p:cSld name="TITLE_ONLY">
     <p:spTree>
       <p:nvGrpSpPr>
-        <p:cNvPr id="40" name="Shape 40"/>
+        <p:cNvPr id="1" name="Shape 40"/>
         <p:cNvGrpSpPr/>
         <p:nvPr/>
       </p:nvGrpSpPr>
@@ -5249,12 +5363,12 @@
           </a:ln>
         </p:spPr>
         <p:txBody>
-          <a:bodyPr anchorCtr="0" anchor="ctr" bIns="91425" lIns="91425" spcFirstLastPara="1" rIns="91425" wrap="square" tIns="91425">
+          <a:bodyPr spcFirstLastPara="1" wrap="square" lIns="91425" tIns="91425" rIns="91425" bIns="91425" anchor="ctr" anchorCtr="0">
             <a:noAutofit/>
           </a:bodyPr>
           <a:lstStyle/>
           <a:p>
-            <a:pPr indent="0" lvl="0" marL="0" rtl="0" algn="l">
+            <a:pPr marL="0" lvl="0" indent="0" algn="l" rtl="0">
               <a:spcBef>
                 <a:spcPts val="0"/>
               </a:spcBef>
@@ -5263,9 +5377,6 @@
               </a:spcAft>
               <a:buNone/>
             </a:pPr>
-            <a:r>
-              <a:t/>
-            </a:r>
             <a:endParaRPr/>
           </a:p>
         </p:txBody>
@@ -5306,12 +5417,12 @@
             </a:ln>
           </p:spPr>
           <p:txBody>
-            <a:bodyPr anchorCtr="0" anchor="ctr" bIns="91425" lIns="91425" spcFirstLastPara="1" rIns="91425" wrap="square" tIns="91425">
+            <a:bodyPr spcFirstLastPara="1" wrap="square" lIns="91425" tIns="91425" rIns="91425" bIns="91425" anchor="ctr" anchorCtr="0">
               <a:noAutofit/>
             </a:bodyPr>
             <a:lstStyle/>
             <a:p>
-              <a:pPr indent="0" lvl="0" marL="0" rtl="0" algn="l">
+              <a:pPr marL="0" lvl="0" indent="0" algn="l" rtl="0">
                 <a:spcBef>
                   <a:spcPts val="0"/>
                 </a:spcBef>
@@ -5320,9 +5431,6 @@
                 </a:spcAft>
                 <a:buNone/>
               </a:pPr>
-              <a:r>
-                <a:t/>
-              </a:r>
               <a:endParaRPr/>
             </a:p>
           </p:txBody>
@@ -5349,12 +5457,12 @@
             </a:ln>
           </p:spPr>
           <p:txBody>
-            <a:bodyPr anchorCtr="0" anchor="ctr" bIns="91425" lIns="91425" spcFirstLastPara="1" rIns="91425" wrap="square" tIns="91425">
+            <a:bodyPr spcFirstLastPara="1" wrap="square" lIns="91425" tIns="91425" rIns="91425" bIns="91425" anchor="ctr" anchorCtr="0">
               <a:noAutofit/>
             </a:bodyPr>
             <a:lstStyle/>
             <a:p>
-              <a:pPr indent="0" lvl="0" marL="0" rtl="0" algn="l">
+              <a:pPr marL="0" lvl="0" indent="0" algn="l" rtl="0">
                 <a:spcBef>
                   <a:spcPts val="0"/>
                 </a:spcBef>
@@ -5363,9 +5471,6 @@
                 </a:spcAft>
                 <a:buNone/>
               </a:pPr>
-              <a:r>
-                <a:t/>
-              </a:r>
               <a:endParaRPr/>
             </a:p>
           </p:txBody>
@@ -5374,7 +5479,9 @@
       <p:sp>
         <p:nvSpPr>
           <p:cNvPr id="45" name="Google Shape;45;p6"/>
-          <p:cNvSpPr txBox="1"/>
+          <p:cNvSpPr txBox="1">
+            <a:spLocks noGrp="1"/>
+          </p:cNvSpPr>
           <p:nvPr>
             <p:ph type="title"/>
           </p:nvPr>
@@ -5389,7 +5496,7 @@
           </a:prstGeom>
         </p:spPr>
         <p:txBody>
-          <a:bodyPr anchorCtr="0" anchor="t" bIns="91425" lIns="91425" spcFirstLastPara="1" rIns="91425" wrap="square" tIns="91425">
+          <a:bodyPr spcFirstLastPara="1" wrap="square" lIns="91425" tIns="91425" rIns="91425" bIns="91425" anchor="t" anchorCtr="0">
             <a:normAutofit/>
           </a:bodyPr>
           <a:lstStyle>
@@ -5493,15 +5600,19 @@
               <a:defRPr sz="2600"/>
             </a:lvl9pPr>
           </a:lstStyle>
-          <a:p/>
+          <a:p>
+            <a:endParaRPr/>
+          </a:p>
         </p:txBody>
       </p:sp>
       <p:sp>
         <p:nvSpPr>
           <p:cNvPr id="46" name="Google Shape;46;p6"/>
-          <p:cNvSpPr txBox="1"/>
+          <p:cNvSpPr txBox="1">
+            <a:spLocks noGrp="1"/>
+          </p:cNvSpPr>
           <p:nvPr>
-            <p:ph idx="12" type="sldNum"/>
+            <p:ph type="sldNum" idx="12"/>
           </p:nvPr>
         </p:nvSpPr>
         <p:spPr>
@@ -5514,7 +5625,7 @@
           </a:prstGeom>
         </p:spPr>
         <p:txBody>
-          <a:bodyPr anchorCtr="0" anchor="ctr" bIns="91425" lIns="91425" spcFirstLastPara="1" rIns="91425" wrap="square" tIns="91425">
+          <a:bodyPr spcFirstLastPara="1" wrap="square" lIns="91425" tIns="91425" rIns="91425" bIns="91425" anchor="ctr" anchorCtr="0">
             <a:normAutofit/>
           </a:bodyPr>
           <a:lstStyle>
@@ -5556,7 +5667,7 @@
             </a:lvl9pPr>
           </a:lstStyle>
           <a:p>
-            <a:pPr indent="0" lvl="0" marL="0" rtl="0" algn="r">
+            <a:pPr marL="0" lvl="0" indent="0" algn="r" rtl="0">
               <a:spcBef>
                 <a:spcPts val="0"/>
               </a:spcBef>
@@ -5582,11 +5693,11 @@
 </file>
 
 <file path=ppt/slideLayouts/slideLayout6.xml><?xml version="1.0" encoding="utf-8"?>
-<p:sldLayout xmlns:a="http://schemas.openxmlformats.org/drawingml/2006/main" xmlns:r="http://schemas.openxmlformats.org/officeDocument/2006/relationships" xmlns:mc="http://schemas.openxmlformats.org/markup-compatibility/2006" xmlns:mv="urn:schemas-microsoft-com:mac:vml" xmlns:p="http://schemas.openxmlformats.org/presentationml/2006/main" xmlns:c="http://schemas.openxmlformats.org/drawingml/2006/chart" xmlns:dgm="http://schemas.openxmlformats.org/drawingml/2006/diagram" xmlns:o="urn:schemas-microsoft-com:office:office" xmlns:v="urn:schemas-microsoft-com:vml" xmlns:pvml="urn:schemas-microsoft-com:office:powerpoint" xmlns:com="http://schemas.openxmlformats.org/drawingml/2006/compatibility" xmlns:p14="http://schemas.microsoft.com/office/powerpoint/2010/main" xmlns:p15="http://schemas.microsoft.com/office/powerpoint/2012/main" xmlns:ahyp="http://schemas.microsoft.com/office/drawing/2018/hyperlinkcolor" matchingName="One column text">
+<p:sldLayout xmlns:a="http://schemas.openxmlformats.org/drawingml/2006/main" xmlns:r="http://schemas.openxmlformats.org/officeDocument/2006/relationships" xmlns:p="http://schemas.openxmlformats.org/presentationml/2006/main" matchingName="One column text">
   <p:cSld name="ONE_COLUMN_TEXT">
     <p:spTree>
       <p:nvGrpSpPr>
-        <p:cNvPr id="47" name="Shape 47"/>
+        <p:cNvPr id="1" name="Shape 47"/>
         <p:cNvGrpSpPr/>
         <p:nvPr/>
       </p:nvGrpSpPr>
@@ -5620,12 +5731,12 @@
           </a:ln>
         </p:spPr>
         <p:txBody>
-          <a:bodyPr anchorCtr="0" anchor="ctr" bIns="91425" lIns="91425" spcFirstLastPara="1" rIns="91425" wrap="square" tIns="91425">
+          <a:bodyPr spcFirstLastPara="1" wrap="square" lIns="91425" tIns="91425" rIns="91425" bIns="91425" anchor="ctr" anchorCtr="0">
             <a:noAutofit/>
           </a:bodyPr>
           <a:lstStyle/>
           <a:p>
-            <a:pPr indent="0" lvl="0" marL="0" rtl="0" algn="l">
+            <a:pPr marL="0" lvl="0" indent="0" algn="l" rtl="0">
               <a:spcBef>
                 <a:spcPts val="0"/>
               </a:spcBef>
@@ -5634,9 +5745,6 @@
               </a:spcAft>
               <a:buNone/>
             </a:pPr>
-            <a:r>
-              <a:t/>
-            </a:r>
             <a:endParaRPr/>
           </a:p>
         </p:txBody>
@@ -5677,12 +5785,12 @@
             </a:ln>
           </p:spPr>
           <p:txBody>
-            <a:bodyPr anchorCtr="0" anchor="ctr" bIns="91425" lIns="91425" spcFirstLastPara="1" rIns="91425" wrap="square" tIns="91425">
+            <a:bodyPr spcFirstLastPara="1" wrap="square" lIns="91425" tIns="91425" rIns="91425" bIns="91425" anchor="ctr" anchorCtr="0">
               <a:noAutofit/>
             </a:bodyPr>
             <a:lstStyle/>
             <a:p>
-              <a:pPr indent="0" lvl="0" marL="0" rtl="0" algn="l">
+              <a:pPr marL="0" lvl="0" indent="0" algn="l" rtl="0">
                 <a:spcBef>
                   <a:spcPts val="0"/>
                 </a:spcBef>
@@ -5691,9 +5799,6 @@
                 </a:spcAft>
                 <a:buNone/>
               </a:pPr>
-              <a:r>
-                <a:t/>
-              </a:r>
               <a:endParaRPr/>
             </a:p>
           </p:txBody>
@@ -5720,12 +5825,12 @@
             </a:ln>
           </p:spPr>
           <p:txBody>
-            <a:bodyPr anchorCtr="0" anchor="ctr" bIns="91425" lIns="91425" spcFirstLastPara="1" rIns="91425" wrap="square" tIns="91425">
+            <a:bodyPr spcFirstLastPara="1" wrap="square" lIns="91425" tIns="91425" rIns="91425" bIns="91425" anchor="ctr" anchorCtr="0">
               <a:noAutofit/>
             </a:bodyPr>
             <a:lstStyle/>
             <a:p>
-              <a:pPr indent="0" lvl="0" marL="0" rtl="0" algn="l">
+              <a:pPr marL="0" lvl="0" indent="0" algn="l" rtl="0">
                 <a:spcBef>
                   <a:spcPts val="0"/>
                 </a:spcBef>
@@ -5734,9 +5839,6 @@
                 </a:spcAft>
                 <a:buNone/>
               </a:pPr>
-              <a:r>
-                <a:t/>
-              </a:r>
               <a:endParaRPr/>
             </a:p>
           </p:txBody>
@@ -5745,7 +5847,9 @@
       <p:sp>
         <p:nvSpPr>
           <p:cNvPr id="52" name="Google Shape;52;p7"/>
-          <p:cNvSpPr txBox="1"/>
+          <p:cNvSpPr txBox="1">
+            <a:spLocks noGrp="1"/>
+          </p:cNvSpPr>
           <p:nvPr>
             <p:ph type="title"/>
           </p:nvPr>
@@ -5760,7 +5864,7 @@
           </a:prstGeom>
         </p:spPr>
         <p:txBody>
-          <a:bodyPr anchorCtr="0" anchor="t" bIns="91425" lIns="91425" spcFirstLastPara="1" rIns="91425" wrap="square" tIns="91425">
+          <a:bodyPr spcFirstLastPara="1" wrap="square" lIns="91425" tIns="91425" rIns="91425" bIns="91425" anchor="t" anchorCtr="0">
             <a:normAutofit/>
           </a:bodyPr>
           <a:lstStyle>
@@ -5864,15 +5968,19 @@
               <a:defRPr sz="2600"/>
             </a:lvl9pPr>
           </a:lstStyle>
-          <a:p/>
+          <a:p>
+            <a:endParaRPr/>
+          </a:p>
         </p:txBody>
       </p:sp>
       <p:sp>
         <p:nvSpPr>
           <p:cNvPr id="53" name="Google Shape;53;p7"/>
-          <p:cNvSpPr txBox="1"/>
+          <p:cNvSpPr txBox="1">
+            <a:spLocks noGrp="1"/>
+          </p:cNvSpPr>
           <p:nvPr>
-            <p:ph idx="1" type="body"/>
+            <p:ph type="body" idx="1"/>
           </p:nvPr>
         </p:nvSpPr>
         <p:spPr>
@@ -5885,11 +5993,11 @@
           </a:prstGeom>
         </p:spPr>
         <p:txBody>
-          <a:bodyPr anchorCtr="0" anchor="t" bIns="91425" lIns="91425" spcFirstLastPara="1" rIns="91425" wrap="square" tIns="91425">
+          <a:bodyPr spcFirstLastPara="1" wrap="square" lIns="91425" tIns="91425" rIns="91425" bIns="91425" anchor="t" anchorCtr="0">
             <a:normAutofit/>
           </a:bodyPr>
           <a:lstStyle>
-            <a:lvl1pPr indent="-311150" lvl="0" marL="457200">
+            <a:lvl1pPr marL="457200" lvl="0" indent="-311150">
               <a:spcBef>
                 <a:spcPts val="0"/>
               </a:spcBef>
@@ -5900,7 +6008,7 @@
               <a:buChar char="●"/>
               <a:defRPr/>
             </a:lvl1pPr>
-            <a:lvl2pPr indent="-298450" lvl="1" marL="914400">
+            <a:lvl2pPr marL="914400" lvl="1" indent="-298450">
               <a:spcBef>
                 <a:spcPts val="0"/>
               </a:spcBef>
@@ -5911,7 +6019,7 @@
               <a:buChar char="○"/>
               <a:defRPr/>
             </a:lvl2pPr>
-            <a:lvl3pPr indent="-298450" lvl="2" marL="1371600">
+            <a:lvl3pPr marL="1371600" lvl="2" indent="-298450">
               <a:spcBef>
                 <a:spcPts val="0"/>
               </a:spcBef>
@@ -5922,7 +6030,7 @@
               <a:buChar char="■"/>
               <a:defRPr/>
             </a:lvl3pPr>
-            <a:lvl4pPr indent="-298450" lvl="3" marL="1828800">
+            <a:lvl4pPr marL="1828800" lvl="3" indent="-298450">
               <a:spcBef>
                 <a:spcPts val="0"/>
               </a:spcBef>
@@ -5933,7 +6041,7 @@
               <a:buChar char="●"/>
               <a:defRPr/>
             </a:lvl4pPr>
-            <a:lvl5pPr indent="-298450" lvl="4" marL="2286000">
+            <a:lvl5pPr marL="2286000" lvl="4" indent="-298450">
               <a:spcBef>
                 <a:spcPts val="0"/>
               </a:spcBef>
@@ -5944,7 +6052,7 @@
               <a:buChar char="○"/>
               <a:defRPr/>
             </a:lvl5pPr>
-            <a:lvl6pPr indent="-298450" lvl="5" marL="2743200">
+            <a:lvl6pPr marL="2743200" lvl="5" indent="-298450">
               <a:spcBef>
                 <a:spcPts val="0"/>
               </a:spcBef>
@@ -5955,7 +6063,7 @@
               <a:buChar char="■"/>
               <a:defRPr/>
             </a:lvl6pPr>
-            <a:lvl7pPr indent="-298450" lvl="6" marL="3200400">
+            <a:lvl7pPr marL="3200400" lvl="6" indent="-298450">
               <a:spcBef>
                 <a:spcPts val="0"/>
               </a:spcBef>
@@ -5966,7 +6074,7 @@
               <a:buChar char="●"/>
               <a:defRPr/>
             </a:lvl7pPr>
-            <a:lvl8pPr indent="-298450" lvl="7" marL="3657600">
+            <a:lvl8pPr marL="3657600" lvl="7" indent="-298450">
               <a:spcBef>
                 <a:spcPts val="0"/>
               </a:spcBef>
@@ -5977,7 +6085,7 @@
               <a:buChar char="○"/>
               <a:defRPr/>
             </a:lvl8pPr>
-            <a:lvl9pPr indent="-298450" lvl="8" marL="4114800">
+            <a:lvl9pPr marL="4114800" lvl="8" indent="-298450">
               <a:spcBef>
                 <a:spcPts val="0"/>
               </a:spcBef>
@@ -5989,15 +6097,19 @@
               <a:defRPr/>
             </a:lvl9pPr>
           </a:lstStyle>
-          <a:p/>
+          <a:p>
+            <a:endParaRPr/>
+          </a:p>
         </p:txBody>
       </p:sp>
       <p:sp>
         <p:nvSpPr>
           <p:cNvPr id="54" name="Google Shape;54;p7"/>
-          <p:cNvSpPr txBox="1"/>
+          <p:cNvSpPr txBox="1">
+            <a:spLocks noGrp="1"/>
+          </p:cNvSpPr>
           <p:nvPr>
-            <p:ph idx="12" type="sldNum"/>
+            <p:ph type="sldNum" idx="12"/>
           </p:nvPr>
         </p:nvSpPr>
         <p:spPr>
@@ -6010,7 +6122,7 @@
           </a:prstGeom>
         </p:spPr>
         <p:txBody>
-          <a:bodyPr anchorCtr="0" anchor="ctr" bIns="91425" lIns="91425" spcFirstLastPara="1" rIns="91425" wrap="square" tIns="91425">
+          <a:bodyPr spcFirstLastPara="1" wrap="square" lIns="91425" tIns="91425" rIns="91425" bIns="91425" anchor="ctr" anchorCtr="0">
             <a:normAutofit/>
           </a:bodyPr>
           <a:lstStyle>
@@ -6052,7 +6164,7 @@
             </a:lvl9pPr>
           </a:lstStyle>
           <a:p>
-            <a:pPr indent="0" lvl="0" marL="0" rtl="0" algn="r">
+            <a:pPr marL="0" lvl="0" indent="0" algn="r" rtl="0">
               <a:spcBef>
                 <a:spcPts val="0"/>
               </a:spcBef>
@@ -6078,18 +6190,19 @@
 </file>
 
 <file path=ppt/slideLayouts/slideLayout7.xml><?xml version="1.0" encoding="utf-8"?>
-<p:sldLayout xmlns:a="http://schemas.openxmlformats.org/drawingml/2006/main" xmlns:r="http://schemas.openxmlformats.org/officeDocument/2006/relationships" xmlns:mc="http://schemas.openxmlformats.org/markup-compatibility/2006" xmlns:mv="urn:schemas-microsoft-com:mac:vml" xmlns:p="http://schemas.openxmlformats.org/presentationml/2006/main" xmlns:c="http://schemas.openxmlformats.org/drawingml/2006/chart" xmlns:dgm="http://schemas.openxmlformats.org/drawingml/2006/diagram" xmlns:o="urn:schemas-microsoft-com:office:office" xmlns:v="urn:schemas-microsoft-com:vml" xmlns:pvml="urn:schemas-microsoft-com:office:powerpoint" xmlns:com="http://schemas.openxmlformats.org/drawingml/2006/compatibility" xmlns:p14="http://schemas.microsoft.com/office/powerpoint/2010/main" xmlns:p15="http://schemas.microsoft.com/office/powerpoint/2012/main" xmlns:ahyp="http://schemas.microsoft.com/office/drawing/2018/hyperlinkcolor" matchingName="Main point">
+<p:sldLayout xmlns:a="http://schemas.openxmlformats.org/drawingml/2006/main" xmlns:r="http://schemas.openxmlformats.org/officeDocument/2006/relationships" xmlns:p="http://schemas.openxmlformats.org/presentationml/2006/main" matchingName="Main point">
   <p:cSld name="MAIN_POINT">
     <p:bg>
       <p:bgPr>
         <a:solidFill>
           <a:schemeClr val="accent3"/>
         </a:solidFill>
+        <a:effectLst/>
       </p:bgPr>
     </p:bg>
     <p:spTree>
       <p:nvGrpSpPr>
-        <p:cNvPr id="55" name="Shape 55"/>
+        <p:cNvPr id="1" name="Shape 55"/>
         <p:cNvGrpSpPr/>
         <p:nvPr/>
       </p:nvGrpSpPr>
@@ -6137,12 +6250,12 @@
             </a:ln>
           </p:spPr>
           <p:txBody>
-            <a:bodyPr anchorCtr="0" anchor="ctr" bIns="91425" lIns="91425" spcFirstLastPara="1" rIns="91425" wrap="square" tIns="91425">
+            <a:bodyPr spcFirstLastPara="1" wrap="square" lIns="91425" tIns="91425" rIns="91425" bIns="91425" anchor="ctr" anchorCtr="0">
               <a:noAutofit/>
             </a:bodyPr>
             <a:lstStyle/>
             <a:p>
-              <a:pPr indent="0" lvl="0" marL="0" rtl="0" algn="l">
+              <a:pPr marL="0" lvl="0" indent="0" algn="l" rtl="0">
                 <a:spcBef>
                   <a:spcPts val="0"/>
                 </a:spcBef>
@@ -6151,9 +6264,6 @@
                 </a:spcAft>
                 <a:buNone/>
               </a:pPr>
-              <a:r>
-                <a:t/>
-              </a:r>
               <a:endParaRPr/>
             </a:p>
           </p:txBody>
@@ -6180,12 +6290,12 @@
             </a:ln>
           </p:spPr>
           <p:txBody>
-            <a:bodyPr anchorCtr="0" anchor="ctr" bIns="91425" lIns="91425" spcFirstLastPara="1" rIns="91425" wrap="square" tIns="91425">
+            <a:bodyPr spcFirstLastPara="1" wrap="square" lIns="91425" tIns="91425" rIns="91425" bIns="91425" anchor="ctr" anchorCtr="0">
               <a:noAutofit/>
             </a:bodyPr>
             <a:lstStyle/>
             <a:p>
-              <a:pPr indent="0" lvl="0" marL="0" rtl="0" algn="l">
+              <a:pPr marL="0" lvl="0" indent="0" algn="l" rtl="0">
                 <a:spcBef>
                   <a:spcPts val="0"/>
                 </a:spcBef>
@@ -6194,9 +6304,6 @@
                 </a:spcAft>
                 <a:buNone/>
               </a:pPr>
-              <a:r>
-                <a:t/>
-              </a:r>
               <a:endParaRPr/>
             </a:p>
           </p:txBody>
@@ -6205,7 +6312,9 @@
       <p:sp>
         <p:nvSpPr>
           <p:cNvPr id="59" name="Google Shape;59;p8"/>
-          <p:cNvSpPr txBox="1"/>
+          <p:cNvSpPr txBox="1">
+            <a:spLocks noGrp="1"/>
+          </p:cNvSpPr>
           <p:nvPr>
             <p:ph type="title"/>
           </p:nvPr>
@@ -6220,7 +6329,7 @@
           </a:prstGeom>
         </p:spPr>
         <p:txBody>
-          <a:bodyPr anchorCtr="0" anchor="ctr" bIns="91425" lIns="91425" spcFirstLastPara="1" rIns="91425" wrap="square" tIns="91425">
+          <a:bodyPr spcFirstLastPara="1" wrap="square" lIns="91425" tIns="91425" rIns="91425" bIns="91425" anchor="ctr" anchorCtr="0">
             <a:normAutofit/>
           </a:bodyPr>
           <a:lstStyle>
@@ -6387,15 +6496,19 @@
               </a:defRPr>
             </a:lvl9pPr>
           </a:lstStyle>
-          <a:p/>
+          <a:p>
+            <a:endParaRPr/>
+          </a:p>
         </p:txBody>
       </p:sp>
       <p:sp>
         <p:nvSpPr>
           <p:cNvPr id="60" name="Google Shape;60;p8"/>
-          <p:cNvSpPr txBox="1"/>
+          <p:cNvSpPr txBox="1">
+            <a:spLocks noGrp="1"/>
+          </p:cNvSpPr>
           <p:nvPr>
-            <p:ph idx="12" type="sldNum"/>
+            <p:ph type="sldNum" idx="12"/>
           </p:nvPr>
         </p:nvSpPr>
         <p:spPr>
@@ -6408,7 +6521,7 @@
           </a:prstGeom>
         </p:spPr>
         <p:txBody>
-          <a:bodyPr anchorCtr="0" anchor="ctr" bIns="91425" lIns="91425" spcFirstLastPara="1" rIns="91425" wrap="square" tIns="91425">
+          <a:bodyPr spcFirstLastPara="1" wrap="square" lIns="91425" tIns="91425" rIns="91425" bIns="91425" anchor="ctr" anchorCtr="0">
             <a:normAutofit/>
           </a:bodyPr>
           <a:lstStyle>
@@ -6486,7 +6599,7 @@
             </a:lvl9pPr>
           </a:lstStyle>
           <a:p>
-            <a:pPr indent="0" lvl="0" marL="0" rtl="0" algn="r">
+            <a:pPr marL="0" lvl="0" indent="0" algn="r" rtl="0">
               <a:spcBef>
                 <a:spcPts val="0"/>
               </a:spcBef>
@@ -6512,11 +6625,11 @@
 </file>
 
 <file path=ppt/slideLayouts/slideLayout8.xml><?xml version="1.0" encoding="utf-8"?>
-<p:sldLayout xmlns:a="http://schemas.openxmlformats.org/drawingml/2006/main" xmlns:r="http://schemas.openxmlformats.org/officeDocument/2006/relationships" xmlns:mc="http://schemas.openxmlformats.org/markup-compatibility/2006" xmlns:mv="urn:schemas-microsoft-com:mac:vml" xmlns:p="http://schemas.openxmlformats.org/presentationml/2006/main" xmlns:c="http://schemas.openxmlformats.org/drawingml/2006/chart" xmlns:dgm="http://schemas.openxmlformats.org/drawingml/2006/diagram" xmlns:o="urn:schemas-microsoft-com:office:office" xmlns:v="urn:schemas-microsoft-com:vml" xmlns:pvml="urn:schemas-microsoft-com:office:powerpoint" xmlns:com="http://schemas.openxmlformats.org/drawingml/2006/compatibility" xmlns:p14="http://schemas.microsoft.com/office/powerpoint/2010/main" xmlns:p15="http://schemas.microsoft.com/office/powerpoint/2012/main" xmlns:ahyp="http://schemas.microsoft.com/office/drawing/2018/hyperlinkcolor" matchingName="Section title and description">
+<p:sldLayout xmlns:a="http://schemas.openxmlformats.org/drawingml/2006/main" xmlns:r="http://schemas.openxmlformats.org/officeDocument/2006/relationships" xmlns:p="http://schemas.openxmlformats.org/presentationml/2006/main" matchingName="Section title and description">
   <p:cSld name="SECTION_TITLE_AND_DESCRIPTION">
     <p:spTree>
       <p:nvGrpSpPr>
-        <p:cNvPr id="61" name="Shape 61"/>
+        <p:cNvPr id="1" name="Shape 61"/>
         <p:cNvGrpSpPr/>
         <p:nvPr/>
       </p:nvGrpSpPr>
@@ -6550,12 +6663,12 @@
           </a:ln>
         </p:spPr>
         <p:txBody>
-          <a:bodyPr anchorCtr="0" anchor="ctr" bIns="91425" lIns="91425" spcFirstLastPara="1" rIns="91425" wrap="square" tIns="91425">
+          <a:bodyPr spcFirstLastPara="1" wrap="square" lIns="91425" tIns="91425" rIns="91425" bIns="91425" anchor="ctr" anchorCtr="0">
             <a:noAutofit/>
           </a:bodyPr>
           <a:lstStyle/>
           <a:p>
-            <a:pPr indent="0" lvl="0" marL="0" rtl="0" algn="l">
+            <a:pPr marL="0" lvl="0" indent="0" algn="l" rtl="0">
               <a:spcBef>
                 <a:spcPts val="0"/>
               </a:spcBef>
@@ -6564,9 +6677,6 @@
               </a:spcAft>
               <a:buNone/>
             </a:pPr>
-            <a:r>
-              <a:t/>
-            </a:r>
             <a:endParaRPr/>
           </a:p>
         </p:txBody>
@@ -6607,12 +6717,12 @@
             </a:ln>
           </p:spPr>
           <p:txBody>
-            <a:bodyPr anchorCtr="0" anchor="ctr" bIns="91425" lIns="91425" spcFirstLastPara="1" rIns="91425" wrap="square" tIns="91425">
+            <a:bodyPr spcFirstLastPara="1" wrap="square" lIns="91425" tIns="91425" rIns="91425" bIns="91425" anchor="ctr" anchorCtr="0">
               <a:noAutofit/>
             </a:bodyPr>
             <a:lstStyle/>
             <a:p>
-              <a:pPr indent="0" lvl="0" marL="0" rtl="0" algn="l">
+              <a:pPr marL="0" lvl="0" indent="0" algn="l" rtl="0">
                 <a:spcBef>
                   <a:spcPts val="0"/>
                 </a:spcBef>
@@ -6621,9 +6731,6 @@
                 </a:spcAft>
                 <a:buNone/>
               </a:pPr>
-              <a:r>
-                <a:t/>
-              </a:r>
               <a:endParaRPr/>
             </a:p>
           </p:txBody>
@@ -6650,12 +6757,12 @@
             </a:ln>
           </p:spPr>
           <p:txBody>
-            <a:bodyPr anchorCtr="0" anchor="ctr" bIns="91425" lIns="91425" spcFirstLastPara="1" rIns="91425" wrap="square" tIns="91425">
+            <a:bodyPr spcFirstLastPara="1" wrap="square" lIns="91425" tIns="91425" rIns="91425" bIns="91425" anchor="ctr" anchorCtr="0">
               <a:noAutofit/>
             </a:bodyPr>
             <a:lstStyle/>
             <a:p>
-              <a:pPr indent="0" lvl="0" marL="0" rtl="0" algn="l">
+              <a:pPr marL="0" lvl="0" indent="0" algn="l" rtl="0">
                 <a:spcBef>
                   <a:spcPts val="0"/>
                 </a:spcBef>
@@ -6664,9 +6771,6 @@
                 </a:spcAft>
                 <a:buNone/>
               </a:pPr>
-              <a:r>
-                <a:t/>
-              </a:r>
               <a:endParaRPr/>
             </a:p>
           </p:txBody>
@@ -6675,7 +6779,9 @@
       <p:sp>
         <p:nvSpPr>
           <p:cNvPr id="66" name="Google Shape;66;p9"/>
-          <p:cNvSpPr txBox="1"/>
+          <p:cNvSpPr txBox="1">
+            <a:spLocks noGrp="1"/>
+          </p:cNvSpPr>
           <p:nvPr>
             <p:ph type="title"/>
           </p:nvPr>
@@ -6690,7 +6796,7 @@
           </a:prstGeom>
         </p:spPr>
         <p:txBody>
-          <a:bodyPr anchorCtr="0" anchor="t" bIns="91425" lIns="91425" spcFirstLastPara="1" rIns="91425" wrap="square" tIns="91425">
+          <a:bodyPr spcFirstLastPara="1" wrap="square" lIns="91425" tIns="91425" rIns="91425" bIns="91425" anchor="t" anchorCtr="0">
             <a:normAutofit/>
           </a:bodyPr>
           <a:lstStyle>
@@ -6794,15 +6900,19 @@
               <a:defRPr sz="2600"/>
             </a:lvl9pPr>
           </a:lstStyle>
-          <a:p/>
+          <a:p>
+            <a:endParaRPr/>
+          </a:p>
         </p:txBody>
       </p:sp>
       <p:sp>
         <p:nvSpPr>
           <p:cNvPr id="67" name="Google Shape;67;p9"/>
-          <p:cNvSpPr txBox="1"/>
+          <p:cNvSpPr txBox="1">
+            <a:spLocks noGrp="1"/>
+          </p:cNvSpPr>
           <p:nvPr>
-            <p:ph idx="1" type="subTitle"/>
+            <p:ph type="subTitle" idx="1"/>
           </p:nvPr>
         </p:nvSpPr>
         <p:spPr>
@@ -6815,7 +6925,7 @@
           </a:prstGeom>
         </p:spPr>
         <p:txBody>
-          <a:bodyPr anchorCtr="0" anchor="t" bIns="91425" lIns="91425" spcFirstLastPara="1" rIns="91425" wrap="square" tIns="91425">
+          <a:bodyPr spcFirstLastPara="1" wrap="square" lIns="91425" tIns="91425" rIns="91425" bIns="91425" anchor="t" anchorCtr="0">
             <a:normAutofit/>
           </a:bodyPr>
           <a:lstStyle>
@@ -6946,15 +7056,19 @@
               <a:defRPr sz="1600"/>
             </a:lvl9pPr>
           </a:lstStyle>
-          <a:p/>
+          <a:p>
+            <a:endParaRPr/>
+          </a:p>
         </p:txBody>
       </p:sp>
       <p:sp>
         <p:nvSpPr>
           <p:cNvPr id="68" name="Google Shape;68;p9"/>
-          <p:cNvSpPr txBox="1"/>
+          <p:cNvSpPr txBox="1">
+            <a:spLocks noGrp="1"/>
+          </p:cNvSpPr>
           <p:nvPr>
-            <p:ph idx="2" type="body"/>
+            <p:ph type="body" idx="2"/>
           </p:nvPr>
         </p:nvSpPr>
         <p:spPr>
@@ -6967,11 +7081,11 @@
           </a:prstGeom>
         </p:spPr>
         <p:txBody>
-          <a:bodyPr anchorCtr="0" anchor="t" bIns="91425" lIns="91425" spcFirstLastPara="1" rIns="91425" wrap="square" tIns="91425">
+          <a:bodyPr spcFirstLastPara="1" wrap="square" lIns="91425" tIns="91425" rIns="91425" bIns="91425" anchor="t" anchorCtr="0">
             <a:normAutofit/>
           </a:bodyPr>
           <a:lstStyle>
-            <a:lvl1pPr indent="-311150" lvl="0" marL="457200">
+            <a:lvl1pPr marL="457200" lvl="0" indent="-311150">
               <a:spcBef>
                 <a:spcPts val="0"/>
               </a:spcBef>
@@ -6982,7 +7096,7 @@
               <a:buChar char="●"/>
               <a:defRPr/>
             </a:lvl1pPr>
-            <a:lvl2pPr indent="-298450" lvl="1" marL="914400">
+            <a:lvl2pPr marL="914400" lvl="1" indent="-298450">
               <a:spcBef>
                 <a:spcPts val="0"/>
               </a:spcBef>
@@ -6993,7 +7107,7 @@
               <a:buChar char="○"/>
               <a:defRPr/>
             </a:lvl2pPr>
-            <a:lvl3pPr indent="-298450" lvl="2" marL="1371600">
+            <a:lvl3pPr marL="1371600" lvl="2" indent="-298450">
               <a:spcBef>
                 <a:spcPts val="0"/>
               </a:spcBef>
@@ -7004,7 +7118,7 @@
               <a:buChar char="■"/>
               <a:defRPr/>
             </a:lvl3pPr>
-            <a:lvl4pPr indent="-298450" lvl="3" marL="1828800">
+            <a:lvl4pPr marL="1828800" lvl="3" indent="-298450">
               <a:spcBef>
                 <a:spcPts val="0"/>
               </a:spcBef>
@@ -7015,7 +7129,7 @@
               <a:buChar char="●"/>
               <a:defRPr/>
             </a:lvl4pPr>
-            <a:lvl5pPr indent="-298450" lvl="4" marL="2286000">
+            <a:lvl5pPr marL="2286000" lvl="4" indent="-298450">
               <a:spcBef>
                 <a:spcPts val="0"/>
               </a:spcBef>
@@ -7026,7 +7140,7 @@
               <a:buChar char="○"/>
               <a:defRPr/>
             </a:lvl5pPr>
-            <a:lvl6pPr indent="-298450" lvl="5" marL="2743200">
+            <a:lvl6pPr marL="2743200" lvl="5" indent="-298450">
               <a:spcBef>
                 <a:spcPts val="0"/>
               </a:spcBef>
@@ -7037,7 +7151,7 @@
               <a:buChar char="■"/>
               <a:defRPr/>
             </a:lvl6pPr>
-            <a:lvl7pPr indent="-298450" lvl="6" marL="3200400">
+            <a:lvl7pPr marL="3200400" lvl="6" indent="-298450">
               <a:spcBef>
                 <a:spcPts val="0"/>
               </a:spcBef>
@@ -7048,7 +7162,7 @@
               <a:buChar char="●"/>
               <a:defRPr/>
             </a:lvl7pPr>
-            <a:lvl8pPr indent="-298450" lvl="7" marL="3657600">
+            <a:lvl8pPr marL="3657600" lvl="7" indent="-298450">
               <a:spcBef>
                 <a:spcPts val="0"/>
               </a:spcBef>
@@ -7059,7 +7173,7 @@
               <a:buChar char="○"/>
               <a:defRPr/>
             </a:lvl8pPr>
-            <a:lvl9pPr indent="-298450" lvl="8" marL="4114800">
+            <a:lvl9pPr marL="4114800" lvl="8" indent="-298450">
               <a:spcBef>
                 <a:spcPts val="0"/>
               </a:spcBef>
@@ -7071,15 +7185,19 @@
               <a:defRPr/>
             </a:lvl9pPr>
           </a:lstStyle>
-          <a:p/>
+          <a:p>
+            <a:endParaRPr/>
+          </a:p>
         </p:txBody>
       </p:sp>
       <p:sp>
         <p:nvSpPr>
           <p:cNvPr id="69" name="Google Shape;69;p9"/>
-          <p:cNvSpPr txBox="1"/>
+          <p:cNvSpPr txBox="1">
+            <a:spLocks noGrp="1"/>
+          </p:cNvSpPr>
           <p:nvPr>
-            <p:ph idx="12" type="sldNum"/>
+            <p:ph type="sldNum" idx="12"/>
           </p:nvPr>
         </p:nvSpPr>
         <p:spPr>
@@ -7092,7 +7210,7 @@
           </a:prstGeom>
         </p:spPr>
         <p:txBody>
-          <a:bodyPr anchorCtr="0" anchor="ctr" bIns="91425" lIns="91425" spcFirstLastPara="1" rIns="91425" wrap="square" tIns="91425">
+          <a:bodyPr spcFirstLastPara="1" wrap="square" lIns="91425" tIns="91425" rIns="91425" bIns="91425" anchor="ctr" anchorCtr="0">
             <a:normAutofit/>
           </a:bodyPr>
           <a:lstStyle>
@@ -7134,7 +7252,7 @@
             </a:lvl9pPr>
           </a:lstStyle>
           <a:p>
-            <a:pPr indent="0" lvl="0" marL="0" rtl="0" algn="r">
+            <a:pPr marL="0" lvl="0" indent="0" algn="r" rtl="0">
               <a:spcBef>
                 <a:spcPts val="0"/>
               </a:spcBef>
@@ -7160,11 +7278,11 @@
 </file>
 
 <file path=ppt/slideLayouts/slideLayout9.xml><?xml version="1.0" encoding="utf-8"?>
-<p:sldLayout xmlns:a="http://schemas.openxmlformats.org/drawingml/2006/main" xmlns:r="http://schemas.openxmlformats.org/officeDocument/2006/relationships" xmlns:mc="http://schemas.openxmlformats.org/markup-compatibility/2006" xmlns:mv="urn:schemas-microsoft-com:mac:vml" xmlns:p="http://schemas.openxmlformats.org/presentationml/2006/main" xmlns:c="http://schemas.openxmlformats.org/drawingml/2006/chart" xmlns:dgm="http://schemas.openxmlformats.org/drawingml/2006/diagram" xmlns:o="urn:schemas-microsoft-com:office:office" xmlns:v="urn:schemas-microsoft-com:vml" xmlns:pvml="urn:schemas-microsoft-com:office:powerpoint" xmlns:com="http://schemas.openxmlformats.org/drawingml/2006/compatibility" xmlns:p14="http://schemas.microsoft.com/office/powerpoint/2010/main" xmlns:p15="http://schemas.microsoft.com/office/powerpoint/2012/main" xmlns:ahyp="http://schemas.microsoft.com/office/drawing/2018/hyperlinkcolor" matchingName="Caption">
+<p:sldLayout xmlns:a="http://schemas.openxmlformats.org/drawingml/2006/main" xmlns:r="http://schemas.openxmlformats.org/officeDocument/2006/relationships" xmlns:p="http://schemas.openxmlformats.org/presentationml/2006/main" matchingName="Caption">
   <p:cSld name="CAPTION_ONLY">
     <p:spTree>
       <p:nvGrpSpPr>
-        <p:cNvPr id="70" name="Shape 70"/>
+        <p:cNvPr id="1" name="Shape 70"/>
         <p:cNvGrpSpPr/>
         <p:nvPr/>
       </p:nvGrpSpPr>
@@ -7179,9 +7297,11 @@
       <p:sp>
         <p:nvSpPr>
           <p:cNvPr id="71" name="Google Shape;71;p10"/>
-          <p:cNvSpPr txBox="1"/>
+          <p:cNvSpPr txBox="1">
+            <a:spLocks noGrp="1"/>
+          </p:cNvSpPr>
           <p:nvPr>
-            <p:ph idx="1" type="body"/>
+            <p:ph type="body" idx="1"/>
           </p:nvPr>
         </p:nvSpPr>
         <p:spPr>
@@ -7194,11 +7314,11 @@
           </a:prstGeom>
         </p:spPr>
         <p:txBody>
-          <a:bodyPr anchorCtr="0" anchor="ctr" bIns="91425" lIns="91425" spcFirstLastPara="1" rIns="91425" wrap="square" tIns="91425">
+          <a:bodyPr spcFirstLastPara="1" wrap="square" lIns="91425" tIns="91425" rIns="91425" bIns="91425" anchor="ctr" anchorCtr="0">
             <a:normAutofit/>
           </a:bodyPr>
           <a:lstStyle>
-            <a:lvl1pPr indent="-228600" lvl="0" marL="457200">
+            <a:lvl1pPr marL="457200" lvl="0" indent="-228600">
               <a:lnSpc>
                 <a:spcPct val="100000"/>
               </a:lnSpc>
@@ -7213,15 +7333,19 @@
               <a:defRPr/>
             </a:lvl1pPr>
           </a:lstStyle>
-          <a:p/>
+          <a:p>
+            <a:endParaRPr/>
+          </a:p>
         </p:txBody>
       </p:sp>
       <p:sp>
         <p:nvSpPr>
           <p:cNvPr id="72" name="Google Shape;72;p10"/>
-          <p:cNvSpPr txBox="1"/>
+          <p:cNvSpPr txBox="1">
+            <a:spLocks noGrp="1"/>
+          </p:cNvSpPr>
           <p:nvPr>
-            <p:ph idx="12" type="sldNum"/>
+            <p:ph type="sldNum" idx="12"/>
           </p:nvPr>
         </p:nvSpPr>
         <p:spPr>
@@ -7234,7 +7358,7 @@
           </a:prstGeom>
         </p:spPr>
         <p:txBody>
-          <a:bodyPr anchorCtr="0" anchor="ctr" bIns="91425" lIns="91425" spcFirstLastPara="1" rIns="91425" wrap="square" tIns="91425">
+          <a:bodyPr spcFirstLastPara="1" wrap="square" lIns="91425" tIns="91425" rIns="91425" bIns="91425" anchor="ctr" anchorCtr="0">
             <a:normAutofit/>
           </a:bodyPr>
           <a:lstStyle>
@@ -7276,7 +7400,7 @@
             </a:lvl9pPr>
           </a:lstStyle>
           <a:p>
-            <a:pPr indent="0" lvl="0" marL="0" rtl="0" algn="r">
+            <a:pPr marL="0" lvl="0" indent="0" algn="r" rtl="0">
               <a:spcBef>
                 <a:spcPts val="0"/>
               </a:spcBef>
@@ -7302,18 +7426,19 @@
 </file>
 
 <file path=ppt/slideMasters/slideMaster1.xml><?xml version="1.0" encoding="utf-8"?>
-<p:sldMaster xmlns:a="http://schemas.openxmlformats.org/drawingml/2006/main" xmlns:r="http://schemas.openxmlformats.org/officeDocument/2006/relationships" xmlns:mc="http://schemas.openxmlformats.org/markup-compatibility/2006" xmlns:mv="urn:schemas-microsoft-com:mac:vml" xmlns:p="http://schemas.openxmlformats.org/presentationml/2006/main" xmlns:c="http://schemas.openxmlformats.org/drawingml/2006/chart" xmlns:dgm="http://schemas.openxmlformats.org/drawingml/2006/diagram" xmlns:o="urn:schemas-microsoft-com:office:office" xmlns:v="urn:schemas-microsoft-com:vml" xmlns:pvml="urn:schemas-microsoft-com:office:powerpoint" xmlns:com="http://schemas.openxmlformats.org/drawingml/2006/compatibility" xmlns:p14="http://schemas.microsoft.com/office/powerpoint/2010/main" xmlns:p15="http://schemas.microsoft.com/office/powerpoint/2012/main" xmlns:ahyp="http://schemas.microsoft.com/office/drawing/2018/hyperlinkcolor">
+<p:sldMaster xmlns:a="http://schemas.openxmlformats.org/drawingml/2006/main" xmlns:r="http://schemas.openxmlformats.org/officeDocument/2006/relationships" xmlns:p="http://schemas.openxmlformats.org/presentationml/2006/main">
   <p:cSld name="streamline">
     <p:bg>
       <p:bgPr>
         <a:solidFill>
           <a:schemeClr val="lt1"/>
         </a:solidFill>
+        <a:effectLst/>
       </p:bgPr>
     </p:bg>
     <p:spTree>
       <p:nvGrpSpPr>
-        <p:cNvPr id="5" name="Shape 5"/>
+        <p:cNvPr id="1" name="Shape 5"/>
         <p:cNvGrpSpPr/>
         <p:nvPr/>
       </p:nvGrpSpPr>
@@ -7328,7 +7453,9 @@
       <p:sp>
         <p:nvSpPr>
           <p:cNvPr id="6" name="Google Shape;6;p1"/>
-          <p:cNvSpPr txBox="1"/>
+          <p:cNvSpPr txBox="1">
+            <a:spLocks noGrp="1"/>
+          </p:cNvSpPr>
           <p:nvPr>
             <p:ph type="title"/>
           </p:nvPr>
@@ -7347,7 +7474,7 @@
           </a:ln>
         </p:spPr>
         <p:txBody>
-          <a:bodyPr anchorCtr="0" anchor="t" bIns="91425" lIns="91425" spcFirstLastPara="1" rIns="91425" wrap="square" tIns="91425">
+          <a:bodyPr spcFirstLastPara="1" wrap="square" lIns="91425" tIns="91425" rIns="91425" bIns="91425" anchor="t" anchorCtr="0">
             <a:normAutofit/>
           </a:bodyPr>
           <a:lstStyle>
@@ -7364,7 +7491,7 @@
               <a:buSzPts val="2800"/>
               <a:buFont typeface="Raleway"/>
               <a:buNone/>
-              <a:defRPr b="1" sz="2800">
+              <a:defRPr sz="2800" b="1">
                 <a:solidFill>
                   <a:schemeClr val="dk2"/>
                 </a:solidFill>
@@ -7387,7 +7514,7 @@
               <a:buSzPts val="2800"/>
               <a:buFont typeface="Raleway"/>
               <a:buNone/>
-              <a:defRPr b="1" sz="2800">
+              <a:defRPr sz="2800" b="1">
                 <a:solidFill>
                   <a:schemeClr val="dk2"/>
                 </a:solidFill>
@@ -7410,7 +7537,7 @@
               <a:buSzPts val="2800"/>
               <a:buFont typeface="Raleway"/>
               <a:buNone/>
-              <a:defRPr b="1" sz="2800">
+              <a:defRPr sz="2800" b="1">
                 <a:solidFill>
                   <a:schemeClr val="dk2"/>
                 </a:solidFill>
@@ -7433,7 +7560,7 @@
               <a:buSzPts val="2800"/>
               <a:buFont typeface="Raleway"/>
               <a:buNone/>
-              <a:defRPr b="1" sz="2800">
+              <a:defRPr sz="2800" b="1">
                 <a:solidFill>
                   <a:schemeClr val="dk2"/>
                 </a:solidFill>
@@ -7456,7 +7583,7 @@
               <a:buSzPts val="2800"/>
               <a:buFont typeface="Raleway"/>
               <a:buNone/>
-              <a:defRPr b="1" sz="2800">
+              <a:defRPr sz="2800" b="1">
                 <a:solidFill>
                   <a:schemeClr val="dk2"/>
                 </a:solidFill>
@@ -7479,7 +7606,7 @@
               <a:buSzPts val="2800"/>
               <a:buFont typeface="Raleway"/>
               <a:buNone/>
-              <a:defRPr b="1" sz="2800">
+              <a:defRPr sz="2800" b="1">
                 <a:solidFill>
                   <a:schemeClr val="dk2"/>
                 </a:solidFill>
@@ -7502,7 +7629,7 @@
               <a:buSzPts val="2800"/>
               <a:buFont typeface="Raleway"/>
               <a:buNone/>
-              <a:defRPr b="1" sz="2800">
+              <a:defRPr sz="2800" b="1">
                 <a:solidFill>
                   <a:schemeClr val="dk2"/>
                 </a:solidFill>
@@ -7525,7 +7652,7 @@
               <a:buSzPts val="2800"/>
               <a:buFont typeface="Raleway"/>
               <a:buNone/>
-              <a:defRPr b="1" sz="2800">
+              <a:defRPr sz="2800" b="1">
                 <a:solidFill>
                   <a:schemeClr val="dk2"/>
                 </a:solidFill>
@@ -7548,7 +7675,7 @@
               <a:buSzPts val="2800"/>
               <a:buFont typeface="Raleway"/>
               <a:buNone/>
-              <a:defRPr b="1" sz="2800">
+              <a:defRPr sz="2800" b="1">
                 <a:solidFill>
                   <a:schemeClr val="dk2"/>
                 </a:solidFill>
@@ -7559,15 +7686,19 @@
               </a:defRPr>
             </a:lvl9pPr>
           </a:lstStyle>
-          <a:p/>
+          <a:p>
+            <a:endParaRPr/>
+          </a:p>
         </p:txBody>
       </p:sp>
       <p:sp>
         <p:nvSpPr>
           <p:cNvPr id="7" name="Google Shape;7;p1"/>
-          <p:cNvSpPr txBox="1"/>
+          <p:cNvSpPr txBox="1">
+            <a:spLocks noGrp="1"/>
+          </p:cNvSpPr>
           <p:nvPr>
-            <p:ph idx="1" type="body"/>
+            <p:ph type="body" idx="1"/>
           </p:nvPr>
         </p:nvSpPr>
         <p:spPr>
@@ -7584,11 +7715,11 @@
           </a:ln>
         </p:spPr>
         <p:txBody>
-          <a:bodyPr anchorCtr="0" anchor="t" bIns="91425" lIns="91425" spcFirstLastPara="1" rIns="91425" wrap="square" tIns="91425">
+          <a:bodyPr spcFirstLastPara="1" wrap="square" lIns="91425" tIns="91425" rIns="91425" bIns="91425" anchor="t" anchorCtr="0">
             <a:normAutofit/>
           </a:bodyPr>
           <a:lstStyle>
-            <a:lvl1pPr indent="-311150" lvl="0" marL="457200">
+            <a:lvl1pPr marL="457200" lvl="0" indent="-311150">
               <a:lnSpc>
                 <a:spcPct val="115000"/>
               </a:lnSpc>
@@ -7614,7 +7745,7 @@
                 <a:sym typeface="Lato"/>
               </a:defRPr>
             </a:lvl1pPr>
-            <a:lvl2pPr indent="-298450" lvl="1" marL="914400">
+            <a:lvl2pPr marL="914400" lvl="1" indent="-298450">
               <a:lnSpc>
                 <a:spcPct val="115000"/>
               </a:lnSpc>
@@ -7640,7 +7771,7 @@
                 <a:sym typeface="Lato"/>
               </a:defRPr>
             </a:lvl2pPr>
-            <a:lvl3pPr indent="-298450" lvl="2" marL="1371600">
+            <a:lvl3pPr marL="1371600" lvl="2" indent="-298450">
               <a:lnSpc>
                 <a:spcPct val="115000"/>
               </a:lnSpc>
@@ -7666,7 +7797,7 @@
                 <a:sym typeface="Lato"/>
               </a:defRPr>
             </a:lvl3pPr>
-            <a:lvl4pPr indent="-298450" lvl="3" marL="1828800">
+            <a:lvl4pPr marL="1828800" lvl="3" indent="-298450">
               <a:lnSpc>
                 <a:spcPct val="115000"/>
               </a:lnSpc>
@@ -7692,7 +7823,7 @@
                 <a:sym typeface="Lato"/>
               </a:defRPr>
             </a:lvl4pPr>
-            <a:lvl5pPr indent="-298450" lvl="4" marL="2286000">
+            <a:lvl5pPr marL="2286000" lvl="4" indent="-298450">
               <a:lnSpc>
                 <a:spcPct val="115000"/>
               </a:lnSpc>
@@ -7718,7 +7849,7 @@
                 <a:sym typeface="Lato"/>
               </a:defRPr>
             </a:lvl5pPr>
-            <a:lvl6pPr indent="-298450" lvl="5" marL="2743200">
+            <a:lvl6pPr marL="2743200" lvl="5" indent="-298450">
               <a:lnSpc>
                 <a:spcPct val="115000"/>
               </a:lnSpc>
@@ -7744,7 +7875,7 @@
                 <a:sym typeface="Lato"/>
               </a:defRPr>
             </a:lvl6pPr>
-            <a:lvl7pPr indent="-298450" lvl="6" marL="3200400">
+            <a:lvl7pPr marL="3200400" lvl="6" indent="-298450">
               <a:lnSpc>
                 <a:spcPct val="115000"/>
               </a:lnSpc>
@@ -7770,7 +7901,7 @@
                 <a:sym typeface="Lato"/>
               </a:defRPr>
             </a:lvl7pPr>
-            <a:lvl8pPr indent="-298450" lvl="7" marL="3657600">
+            <a:lvl8pPr marL="3657600" lvl="7" indent="-298450">
               <a:lnSpc>
                 <a:spcPct val="115000"/>
               </a:lnSpc>
@@ -7796,7 +7927,7 @@
                 <a:sym typeface="Lato"/>
               </a:defRPr>
             </a:lvl8pPr>
-            <a:lvl9pPr indent="-298450" lvl="8" marL="4114800">
+            <a:lvl9pPr marL="4114800" lvl="8" indent="-298450">
               <a:lnSpc>
                 <a:spcPct val="115000"/>
               </a:lnSpc>
@@ -7823,15 +7954,19 @@
               </a:defRPr>
             </a:lvl9pPr>
           </a:lstStyle>
-          <a:p/>
+          <a:p>
+            <a:endParaRPr/>
+          </a:p>
         </p:txBody>
       </p:sp>
       <p:sp>
         <p:nvSpPr>
           <p:cNvPr id="8" name="Google Shape;8;p1"/>
-          <p:cNvSpPr txBox="1"/>
+          <p:cNvSpPr txBox="1">
+            <a:spLocks noGrp="1"/>
+          </p:cNvSpPr>
           <p:nvPr>
-            <p:ph idx="12" type="sldNum"/>
+            <p:ph type="sldNum" idx="12"/>
           </p:nvPr>
         </p:nvSpPr>
         <p:spPr>
@@ -7848,7 +7983,7 @@
           </a:ln>
         </p:spPr>
         <p:txBody>
-          <a:bodyPr anchorCtr="0" anchor="ctr" bIns="91425" lIns="91425" spcFirstLastPara="1" rIns="91425" wrap="square" tIns="91425">
+          <a:bodyPr spcFirstLastPara="1" wrap="square" lIns="91425" tIns="91425" rIns="91425" bIns="91425" anchor="ctr" anchorCtr="0">
             <a:normAutofit/>
           </a:bodyPr>
           <a:lstStyle>
@@ -7962,7 +8097,7 @@
             </a:lvl9pPr>
           </a:lstStyle>
           <a:p>
-            <a:pPr indent="0" lvl="0" marL="0" rtl="0" algn="r">
+            <a:pPr marL="0" lvl="0" indent="0" algn="r" rtl="0">
               <a:spcBef>
                 <a:spcPts val="0"/>
               </a:spcBef>
@@ -7981,7 +8116,7 @@
       </p:sp>
     </p:spTree>
   </p:cSld>
-  <p:clrMap accent1="accent1" accent2="accent2" accent3="accent3" accent4="accent4" accent5="accent5" accent6="accent6" bg1="lt1" bg2="dk2" tx1="dk1" tx2="lt2" folHlink="folHlink" hlink="hlink"/>
+  <p:clrMap bg1="lt1" tx1="dk1" bg2="dk2" tx2="lt2" accent1="accent1" accent2="accent2" accent3="accent3" accent4="accent4" accent5="accent5" accent6="accent6" hlink="hlink" folHlink="folHlink"/>
   <p:sldLayoutIdLst>
     <p:sldLayoutId id="2147483648" r:id="rId1"/>
     <p:sldLayoutId id="2147483649" r:id="rId2"/>
@@ -7995,10 +8130,10 @@
     <p:sldLayoutId id="2147483657" r:id="rId10"/>
     <p:sldLayoutId id="2147483658" r:id="rId11"/>
   </p:sldLayoutIdLst>
-  <p:hf dt="0" ftr="0" hdr="0" sldNum="0"/>
+  <p:hf sldNum="0" hdr="0" ftr="0" dt="0"/>
   <p:txStyles>
     <p:titleStyle>
-      <a:defPPr lvl="0" marR="0" rtl="0" algn="l">
+      <a:defPPr marR="0" lvl="0" algn="l" rtl="0">
         <a:lnSpc>
           <a:spcPct val="100000"/>
         </a:lnSpc>
@@ -8009,7 +8144,7 @@
           <a:spcPts val="0"/>
         </a:spcAft>
       </a:defPPr>
-      <a:lvl1pPr lvl="0" marR="0" rtl="0" algn="l">
+      <a:lvl1pPr marR="0" lvl="0" algn="l" rtl="0">
         <a:lnSpc>
           <a:spcPct val="100000"/>
         </a:lnSpc>
@@ -8023,7 +8158,7 @@
           <a:srgbClr val="000000"/>
         </a:buClr>
         <a:buFont typeface="Arial"/>
-        <a:defRPr b="0" i="0" sz="1400" u="none" cap="none" strike="noStrike">
+        <a:defRPr sz="1400" b="0" i="0" u="none" strike="noStrike" cap="none">
           <a:solidFill>
             <a:srgbClr val="000000"/>
           </a:solidFill>
@@ -8033,7 +8168,7 @@
           <a:sym typeface="Arial"/>
         </a:defRPr>
       </a:lvl1pPr>
-      <a:lvl2pPr lvl="1" marR="0" rtl="0" algn="l">
+      <a:lvl2pPr marR="0" lvl="1" algn="l" rtl="0">
         <a:lnSpc>
           <a:spcPct val="100000"/>
         </a:lnSpc>
@@ -8047,7 +8182,7 @@
           <a:srgbClr val="000000"/>
         </a:buClr>
         <a:buFont typeface="Arial"/>
-        <a:defRPr b="0" i="0" sz="1400" u="none" cap="none" strike="noStrike">
+        <a:defRPr sz="1400" b="0" i="0" u="none" strike="noStrike" cap="none">
           <a:solidFill>
             <a:srgbClr val="000000"/>
           </a:solidFill>
@@ -8057,7 +8192,7 @@
           <a:sym typeface="Arial"/>
         </a:defRPr>
       </a:lvl2pPr>
-      <a:lvl3pPr lvl="2" marR="0" rtl="0" algn="l">
+      <a:lvl3pPr marR="0" lvl="2" algn="l" rtl="0">
         <a:lnSpc>
           <a:spcPct val="100000"/>
         </a:lnSpc>
@@ -8071,7 +8206,7 @@
           <a:srgbClr val="000000"/>
         </a:buClr>
         <a:buFont typeface="Arial"/>
-        <a:defRPr b="0" i="0" sz="1400" u="none" cap="none" strike="noStrike">
+        <a:defRPr sz="1400" b="0" i="0" u="none" strike="noStrike" cap="none">
           <a:solidFill>
             <a:srgbClr val="000000"/>
           </a:solidFill>
@@ -8081,7 +8216,7 @@
           <a:sym typeface="Arial"/>
         </a:defRPr>
       </a:lvl3pPr>
-      <a:lvl4pPr lvl="3" marR="0" rtl="0" algn="l">
+      <a:lvl4pPr marR="0" lvl="3" algn="l" rtl="0">
         <a:lnSpc>
           <a:spcPct val="100000"/>
         </a:lnSpc>
@@ -8095,7 +8230,7 @@
           <a:srgbClr val="000000"/>
         </a:buClr>
         <a:buFont typeface="Arial"/>
-        <a:defRPr b="0" i="0" sz="1400" u="none" cap="none" strike="noStrike">
+        <a:defRPr sz="1400" b="0" i="0" u="none" strike="noStrike" cap="none">
           <a:solidFill>
             <a:srgbClr val="000000"/>
           </a:solidFill>
@@ -8105,7 +8240,7 @@
           <a:sym typeface="Arial"/>
         </a:defRPr>
       </a:lvl4pPr>
-      <a:lvl5pPr lvl="4" marR="0" rtl="0" algn="l">
+      <a:lvl5pPr marR="0" lvl="4" algn="l" rtl="0">
         <a:lnSpc>
           <a:spcPct val="100000"/>
         </a:lnSpc>
@@ -8119,7 +8254,7 @@
           <a:srgbClr val="000000"/>
         </a:buClr>
         <a:buFont typeface="Arial"/>
-        <a:defRPr b="0" i="0" sz="1400" u="none" cap="none" strike="noStrike">
+        <a:defRPr sz="1400" b="0" i="0" u="none" strike="noStrike" cap="none">
           <a:solidFill>
             <a:srgbClr val="000000"/>
           </a:solidFill>
@@ -8129,7 +8264,7 @@
           <a:sym typeface="Arial"/>
         </a:defRPr>
       </a:lvl5pPr>
-      <a:lvl6pPr lvl="5" marR="0" rtl="0" algn="l">
+      <a:lvl6pPr marR="0" lvl="5" algn="l" rtl="0">
         <a:lnSpc>
           <a:spcPct val="100000"/>
         </a:lnSpc>
@@ -8143,7 +8278,7 @@
           <a:srgbClr val="000000"/>
         </a:buClr>
         <a:buFont typeface="Arial"/>
-        <a:defRPr b="0" i="0" sz="1400" u="none" cap="none" strike="noStrike">
+        <a:defRPr sz="1400" b="0" i="0" u="none" strike="noStrike" cap="none">
           <a:solidFill>
             <a:srgbClr val="000000"/>
           </a:solidFill>
@@ -8153,7 +8288,7 @@
           <a:sym typeface="Arial"/>
         </a:defRPr>
       </a:lvl6pPr>
-      <a:lvl7pPr lvl="6" marR="0" rtl="0" algn="l">
+      <a:lvl7pPr marR="0" lvl="6" algn="l" rtl="0">
         <a:lnSpc>
           <a:spcPct val="100000"/>
         </a:lnSpc>
@@ -8167,7 +8302,7 @@
           <a:srgbClr val="000000"/>
         </a:buClr>
         <a:buFont typeface="Arial"/>
-        <a:defRPr b="0" i="0" sz="1400" u="none" cap="none" strike="noStrike">
+        <a:defRPr sz="1400" b="0" i="0" u="none" strike="noStrike" cap="none">
           <a:solidFill>
             <a:srgbClr val="000000"/>
           </a:solidFill>
@@ -8177,7 +8312,7 @@
           <a:sym typeface="Arial"/>
         </a:defRPr>
       </a:lvl7pPr>
-      <a:lvl8pPr lvl="7" marR="0" rtl="0" algn="l">
+      <a:lvl8pPr marR="0" lvl="7" algn="l" rtl="0">
         <a:lnSpc>
           <a:spcPct val="100000"/>
         </a:lnSpc>
@@ -8191,7 +8326,7 @@
           <a:srgbClr val="000000"/>
         </a:buClr>
         <a:buFont typeface="Arial"/>
-        <a:defRPr b="0" i="0" sz="1400" u="none" cap="none" strike="noStrike">
+        <a:defRPr sz="1400" b="0" i="0" u="none" strike="noStrike" cap="none">
           <a:solidFill>
             <a:srgbClr val="000000"/>
           </a:solidFill>
@@ -8201,7 +8336,7 @@
           <a:sym typeface="Arial"/>
         </a:defRPr>
       </a:lvl8pPr>
-      <a:lvl9pPr lvl="8" marR="0" rtl="0" algn="l">
+      <a:lvl9pPr marR="0" lvl="8" algn="l" rtl="0">
         <a:lnSpc>
           <a:spcPct val="100000"/>
         </a:lnSpc>
@@ -8215,7 +8350,7 @@
           <a:srgbClr val="000000"/>
         </a:buClr>
         <a:buFont typeface="Arial"/>
-        <a:defRPr b="0" i="0" sz="1400" u="none" cap="none" strike="noStrike">
+        <a:defRPr sz="1400" b="0" i="0" u="none" strike="noStrike" cap="none">
           <a:solidFill>
             <a:srgbClr val="000000"/>
           </a:solidFill>
@@ -8227,7 +8362,7 @@
       </a:lvl9pPr>
     </p:titleStyle>
     <p:bodyStyle>
-      <a:defPPr lvl="0" marR="0" rtl="0" algn="l">
+      <a:defPPr marR="0" lvl="0" algn="l" rtl="0">
         <a:lnSpc>
           <a:spcPct val="100000"/>
         </a:lnSpc>
@@ -8238,7 +8373,7 @@
           <a:spcPts val="0"/>
         </a:spcAft>
       </a:defPPr>
-      <a:lvl1pPr lvl="0" marR="0" rtl="0" algn="l">
+      <a:lvl1pPr marR="0" lvl="0" algn="l" rtl="0">
         <a:lnSpc>
           <a:spcPct val="100000"/>
         </a:lnSpc>
@@ -8252,7 +8387,7 @@
           <a:srgbClr val="000000"/>
         </a:buClr>
         <a:buFont typeface="Arial"/>
-        <a:defRPr b="0" i="0" sz="1400" u="none" cap="none" strike="noStrike">
+        <a:defRPr sz="1400" b="0" i="0" u="none" strike="noStrike" cap="none">
           <a:solidFill>
             <a:srgbClr val="000000"/>
           </a:solidFill>
@@ -8262,7 +8397,7 @@
           <a:sym typeface="Arial"/>
         </a:defRPr>
       </a:lvl1pPr>
-      <a:lvl2pPr lvl="1" marR="0" rtl="0" algn="l">
+      <a:lvl2pPr marR="0" lvl="1" algn="l" rtl="0">
         <a:lnSpc>
           <a:spcPct val="100000"/>
         </a:lnSpc>
@@ -8276,7 +8411,7 @@
           <a:srgbClr val="000000"/>
         </a:buClr>
         <a:buFont typeface="Arial"/>
-        <a:defRPr b="0" i="0" sz="1400" u="none" cap="none" strike="noStrike">
+        <a:defRPr sz="1400" b="0" i="0" u="none" strike="noStrike" cap="none">
           <a:solidFill>
             <a:srgbClr val="000000"/>
           </a:solidFill>
@@ -8286,7 +8421,7 @@
           <a:sym typeface="Arial"/>
         </a:defRPr>
       </a:lvl2pPr>
-      <a:lvl3pPr lvl="2" marR="0" rtl="0" algn="l">
+      <a:lvl3pPr marR="0" lvl="2" algn="l" rtl="0">
         <a:lnSpc>
           <a:spcPct val="100000"/>
         </a:lnSpc>
@@ -8300,7 +8435,7 @@
           <a:srgbClr val="000000"/>
         </a:buClr>
         <a:buFont typeface="Arial"/>
-        <a:defRPr b="0" i="0" sz="1400" u="none" cap="none" strike="noStrike">
+        <a:defRPr sz="1400" b="0" i="0" u="none" strike="noStrike" cap="none">
           <a:solidFill>
             <a:srgbClr val="000000"/>
           </a:solidFill>
@@ -8310,7 +8445,7 @@
           <a:sym typeface="Arial"/>
         </a:defRPr>
       </a:lvl3pPr>
-      <a:lvl4pPr lvl="3" marR="0" rtl="0" algn="l">
+      <a:lvl4pPr marR="0" lvl="3" algn="l" rtl="0">
         <a:lnSpc>
           <a:spcPct val="100000"/>
         </a:lnSpc>
@@ -8324,7 +8459,7 @@
           <a:srgbClr val="000000"/>
         </a:buClr>
         <a:buFont typeface="Arial"/>
-        <a:defRPr b="0" i="0" sz="1400" u="none" cap="none" strike="noStrike">
+        <a:defRPr sz="1400" b="0" i="0" u="none" strike="noStrike" cap="none">
           <a:solidFill>
             <a:srgbClr val="000000"/>
           </a:solidFill>
@@ -8334,7 +8469,7 @@
           <a:sym typeface="Arial"/>
         </a:defRPr>
       </a:lvl4pPr>
-      <a:lvl5pPr lvl="4" marR="0" rtl="0" algn="l">
+      <a:lvl5pPr marR="0" lvl="4" algn="l" rtl="0">
         <a:lnSpc>
           <a:spcPct val="100000"/>
         </a:lnSpc>
@@ -8348,7 +8483,7 @@
           <a:srgbClr val="000000"/>
         </a:buClr>
         <a:buFont typeface="Arial"/>
-        <a:defRPr b="0" i="0" sz="1400" u="none" cap="none" strike="noStrike">
+        <a:defRPr sz="1400" b="0" i="0" u="none" strike="noStrike" cap="none">
           <a:solidFill>
             <a:srgbClr val="000000"/>
           </a:solidFill>
@@ -8358,7 +8493,7 @@
           <a:sym typeface="Arial"/>
         </a:defRPr>
       </a:lvl5pPr>
-      <a:lvl6pPr lvl="5" marR="0" rtl="0" algn="l">
+      <a:lvl6pPr marR="0" lvl="5" algn="l" rtl="0">
         <a:lnSpc>
           <a:spcPct val="100000"/>
         </a:lnSpc>
@@ -8372,7 +8507,7 @@
           <a:srgbClr val="000000"/>
         </a:buClr>
         <a:buFont typeface="Arial"/>
-        <a:defRPr b="0" i="0" sz="1400" u="none" cap="none" strike="noStrike">
+        <a:defRPr sz="1400" b="0" i="0" u="none" strike="noStrike" cap="none">
           <a:solidFill>
             <a:srgbClr val="000000"/>
           </a:solidFill>
@@ -8382,7 +8517,7 @@
           <a:sym typeface="Arial"/>
         </a:defRPr>
       </a:lvl6pPr>
-      <a:lvl7pPr lvl="6" marR="0" rtl="0" algn="l">
+      <a:lvl7pPr marR="0" lvl="6" algn="l" rtl="0">
         <a:lnSpc>
           <a:spcPct val="100000"/>
         </a:lnSpc>
@@ -8396,7 +8531,7 @@
           <a:srgbClr val="000000"/>
         </a:buClr>
         <a:buFont typeface="Arial"/>
-        <a:defRPr b="0" i="0" sz="1400" u="none" cap="none" strike="noStrike">
+        <a:defRPr sz="1400" b="0" i="0" u="none" strike="noStrike" cap="none">
           <a:solidFill>
             <a:srgbClr val="000000"/>
           </a:solidFill>
@@ -8406,7 +8541,7 @@
           <a:sym typeface="Arial"/>
         </a:defRPr>
       </a:lvl7pPr>
-      <a:lvl8pPr lvl="7" marR="0" rtl="0" algn="l">
+      <a:lvl8pPr marR="0" lvl="7" algn="l" rtl="0">
         <a:lnSpc>
           <a:spcPct val="100000"/>
         </a:lnSpc>
@@ -8420,7 +8555,7 @@
           <a:srgbClr val="000000"/>
         </a:buClr>
         <a:buFont typeface="Arial"/>
-        <a:defRPr b="0" i="0" sz="1400" u="none" cap="none" strike="noStrike">
+        <a:defRPr sz="1400" b="0" i="0" u="none" strike="noStrike" cap="none">
           <a:solidFill>
             <a:srgbClr val="000000"/>
           </a:solidFill>
@@ -8430,7 +8565,7 @@
           <a:sym typeface="Arial"/>
         </a:defRPr>
       </a:lvl8pPr>
-      <a:lvl9pPr lvl="8" marR="0" rtl="0" algn="l">
+      <a:lvl9pPr marR="0" lvl="8" algn="l" rtl="0">
         <a:lnSpc>
           <a:spcPct val="100000"/>
         </a:lnSpc>
@@ -8444,7 +8579,7 @@
           <a:srgbClr val="000000"/>
         </a:buClr>
         <a:buFont typeface="Arial"/>
-        <a:defRPr b="0" i="0" sz="1400" u="none" cap="none" strike="noStrike">
+        <a:defRPr sz="1400" b="0" i="0" u="none" strike="noStrike" cap="none">
           <a:solidFill>
             <a:srgbClr val="000000"/>
           </a:solidFill>
@@ -8456,7 +8591,7 @@
       </a:lvl9pPr>
     </p:bodyStyle>
     <p:otherStyle>
-      <a:defPPr lvl="0" marR="0" rtl="0" algn="l">
+      <a:defPPr marR="0" lvl="0" algn="l" rtl="0">
         <a:lnSpc>
           <a:spcPct val="100000"/>
         </a:lnSpc>
@@ -8467,7 +8602,7 @@
           <a:spcPts val="0"/>
         </a:spcAft>
       </a:defPPr>
-      <a:lvl1pPr lvl="0" marR="0" rtl="0" algn="l">
+      <a:lvl1pPr marR="0" lvl="0" algn="l" rtl="0">
         <a:lnSpc>
           <a:spcPct val="100000"/>
         </a:lnSpc>
@@ -8481,7 +8616,7 @@
           <a:srgbClr val="000000"/>
         </a:buClr>
         <a:buFont typeface="Arial"/>
-        <a:defRPr b="0" i="0" sz="1400" u="none" cap="none" strike="noStrike">
+        <a:defRPr sz="1400" b="0" i="0" u="none" strike="noStrike" cap="none">
           <a:solidFill>
             <a:srgbClr val="000000"/>
           </a:solidFill>
@@ -8491,7 +8626,7 @@
           <a:sym typeface="Arial"/>
         </a:defRPr>
       </a:lvl1pPr>
-      <a:lvl2pPr lvl="1" marR="0" rtl="0" algn="l">
+      <a:lvl2pPr marR="0" lvl="1" algn="l" rtl="0">
         <a:lnSpc>
           <a:spcPct val="100000"/>
         </a:lnSpc>
@@ -8505,7 +8640,7 @@
           <a:srgbClr val="000000"/>
         </a:buClr>
         <a:buFont typeface="Arial"/>
-        <a:defRPr b="0" i="0" sz="1400" u="none" cap="none" strike="noStrike">
+        <a:defRPr sz="1400" b="0" i="0" u="none" strike="noStrike" cap="none">
           <a:solidFill>
             <a:srgbClr val="000000"/>
           </a:solidFill>
@@ -8515,7 +8650,7 @@
           <a:sym typeface="Arial"/>
         </a:defRPr>
       </a:lvl2pPr>
-      <a:lvl3pPr lvl="2" marR="0" rtl="0" algn="l">
+      <a:lvl3pPr marR="0" lvl="2" algn="l" rtl="0">
         <a:lnSpc>
           <a:spcPct val="100000"/>
         </a:lnSpc>
@@ -8529,7 +8664,7 @@
           <a:srgbClr val="000000"/>
         </a:buClr>
         <a:buFont typeface="Arial"/>
-        <a:defRPr b="0" i="0" sz="1400" u="none" cap="none" strike="noStrike">
+        <a:defRPr sz="1400" b="0" i="0" u="none" strike="noStrike" cap="none">
           <a:solidFill>
             <a:srgbClr val="000000"/>
           </a:solidFill>
@@ -8539,7 +8674,7 @@
           <a:sym typeface="Arial"/>
         </a:defRPr>
       </a:lvl3pPr>
-      <a:lvl4pPr lvl="3" marR="0" rtl="0" algn="l">
+      <a:lvl4pPr marR="0" lvl="3" algn="l" rtl="0">
         <a:lnSpc>
           <a:spcPct val="100000"/>
         </a:lnSpc>
@@ -8553,7 +8688,7 @@
           <a:srgbClr val="000000"/>
         </a:buClr>
         <a:buFont typeface="Arial"/>
-        <a:defRPr b="0" i="0" sz="1400" u="none" cap="none" strike="noStrike">
+        <a:defRPr sz="1400" b="0" i="0" u="none" strike="noStrike" cap="none">
           <a:solidFill>
             <a:srgbClr val="000000"/>
           </a:solidFill>
@@ -8563,7 +8698,7 @@
           <a:sym typeface="Arial"/>
         </a:defRPr>
       </a:lvl4pPr>
-      <a:lvl5pPr lvl="4" marR="0" rtl="0" algn="l">
+      <a:lvl5pPr marR="0" lvl="4" algn="l" rtl="0">
         <a:lnSpc>
           <a:spcPct val="100000"/>
         </a:lnSpc>
@@ -8577,7 +8712,7 @@
           <a:srgbClr val="000000"/>
         </a:buClr>
         <a:buFont typeface="Arial"/>
-        <a:defRPr b="0" i="0" sz="1400" u="none" cap="none" strike="noStrike">
+        <a:defRPr sz="1400" b="0" i="0" u="none" strike="noStrike" cap="none">
           <a:solidFill>
             <a:srgbClr val="000000"/>
           </a:solidFill>
@@ -8587,7 +8722,7 @@
           <a:sym typeface="Arial"/>
         </a:defRPr>
       </a:lvl5pPr>
-      <a:lvl6pPr lvl="5" marR="0" rtl="0" algn="l">
+      <a:lvl6pPr marR="0" lvl="5" algn="l" rtl="0">
         <a:lnSpc>
           <a:spcPct val="100000"/>
         </a:lnSpc>
@@ -8601,7 +8736,7 @@
           <a:srgbClr val="000000"/>
         </a:buClr>
         <a:buFont typeface="Arial"/>
-        <a:defRPr b="0" i="0" sz="1400" u="none" cap="none" strike="noStrike">
+        <a:defRPr sz="1400" b="0" i="0" u="none" strike="noStrike" cap="none">
           <a:solidFill>
             <a:srgbClr val="000000"/>
           </a:solidFill>
@@ -8611,7 +8746,7 @@
           <a:sym typeface="Arial"/>
         </a:defRPr>
       </a:lvl6pPr>
-      <a:lvl7pPr lvl="6" marR="0" rtl="0" algn="l">
+      <a:lvl7pPr marR="0" lvl="6" algn="l" rtl="0">
         <a:lnSpc>
           <a:spcPct val="100000"/>
         </a:lnSpc>
@@ -8625,7 +8760,7 @@
           <a:srgbClr val="000000"/>
         </a:buClr>
         <a:buFont typeface="Arial"/>
-        <a:defRPr b="0" i="0" sz="1400" u="none" cap="none" strike="noStrike">
+        <a:defRPr sz="1400" b="0" i="0" u="none" strike="noStrike" cap="none">
           <a:solidFill>
             <a:srgbClr val="000000"/>
           </a:solidFill>
@@ -8635,7 +8770,7 @@
           <a:sym typeface="Arial"/>
         </a:defRPr>
       </a:lvl7pPr>
-      <a:lvl8pPr lvl="7" marR="0" rtl="0" algn="l">
+      <a:lvl8pPr marR="0" lvl="7" algn="l" rtl="0">
         <a:lnSpc>
           <a:spcPct val="100000"/>
         </a:lnSpc>
@@ -8649,7 +8784,7 @@
           <a:srgbClr val="000000"/>
         </a:buClr>
         <a:buFont typeface="Arial"/>
-        <a:defRPr b="0" i="0" sz="1400" u="none" cap="none" strike="noStrike">
+        <a:defRPr sz="1400" b="0" i="0" u="none" strike="noStrike" cap="none">
           <a:solidFill>
             <a:srgbClr val="000000"/>
           </a:solidFill>
@@ -8659,7 +8794,7 @@
           <a:sym typeface="Arial"/>
         </a:defRPr>
       </a:lvl8pPr>
-      <a:lvl9pPr lvl="8" marR="0" rtl="0" algn="l">
+      <a:lvl9pPr marR="0" lvl="8" algn="l" rtl="0">
         <a:lnSpc>
           <a:spcPct val="100000"/>
         </a:lnSpc>
@@ -8673,7 +8808,7 @@
           <a:srgbClr val="000000"/>
         </a:buClr>
         <a:buFont typeface="Arial"/>
-        <a:defRPr b="0" i="0" sz="1400" u="none" cap="none" strike="noStrike">
+        <a:defRPr sz="1400" b="0" i="0" u="none" strike="noStrike" cap="none">
           <a:solidFill>
             <a:srgbClr val="000000"/>
           </a:solidFill>
@@ -8689,11 +8824,11 @@
 </file>
 
 <file path=ppt/slides/slide1.xml><?xml version="1.0" encoding="utf-8"?>
-<p:sld xmlns:a="http://schemas.openxmlformats.org/drawingml/2006/main" xmlns:r="http://schemas.openxmlformats.org/officeDocument/2006/relationships" xmlns:mc="http://schemas.openxmlformats.org/markup-compatibility/2006" xmlns:mv="urn:schemas-microsoft-com:mac:vml" xmlns:p="http://schemas.openxmlformats.org/presentationml/2006/main" xmlns:c="http://schemas.openxmlformats.org/drawingml/2006/chart" xmlns:dgm="http://schemas.openxmlformats.org/drawingml/2006/diagram" xmlns:o="urn:schemas-microsoft-com:office:office" xmlns:v="urn:schemas-microsoft-com:vml" xmlns:pvml="urn:schemas-microsoft-com:office:powerpoint" xmlns:com="http://schemas.openxmlformats.org/drawingml/2006/compatibility" xmlns:p14="http://schemas.microsoft.com/office/powerpoint/2010/main" xmlns:p15="http://schemas.microsoft.com/office/powerpoint/2012/main" xmlns:ahyp="http://schemas.microsoft.com/office/drawing/2018/hyperlinkcolor">
+<p:sld xmlns:a="http://schemas.openxmlformats.org/drawingml/2006/main" xmlns:r="http://schemas.openxmlformats.org/officeDocument/2006/relationships" xmlns:p="http://schemas.openxmlformats.org/presentationml/2006/main">
   <p:cSld>
     <p:spTree>
       <p:nvGrpSpPr>
-        <p:cNvPr id="85" name="Shape 85"/>
+        <p:cNvPr id="1" name="Shape 85"/>
         <p:cNvGrpSpPr/>
         <p:nvPr/>
       </p:nvGrpSpPr>
@@ -8708,7 +8843,9 @@
       <p:sp>
         <p:nvSpPr>
           <p:cNvPr id="86" name="Google Shape;86;p13"/>
-          <p:cNvSpPr txBox="1"/>
+          <p:cNvSpPr txBox="1">
+            <a:spLocks noGrp="1"/>
+          </p:cNvSpPr>
           <p:nvPr>
             <p:ph type="ctrTitle"/>
           </p:nvPr>
@@ -8716,19 +8853,19 @@
         <p:spPr>
           <a:xfrm>
             <a:off x="729450" y="1322450"/>
-            <a:ext cx="7688100" cy="837600"/>
+            <a:ext cx="7688100" cy="2606700"/>
           </a:xfrm>
           <a:prstGeom prst="rect">
             <a:avLst/>
           </a:prstGeom>
         </p:spPr>
         <p:txBody>
-          <a:bodyPr anchorCtr="0" anchor="t" bIns="91425" lIns="91425" spcFirstLastPara="1" rIns="91425" wrap="square" tIns="91425">
+          <a:bodyPr spcFirstLastPara="1" wrap="square" lIns="91425" tIns="91425" rIns="91425" bIns="91425" anchor="t" anchorCtr="0">
             <a:normAutofit/>
           </a:bodyPr>
           <a:lstStyle/>
           <a:p>
-            <a:pPr indent="0" lvl="0" marL="0" rtl="0" algn="l">
+            <a:pPr marL="0" lvl="0" indent="0" algn="l" rtl="0">
               <a:spcBef>
                 <a:spcPts val="0"/>
               </a:spcBef>
@@ -8738,7 +8875,7 @@
               <a:buNone/>
             </a:pPr>
             <a:r>
-              <a:rPr b="0" lang="zh-CN" sz="4000">
+              <a:rPr lang="zh-CN" sz="4000" b="0">
                 <a:solidFill>
                   <a:srgbClr val="000000"/>
                 </a:solidFill>
@@ -8747,7 +8884,7 @@
                 <a:cs typeface="Times New Roman"/>
                 <a:sym typeface="Times New Roman"/>
               </a:rPr>
-              <a:t>Industrial Safety Dashboard</a:t>
+              <a:t>Data Visualization Dashboard for Manufacturing Plant and Industrial Safety</a:t>
             </a:r>
             <a:endParaRPr sz="4000">
               <a:latin typeface="Times New Roman"/>
@@ -8761,14 +8898,16 @@
       <p:sp>
         <p:nvSpPr>
           <p:cNvPr id="87" name="Google Shape;87;p13"/>
-          <p:cNvSpPr txBox="1"/>
+          <p:cNvSpPr txBox="1">
+            <a:spLocks noGrp="1"/>
+          </p:cNvSpPr>
           <p:nvPr>
-            <p:ph idx="1" type="subTitle"/>
+            <p:ph type="subTitle" idx="1"/>
           </p:nvPr>
         </p:nvSpPr>
         <p:spPr>
           <a:xfrm>
-            <a:off x="729627" y="3172900"/>
+            <a:off x="729627" y="4222375"/>
             <a:ext cx="7688100" cy="541200"/>
           </a:xfrm>
           <a:prstGeom prst="rect">
@@ -8776,12 +8915,12 @@
           </a:prstGeom>
         </p:spPr>
         <p:txBody>
-          <a:bodyPr anchorCtr="0" anchor="t" bIns="91425" lIns="91425" spcFirstLastPara="1" rIns="91425" wrap="square" tIns="91425">
+          <a:bodyPr spcFirstLastPara="1" wrap="square" lIns="91425" tIns="91425" rIns="91425" bIns="91425" anchor="t" anchorCtr="0">
             <a:normAutofit/>
           </a:bodyPr>
           <a:lstStyle/>
           <a:p>
-            <a:pPr indent="0" lvl="0" marL="0" rtl="0" algn="l">
+            <a:pPr marL="0" lvl="0" indent="0" algn="l" rtl="0">
               <a:spcBef>
                 <a:spcPts val="0"/>
               </a:spcBef>
@@ -8816,7 +8955,7 @@
         </p:nvSpPr>
         <p:spPr>
           <a:xfrm>
-            <a:off x="729450" y="2263950"/>
+            <a:off x="729450" y="3606775"/>
             <a:ext cx="8094600" cy="615600"/>
           </a:xfrm>
           <a:prstGeom prst="rect">
@@ -8828,12 +8967,12 @@
           </a:ln>
         </p:spPr>
         <p:txBody>
-          <a:bodyPr anchorCtr="0" anchor="t" bIns="91425" lIns="91425" spcFirstLastPara="1" rIns="91425" wrap="square" tIns="91425">
+          <a:bodyPr spcFirstLastPara="1" wrap="square" lIns="91425" tIns="91425" rIns="91425" bIns="91425" anchor="t" anchorCtr="0">
             <a:spAutoFit/>
           </a:bodyPr>
           <a:lstStyle/>
           <a:p>
-            <a:pPr indent="0" lvl="0" marL="0" rtl="0" algn="l">
+            <a:pPr marL="0" lvl="0" indent="0" algn="l" rtl="0">
               <a:spcBef>
                 <a:spcPts val="0"/>
               </a:spcBef>
@@ -8864,11 +9003,11 @@
 </file>
 
 <file path=ppt/slides/slide10.xml><?xml version="1.0" encoding="utf-8"?>
-<p:sld xmlns:a="http://schemas.openxmlformats.org/drawingml/2006/main" xmlns:r="http://schemas.openxmlformats.org/officeDocument/2006/relationships" xmlns:mc="http://schemas.openxmlformats.org/markup-compatibility/2006" xmlns:mv="urn:schemas-microsoft-com:mac:vml" xmlns:p="http://schemas.openxmlformats.org/presentationml/2006/main" xmlns:c="http://schemas.openxmlformats.org/drawingml/2006/chart" xmlns:dgm="http://schemas.openxmlformats.org/drawingml/2006/diagram" xmlns:o="urn:schemas-microsoft-com:office:office" xmlns:v="urn:schemas-microsoft-com:vml" xmlns:pvml="urn:schemas-microsoft-com:office:powerpoint" xmlns:com="http://schemas.openxmlformats.org/drawingml/2006/compatibility" xmlns:p14="http://schemas.microsoft.com/office/powerpoint/2010/main" xmlns:p15="http://schemas.microsoft.com/office/powerpoint/2012/main" xmlns:ahyp="http://schemas.microsoft.com/office/drawing/2018/hyperlinkcolor">
+<p:sld xmlns:a="http://schemas.openxmlformats.org/drawingml/2006/main" xmlns:r="http://schemas.openxmlformats.org/officeDocument/2006/relationships" xmlns:p="http://schemas.openxmlformats.org/presentationml/2006/main">
   <p:cSld>
     <p:spTree>
       <p:nvGrpSpPr>
-        <p:cNvPr id="150" name="Shape 150"/>
+        <p:cNvPr id="1" name="Shape 150"/>
         <p:cNvGrpSpPr/>
         <p:nvPr/>
       </p:nvGrpSpPr>
@@ -8883,7 +9022,9 @@
       <p:sp>
         <p:nvSpPr>
           <p:cNvPr id="151" name="Google Shape;151;p22"/>
-          <p:cNvSpPr txBox="1"/>
+          <p:cNvSpPr txBox="1">
+            <a:spLocks noGrp="1"/>
+          </p:cNvSpPr>
           <p:nvPr>
             <p:ph type="title"/>
           </p:nvPr>
@@ -8898,12 +9039,12 @@
           </a:prstGeom>
         </p:spPr>
         <p:txBody>
-          <a:bodyPr anchorCtr="0" anchor="t" bIns="91425" lIns="91425" spcFirstLastPara="1" rIns="91425" wrap="square" tIns="91425">
+          <a:bodyPr spcFirstLastPara="1" wrap="square" lIns="91425" tIns="91425" rIns="91425" bIns="91425" anchor="t" anchorCtr="0">
             <a:noAutofit/>
           </a:bodyPr>
           <a:lstStyle/>
           <a:p>
-            <a:pPr indent="0" lvl="0" marL="0" rtl="0" algn="l">
+            <a:pPr marL="0" lvl="0" indent="0" algn="l" rtl="0">
               <a:spcBef>
                 <a:spcPts val="0"/>
               </a:spcBef>
@@ -8913,7 +9054,7 @@
               <a:buNone/>
             </a:pPr>
             <a:r>
-              <a:rPr b="0" lang="zh-CN" sz="2800">
+              <a:rPr lang="zh-CN" sz="2800" b="0">
                 <a:solidFill>
                   <a:srgbClr val="000000"/>
                 </a:solidFill>
@@ -8936,9 +9077,11 @@
       <p:sp>
         <p:nvSpPr>
           <p:cNvPr id="152" name="Google Shape;152;p22"/>
-          <p:cNvSpPr txBox="1"/>
+          <p:cNvSpPr txBox="1">
+            <a:spLocks noGrp="1"/>
+          </p:cNvSpPr>
           <p:nvPr>
-            <p:ph idx="1" type="body"/>
+            <p:ph type="body" idx="1"/>
           </p:nvPr>
         </p:nvSpPr>
         <p:spPr>
@@ -8951,12 +9094,12 @@
           </a:prstGeom>
         </p:spPr>
         <p:txBody>
-          <a:bodyPr anchorCtr="0" anchor="t" bIns="91425" lIns="91425" spcFirstLastPara="1" rIns="91425" wrap="square" tIns="91425">
+          <a:bodyPr spcFirstLastPara="1" wrap="square" lIns="91425" tIns="91425" rIns="91425" bIns="91425" anchor="t" anchorCtr="0">
             <a:noAutofit/>
           </a:bodyPr>
           <a:lstStyle/>
           <a:p>
-            <a:pPr indent="0" lvl="0" marL="0" rtl="0" algn="l">
+            <a:pPr marL="0" lvl="0" indent="0" algn="l" rtl="0">
               <a:lnSpc>
                 <a:spcPct val="100000"/>
               </a:lnSpc>
@@ -8969,7 +9112,7 @@
               <a:buNone/>
             </a:pPr>
             <a:r>
-              <a:rPr b="1" lang="zh-CN" sz="2000">
+              <a:rPr lang="zh-CN" sz="2000" b="1">
                 <a:solidFill>
                   <a:srgbClr val="000000"/>
                 </a:solidFill>
@@ -8980,7 +9123,7 @@
               </a:rPr>
               <a:t>Implications of Findings:</a:t>
             </a:r>
-            <a:endParaRPr b="1" sz="2000">
+            <a:endParaRPr sz="2000" b="1">
               <a:solidFill>
                 <a:srgbClr val="000000"/>
               </a:solidFill>
@@ -8991,7 +9134,7 @@
             </a:endParaRPr>
           </a:p>
           <a:p>
-            <a:pPr indent="0" lvl="0" marL="0" rtl="0" algn="l">
+            <a:pPr marL="0" lvl="0" indent="0" algn="l" rtl="0">
               <a:lnSpc>
                 <a:spcPct val="100000"/>
               </a:lnSpc>
@@ -9026,7 +9169,7 @@
             </a:endParaRPr>
           </a:p>
           <a:p>
-            <a:pPr indent="0" lvl="0" marL="0" rtl="0" algn="l">
+            <a:pPr marL="0" lvl="0" indent="0" algn="l" rtl="0">
               <a:lnSpc>
                 <a:spcPct val="100000"/>
               </a:lnSpc>
@@ -9048,19 +9191,7 @@
                 <a:cs typeface="Calibri"/>
                 <a:sym typeface="Calibri"/>
               </a:rPr>
-              <a:t>• </a:t>
-            </a:r>
-            <a:r>
-              <a:rPr lang="zh-CN" sz="1800">
-                <a:solidFill>
-                  <a:srgbClr val="000000"/>
-                </a:solidFill>
-                <a:latin typeface="Calibri"/>
-                <a:ea typeface="Calibri"/>
-                <a:cs typeface="Calibri"/>
-                <a:sym typeface="Calibri"/>
-              </a:rPr>
-              <a:t>Explore features and categorical/textual visualizations enhance user understanding and decision-making.</a:t>
+              <a:t>• Explore features and categorical/textual visualizations enhance user understanding and decision-making.</a:t>
             </a:r>
             <a:endParaRPr sz="1800">
               <a:solidFill>
@@ -9073,7 +9204,7 @@
             </a:endParaRPr>
           </a:p>
           <a:p>
-            <a:pPr indent="0" lvl="0" marL="0" rtl="0" algn="l">
+            <a:pPr marL="0" lvl="0" indent="0" algn="l" rtl="0">
               <a:lnSpc>
                 <a:spcPct val="100000"/>
               </a:lnSpc>
@@ -9108,7 +9239,7 @@
             </a:endParaRPr>
           </a:p>
           <a:p>
-            <a:pPr indent="0" lvl="0" marL="0" rtl="0" algn="l">
+            <a:pPr marL="0" lvl="0" indent="0" algn="l" rtl="0">
               <a:lnSpc>
                 <a:spcPct val="100000"/>
               </a:lnSpc>
@@ -9130,19 +9261,7 @@
                 <a:cs typeface="Calibri"/>
                 <a:sym typeface="Calibri"/>
               </a:rPr>
-              <a:t>• </a:t>
-            </a:r>
-            <a:r>
-              <a:rPr lang="zh-CN" sz="1800">
-                <a:solidFill>
-                  <a:srgbClr val="000000"/>
-                </a:solidFill>
-                <a:latin typeface="Calibri"/>
-                <a:ea typeface="Calibri"/>
-                <a:cs typeface="Calibri"/>
-                <a:sym typeface="Calibri"/>
-              </a:rPr>
-              <a:t>Forecasting results suggest even simple models can support trend-aware, proactive planning.</a:t>
+              <a:t>• Forecasting results suggest even simple models can support trend-aware, proactive planning.</a:t>
             </a:r>
             <a:endParaRPr sz="1800">
               <a:solidFill>
@@ -9155,7 +9274,7 @@
             </a:endParaRPr>
           </a:p>
           <a:p>
-            <a:pPr indent="0" lvl="0" marL="0" rtl="0" algn="l">
+            <a:pPr marL="0" lvl="0" indent="0" algn="l" rtl="0">
               <a:lnSpc>
                 <a:spcPct val="100000"/>
               </a:lnSpc>
@@ -9168,9 +9287,6 @@
               <a:buSzPts val="688"/>
               <a:buNone/>
             </a:pPr>
-            <a:r>
-              <a:t/>
-            </a:r>
             <a:endParaRPr sz="2000">
               <a:solidFill>
                 <a:srgbClr val="000000"/>
@@ -9192,11 +9308,11 @@
 </file>
 
 <file path=ppt/slides/slide11.xml><?xml version="1.0" encoding="utf-8"?>
-<p:sld xmlns:a="http://schemas.openxmlformats.org/drawingml/2006/main" xmlns:r="http://schemas.openxmlformats.org/officeDocument/2006/relationships" xmlns:mc="http://schemas.openxmlformats.org/markup-compatibility/2006" xmlns:mv="urn:schemas-microsoft-com:mac:vml" xmlns:p="http://schemas.openxmlformats.org/presentationml/2006/main" xmlns:c="http://schemas.openxmlformats.org/drawingml/2006/chart" xmlns:dgm="http://schemas.openxmlformats.org/drawingml/2006/diagram" xmlns:o="urn:schemas-microsoft-com:office:office" xmlns:v="urn:schemas-microsoft-com:vml" xmlns:pvml="urn:schemas-microsoft-com:office:powerpoint" xmlns:com="http://schemas.openxmlformats.org/drawingml/2006/compatibility" xmlns:p14="http://schemas.microsoft.com/office/powerpoint/2010/main" xmlns:p15="http://schemas.microsoft.com/office/powerpoint/2012/main" xmlns:ahyp="http://schemas.microsoft.com/office/drawing/2018/hyperlinkcolor">
+<p:sld xmlns:a="http://schemas.openxmlformats.org/drawingml/2006/main" xmlns:r="http://schemas.openxmlformats.org/officeDocument/2006/relationships" xmlns:p="http://schemas.openxmlformats.org/presentationml/2006/main">
   <p:cSld>
     <p:spTree>
       <p:nvGrpSpPr>
-        <p:cNvPr id="156" name="Shape 156"/>
+        <p:cNvPr id="1" name="Shape 156"/>
         <p:cNvGrpSpPr/>
         <p:nvPr/>
       </p:nvGrpSpPr>
@@ -9211,7 +9327,9 @@
       <p:sp>
         <p:nvSpPr>
           <p:cNvPr id="157" name="Google Shape;157;p23"/>
-          <p:cNvSpPr txBox="1"/>
+          <p:cNvSpPr txBox="1">
+            <a:spLocks noGrp="1"/>
+          </p:cNvSpPr>
           <p:nvPr>
             <p:ph type="title"/>
           </p:nvPr>
@@ -9226,12 +9344,12 @@
           </a:prstGeom>
         </p:spPr>
         <p:txBody>
-          <a:bodyPr anchorCtr="0" anchor="t" bIns="91425" lIns="91425" spcFirstLastPara="1" rIns="91425" wrap="square" tIns="91425">
+          <a:bodyPr spcFirstLastPara="1" wrap="square" lIns="91425" tIns="91425" rIns="91425" bIns="91425" anchor="t" anchorCtr="0">
             <a:noAutofit/>
           </a:bodyPr>
           <a:lstStyle/>
           <a:p>
-            <a:pPr indent="0" lvl="0" marL="0" rtl="0" algn="l">
+            <a:pPr marL="0" lvl="0" indent="0" algn="l" rtl="0">
               <a:spcBef>
                 <a:spcPts val="0"/>
               </a:spcBef>
@@ -9241,7 +9359,7 @@
               <a:buNone/>
             </a:pPr>
             <a:r>
-              <a:rPr b="0" lang="zh-CN" sz="2800">
+              <a:rPr lang="zh-CN" sz="2800" b="0">
                 <a:solidFill>
                   <a:srgbClr val="000000"/>
                 </a:solidFill>
@@ -9264,9 +9382,11 @@
       <p:sp>
         <p:nvSpPr>
           <p:cNvPr id="158" name="Google Shape;158;p23"/>
-          <p:cNvSpPr txBox="1"/>
+          <p:cNvSpPr txBox="1">
+            <a:spLocks noGrp="1"/>
+          </p:cNvSpPr>
           <p:nvPr>
-            <p:ph idx="1" type="body"/>
+            <p:ph type="body" idx="1"/>
           </p:nvPr>
         </p:nvSpPr>
         <p:spPr>
@@ -9279,12 +9399,12 @@
           </a:prstGeom>
         </p:spPr>
         <p:txBody>
-          <a:bodyPr anchorCtr="0" anchor="t" bIns="91425" lIns="91425" spcFirstLastPara="1" rIns="91425" wrap="square" tIns="91425">
+          <a:bodyPr spcFirstLastPara="1" wrap="square" lIns="91425" tIns="91425" rIns="91425" bIns="91425" anchor="t" anchorCtr="0">
             <a:noAutofit/>
           </a:bodyPr>
           <a:lstStyle/>
           <a:p>
-            <a:pPr indent="0" lvl="0" marL="0" rtl="0" algn="l">
+            <a:pPr marL="0" lvl="0" indent="0" algn="l" rtl="0">
               <a:lnSpc>
                 <a:spcPct val="100000"/>
               </a:lnSpc>
@@ -9298,7 +9418,7 @@
               <a:buNone/>
             </a:pPr>
             <a:r>
-              <a:rPr b="1" lang="zh-CN" sz="2000">
+              <a:rPr lang="zh-CN" sz="2000" b="1">
                 <a:solidFill>
                   <a:srgbClr val="000000"/>
                 </a:solidFill>
@@ -9309,7 +9429,7 @@
               </a:rPr>
               <a:t>Project Limitations:</a:t>
             </a:r>
-            <a:endParaRPr b="1" sz="2000">
+            <a:endParaRPr sz="2000" b="1">
               <a:solidFill>
                 <a:srgbClr val="000000"/>
               </a:solidFill>
@@ -9320,7 +9440,7 @@
             </a:endParaRPr>
           </a:p>
           <a:p>
-            <a:pPr indent="0" lvl="0" marL="0" rtl="0" algn="l">
+            <a:pPr marL="0" lvl="0" indent="0" algn="l" rtl="0">
               <a:lnSpc>
                 <a:spcPct val="100000"/>
               </a:lnSpc>
@@ -9355,7 +9475,7 @@
             </a:endParaRPr>
           </a:p>
           <a:p>
-            <a:pPr indent="0" lvl="0" marL="0" rtl="0" algn="l">
+            <a:pPr marL="0" lvl="0" indent="0" algn="l" rtl="0">
               <a:lnSpc>
                 <a:spcPct val="100000"/>
               </a:lnSpc>
@@ -9390,7 +9510,7 @@
             </a:endParaRPr>
           </a:p>
           <a:p>
-            <a:pPr indent="0" lvl="0" marL="0" rtl="0" algn="l">
+            <a:pPr marL="0" lvl="0" indent="0" algn="l" rtl="0">
               <a:lnSpc>
                 <a:spcPct val="100000"/>
               </a:lnSpc>
@@ -9435,11 +9555,11 @@
 </file>
 
 <file path=ppt/slides/slide12.xml><?xml version="1.0" encoding="utf-8"?>
-<p:sld xmlns:a="http://schemas.openxmlformats.org/drawingml/2006/main" xmlns:r="http://schemas.openxmlformats.org/officeDocument/2006/relationships" xmlns:mc="http://schemas.openxmlformats.org/markup-compatibility/2006" xmlns:mv="urn:schemas-microsoft-com:mac:vml" xmlns:p="http://schemas.openxmlformats.org/presentationml/2006/main" xmlns:c="http://schemas.openxmlformats.org/drawingml/2006/chart" xmlns:dgm="http://schemas.openxmlformats.org/drawingml/2006/diagram" xmlns:o="urn:schemas-microsoft-com:office:office" xmlns:v="urn:schemas-microsoft-com:vml" xmlns:pvml="urn:schemas-microsoft-com:office:powerpoint" xmlns:com="http://schemas.openxmlformats.org/drawingml/2006/compatibility" xmlns:p14="http://schemas.microsoft.com/office/powerpoint/2010/main" xmlns:p15="http://schemas.microsoft.com/office/powerpoint/2012/main" xmlns:ahyp="http://schemas.microsoft.com/office/drawing/2018/hyperlinkcolor">
+<p:sld xmlns:a="http://schemas.openxmlformats.org/drawingml/2006/main" xmlns:r="http://schemas.openxmlformats.org/officeDocument/2006/relationships" xmlns:p="http://schemas.openxmlformats.org/presentationml/2006/main">
   <p:cSld>
     <p:spTree>
       <p:nvGrpSpPr>
-        <p:cNvPr id="162" name="Shape 162"/>
+        <p:cNvPr id="1" name="Shape 162"/>
         <p:cNvGrpSpPr/>
         <p:nvPr/>
       </p:nvGrpSpPr>
@@ -9454,7 +9574,9 @@
       <p:sp>
         <p:nvSpPr>
           <p:cNvPr id="163" name="Google Shape;163;p24"/>
-          <p:cNvSpPr txBox="1"/>
+          <p:cNvSpPr txBox="1">
+            <a:spLocks noGrp="1"/>
+          </p:cNvSpPr>
           <p:nvPr>
             <p:ph type="title"/>
           </p:nvPr>
@@ -9469,12 +9591,12 @@
           </a:prstGeom>
         </p:spPr>
         <p:txBody>
-          <a:bodyPr anchorCtr="0" anchor="t" bIns="91425" lIns="91425" spcFirstLastPara="1" rIns="91425" wrap="square" tIns="91425">
+          <a:bodyPr spcFirstLastPara="1" wrap="square" lIns="91425" tIns="91425" rIns="91425" bIns="91425" anchor="t" anchorCtr="0">
             <a:noAutofit/>
           </a:bodyPr>
           <a:lstStyle/>
           <a:p>
-            <a:pPr indent="0" lvl="0" marL="0" rtl="0" algn="l">
+            <a:pPr marL="0" lvl="0" indent="0" algn="l" rtl="0">
               <a:spcBef>
                 <a:spcPts val="0"/>
               </a:spcBef>
@@ -9484,7 +9606,7 @@
               <a:buNone/>
             </a:pPr>
             <a:r>
-              <a:rPr b="0" lang="zh-CN" sz="2800">
+              <a:rPr lang="zh-CN" sz="2800" b="0">
                 <a:solidFill>
                   <a:srgbClr val="000000"/>
                 </a:solidFill>
@@ -9507,9 +9629,11 @@
       <p:sp>
         <p:nvSpPr>
           <p:cNvPr id="164" name="Google Shape;164;p24"/>
-          <p:cNvSpPr txBox="1"/>
+          <p:cNvSpPr txBox="1">
+            <a:spLocks noGrp="1"/>
+          </p:cNvSpPr>
           <p:nvPr>
-            <p:ph idx="1" type="body"/>
+            <p:ph type="body" idx="1"/>
           </p:nvPr>
         </p:nvSpPr>
         <p:spPr>
@@ -9522,12 +9646,12 @@
           </a:prstGeom>
         </p:spPr>
         <p:txBody>
-          <a:bodyPr anchorCtr="0" anchor="t" bIns="91425" lIns="91425" spcFirstLastPara="1" rIns="91425" wrap="square" tIns="91425">
+          <a:bodyPr spcFirstLastPara="1" wrap="square" lIns="91425" tIns="91425" rIns="91425" bIns="91425" anchor="t" anchorCtr="0">
             <a:noAutofit/>
           </a:bodyPr>
           <a:lstStyle/>
           <a:p>
-            <a:pPr indent="0" lvl="0" marL="0" rtl="0" algn="l">
+            <a:pPr marL="0" lvl="0" indent="0" algn="l" rtl="0">
               <a:spcBef>
                 <a:spcPts val="800"/>
               </a:spcBef>
@@ -9546,19 +9670,7 @@
                 <a:cs typeface="Calibri"/>
                 <a:sym typeface="Calibri"/>
               </a:rPr>
-              <a:t>• P</a:t>
-            </a:r>
-            <a:r>
-              <a:rPr lang="zh-CN" sz="2000">
-                <a:solidFill>
-                  <a:srgbClr val="000000"/>
-                </a:solidFill>
-                <a:latin typeface="Calibri"/>
-                <a:ea typeface="Calibri"/>
-                <a:cs typeface="Calibri"/>
-                <a:sym typeface="Calibri"/>
-              </a:rPr>
-              <a:t>erformed thorough data preprocessing to ensure data quality, consistency, and readiness.</a:t>
+              <a:t>• Performed thorough data preprocessing to ensure data quality, consistency, and readiness.</a:t>
             </a:r>
             <a:endParaRPr sz="2000">
               <a:solidFill>
@@ -9571,7 +9683,7 @@
             </a:endParaRPr>
           </a:p>
           <a:p>
-            <a:pPr indent="0" lvl="0" marL="0" rtl="0" algn="l">
+            <a:pPr marL="0" lvl="0" indent="0" algn="l" rtl="0">
               <a:spcBef>
                 <a:spcPts val="800"/>
               </a:spcBef>
@@ -9590,19 +9702,7 @@
                 <a:cs typeface="Calibri"/>
                 <a:sym typeface="Calibri"/>
               </a:rPr>
-              <a:t>• </a:t>
-            </a:r>
-            <a:r>
-              <a:rPr lang="zh-CN" sz="2000">
-                <a:solidFill>
-                  <a:srgbClr val="000000"/>
-                </a:solidFill>
-                <a:latin typeface="Calibri"/>
-                <a:ea typeface="Calibri"/>
-                <a:cs typeface="Calibri"/>
-                <a:sym typeface="Calibri"/>
-              </a:rPr>
-              <a:t>Developed a functional, interactive industrial data visualization dashboard.</a:t>
+              <a:t>• Developed a functional, interactive industrial data visualization dashboard.</a:t>
             </a:r>
             <a:endParaRPr sz="2000">
               <a:solidFill>
@@ -9615,7 +9715,7 @@
             </a:endParaRPr>
           </a:p>
           <a:p>
-            <a:pPr indent="0" lvl="0" marL="0" rtl="0" algn="l">
+            <a:pPr marL="0" lvl="0" indent="0" algn="l" rtl="0">
               <a:spcBef>
                 <a:spcPts val="500"/>
               </a:spcBef>
@@ -9647,7 +9747,7 @@
             </a:endParaRPr>
           </a:p>
           <a:p>
-            <a:pPr indent="0" lvl="0" marL="0" rtl="0" algn="l">
+            <a:pPr marL="0" lvl="0" indent="0" algn="l" rtl="0">
               <a:spcBef>
                 <a:spcPts val="500"/>
               </a:spcBef>
@@ -9679,7 +9779,7 @@
             </a:endParaRPr>
           </a:p>
           <a:p>
-            <a:pPr indent="0" lvl="0" marL="0" rtl="0" algn="l">
+            <a:pPr marL="0" lvl="0" indent="0" algn="l" rtl="0">
               <a:spcBef>
                 <a:spcPts val="0"/>
               </a:spcBef>
@@ -9689,9 +9789,6 @@
               <a:buSzPts val="688"/>
               <a:buNone/>
             </a:pPr>
-            <a:r>
-              <a:t/>
-            </a:r>
             <a:endParaRPr sz="2000">
               <a:solidFill>
                 <a:srgbClr val="000000"/>
@@ -9713,11 +9810,11 @@
 </file>
 
 <file path=ppt/slides/slide13.xml><?xml version="1.0" encoding="utf-8"?>
-<p:sld xmlns:a="http://schemas.openxmlformats.org/drawingml/2006/main" xmlns:r="http://schemas.openxmlformats.org/officeDocument/2006/relationships" xmlns:mc="http://schemas.openxmlformats.org/markup-compatibility/2006" xmlns:mv="urn:schemas-microsoft-com:mac:vml" xmlns:p="http://schemas.openxmlformats.org/presentationml/2006/main" xmlns:c="http://schemas.openxmlformats.org/drawingml/2006/chart" xmlns:dgm="http://schemas.openxmlformats.org/drawingml/2006/diagram" xmlns:o="urn:schemas-microsoft-com:office:office" xmlns:v="urn:schemas-microsoft-com:vml" xmlns:pvml="urn:schemas-microsoft-com:office:powerpoint" xmlns:com="http://schemas.openxmlformats.org/drawingml/2006/compatibility" xmlns:p14="http://schemas.microsoft.com/office/powerpoint/2010/main" xmlns:p15="http://schemas.microsoft.com/office/powerpoint/2012/main" xmlns:ahyp="http://schemas.microsoft.com/office/drawing/2018/hyperlinkcolor">
+<p:sld xmlns:a="http://schemas.openxmlformats.org/drawingml/2006/main" xmlns:r="http://schemas.openxmlformats.org/officeDocument/2006/relationships" xmlns:p="http://schemas.openxmlformats.org/presentationml/2006/main">
   <p:cSld>
     <p:spTree>
       <p:nvGrpSpPr>
-        <p:cNvPr id="168" name="Shape 168"/>
+        <p:cNvPr id="1" name="Shape 168"/>
         <p:cNvGrpSpPr/>
         <p:nvPr/>
       </p:nvGrpSpPr>
@@ -9732,7 +9829,9 @@
       <p:sp>
         <p:nvSpPr>
           <p:cNvPr id="169" name="Google Shape;169;p25"/>
-          <p:cNvSpPr txBox="1"/>
+          <p:cNvSpPr txBox="1">
+            <a:spLocks noGrp="1"/>
+          </p:cNvSpPr>
           <p:nvPr>
             <p:ph type="title"/>
           </p:nvPr>
@@ -9747,12 +9846,12 @@
           </a:prstGeom>
         </p:spPr>
         <p:txBody>
-          <a:bodyPr anchorCtr="0" anchor="t" bIns="91425" lIns="91425" spcFirstLastPara="1" rIns="91425" wrap="square" tIns="91425">
+          <a:bodyPr spcFirstLastPara="1" wrap="square" lIns="91425" tIns="91425" rIns="91425" bIns="91425" anchor="t" anchorCtr="0">
             <a:noAutofit/>
           </a:bodyPr>
           <a:lstStyle/>
           <a:p>
-            <a:pPr indent="0" lvl="0" marL="0" rtl="0" algn="l">
+            <a:pPr marL="0" lvl="0" indent="0" algn="l" rtl="0">
               <a:spcBef>
                 <a:spcPts val="0"/>
               </a:spcBef>
@@ -9762,7 +9861,7 @@
               <a:buNone/>
             </a:pPr>
             <a:r>
-              <a:rPr b="0" lang="zh-CN" sz="2800">
+              <a:rPr lang="zh-CN" sz="2800" b="0">
                 <a:solidFill>
                   <a:srgbClr val="000000"/>
                 </a:solidFill>
@@ -9785,9 +9884,11 @@
       <p:sp>
         <p:nvSpPr>
           <p:cNvPr id="170" name="Google Shape;170;p25"/>
-          <p:cNvSpPr txBox="1"/>
+          <p:cNvSpPr txBox="1">
+            <a:spLocks noGrp="1"/>
+          </p:cNvSpPr>
           <p:nvPr>
-            <p:ph idx="1" type="body"/>
+            <p:ph type="body" idx="1"/>
           </p:nvPr>
         </p:nvSpPr>
         <p:spPr>
@@ -9800,12 +9901,12 @@
           </a:prstGeom>
         </p:spPr>
         <p:txBody>
-          <a:bodyPr anchorCtr="0" anchor="t" bIns="91425" lIns="91425" spcFirstLastPara="1" rIns="91425" wrap="square" tIns="91425">
+          <a:bodyPr spcFirstLastPara="1" wrap="square" lIns="91425" tIns="91425" rIns="91425" bIns="91425" anchor="t" anchorCtr="0">
             <a:noAutofit/>
           </a:bodyPr>
           <a:lstStyle/>
           <a:p>
-            <a:pPr indent="0" lvl="0" marL="0" rtl="0" algn="l">
+            <a:pPr marL="0" lvl="0" indent="0" algn="l" rtl="0">
               <a:spcBef>
                 <a:spcPts val="500"/>
               </a:spcBef>
@@ -9849,7 +9950,7 @@
             </a:endParaRPr>
           </a:p>
           <a:p>
-            <a:pPr indent="0" lvl="0" marL="0" rtl="0" algn="l">
+            <a:pPr marL="0" lvl="0" indent="0" algn="l" rtl="0">
               <a:spcBef>
                 <a:spcPts val="500"/>
               </a:spcBef>
@@ -9881,7 +9982,7 @@
             </a:endParaRPr>
           </a:p>
           <a:p>
-            <a:pPr indent="457200" lvl="0" marL="0" rtl="0" algn="l">
+            <a:pPr marL="0" lvl="0" indent="457200" algn="l" rtl="0">
               <a:spcBef>
                 <a:spcPts val="500"/>
               </a:spcBef>
@@ -9890,9 +9991,6 @@
               </a:spcAft>
               <a:buNone/>
             </a:pPr>
-            <a:r>
-              <a:t/>
-            </a:r>
             <a:endParaRPr sz="2000">
               <a:solidFill>
                 <a:srgbClr val="000000"/>
@@ -9904,7 +10002,7 @@
             </a:endParaRPr>
           </a:p>
           <a:p>
-            <a:pPr indent="0" lvl="0" marL="0" rtl="0" algn="l">
+            <a:pPr marL="0" lvl="0" indent="0" algn="l" rtl="0">
               <a:spcBef>
                 <a:spcPts val="500"/>
               </a:spcBef>
@@ -9948,7 +10046,7 @@
             </a:endParaRPr>
           </a:p>
           <a:p>
-            <a:pPr indent="0" lvl="0" marL="0" rtl="0" algn="l">
+            <a:pPr marL="0" lvl="0" indent="0" algn="l" rtl="0">
               <a:spcBef>
                 <a:spcPts val="500"/>
               </a:spcBef>
@@ -9957,9 +10055,6 @@
               </a:spcAft>
               <a:buNone/>
             </a:pPr>
-            <a:r>
-              <a:t/>
-            </a:r>
             <a:endParaRPr sz="2000">
               <a:solidFill>
                 <a:srgbClr val="000000"/>
@@ -9971,7 +10066,7 @@
             </a:endParaRPr>
           </a:p>
           <a:p>
-            <a:pPr indent="0" lvl="0" marL="0" rtl="0" algn="l">
+            <a:pPr marL="0" lvl="0" indent="0" algn="l" rtl="0">
               <a:spcBef>
                 <a:spcPts val="500"/>
               </a:spcBef>
@@ -10015,7 +10110,7 @@
             </a:endParaRPr>
           </a:p>
           <a:p>
-            <a:pPr indent="0" lvl="0" marL="0" rtl="0" algn="l">
+            <a:pPr marL="0" lvl="0" indent="0" algn="l" rtl="0">
               <a:spcBef>
                 <a:spcPts val="0"/>
               </a:spcBef>
@@ -10025,9 +10120,6 @@
               <a:buSzPts val="688"/>
               <a:buNone/>
             </a:pPr>
-            <a:r>
-              <a:t/>
-            </a:r>
             <a:endParaRPr sz="2000">
               <a:solidFill>
                 <a:srgbClr val="000000"/>
@@ -10189,11 +10281,11 @@
 </file>
 
 <file path=ppt/slides/slide14.xml><?xml version="1.0" encoding="utf-8"?>
-<p:sld xmlns:a="http://schemas.openxmlformats.org/drawingml/2006/main" xmlns:r="http://schemas.openxmlformats.org/officeDocument/2006/relationships" xmlns:mc="http://schemas.openxmlformats.org/markup-compatibility/2006" xmlns:mv="urn:schemas-microsoft-com:mac:vml" xmlns:p="http://schemas.openxmlformats.org/presentationml/2006/main" xmlns:c="http://schemas.openxmlformats.org/drawingml/2006/chart" xmlns:dgm="http://schemas.openxmlformats.org/drawingml/2006/diagram" xmlns:o="urn:schemas-microsoft-com:office:office" xmlns:v="urn:schemas-microsoft-com:vml" xmlns:pvml="urn:schemas-microsoft-com:office:powerpoint" xmlns:com="http://schemas.openxmlformats.org/drawingml/2006/compatibility" xmlns:p14="http://schemas.microsoft.com/office/powerpoint/2010/main" xmlns:p15="http://schemas.microsoft.com/office/powerpoint/2012/main" xmlns:ahyp="http://schemas.microsoft.com/office/drawing/2018/hyperlinkcolor">
+<p:sld xmlns:a="http://schemas.openxmlformats.org/drawingml/2006/main" xmlns:r="http://schemas.openxmlformats.org/officeDocument/2006/relationships" xmlns:p="http://schemas.openxmlformats.org/presentationml/2006/main">
   <p:cSld>
     <p:spTree>
       <p:nvGrpSpPr>
-        <p:cNvPr id="179" name="Shape 179"/>
+        <p:cNvPr id="1" name="Shape 179"/>
         <p:cNvGrpSpPr/>
         <p:nvPr/>
       </p:nvGrpSpPr>
@@ -10208,7 +10300,9 @@
       <p:sp>
         <p:nvSpPr>
           <p:cNvPr id="180" name="Google Shape;180;p26"/>
-          <p:cNvSpPr txBox="1"/>
+          <p:cNvSpPr txBox="1">
+            <a:spLocks noGrp="1"/>
+          </p:cNvSpPr>
           <p:nvPr>
             <p:ph type="title"/>
           </p:nvPr>
@@ -10223,12 +10317,12 @@
           </a:prstGeom>
         </p:spPr>
         <p:txBody>
-          <a:bodyPr anchorCtr="0" anchor="t" bIns="91425" lIns="91425" spcFirstLastPara="1" rIns="91425" wrap="square" tIns="91425">
+          <a:bodyPr spcFirstLastPara="1" wrap="square" lIns="91425" tIns="91425" rIns="91425" bIns="91425" anchor="t" anchorCtr="0">
             <a:noAutofit/>
           </a:bodyPr>
           <a:lstStyle/>
           <a:p>
-            <a:pPr indent="0" lvl="0" marL="0" rtl="0" algn="l">
+            <a:pPr marL="0" lvl="0" indent="0" algn="l" rtl="0">
               <a:spcBef>
                 <a:spcPts val="0"/>
               </a:spcBef>
@@ -10238,7 +10332,7 @@
               <a:buNone/>
             </a:pPr>
             <a:r>
-              <a:rPr b="0" lang="zh-CN" sz="2800">
+              <a:rPr lang="zh-CN" sz="2800" b="0">
                 <a:solidFill>
                   <a:srgbClr val="000000"/>
                 </a:solidFill>
@@ -10261,14 +10355,16 @@
       <p:sp>
         <p:nvSpPr>
           <p:cNvPr id="181" name="Google Shape;181;p26"/>
-          <p:cNvSpPr txBox="1"/>
+          <p:cNvSpPr txBox="1">
+            <a:spLocks noGrp="1"/>
+          </p:cNvSpPr>
           <p:nvPr>
-            <p:ph idx="1" type="body"/>
+            <p:ph type="body" idx="1"/>
           </p:nvPr>
         </p:nvSpPr>
         <p:spPr>
           <a:xfrm>
-            <a:off x="729450" y="1308650"/>
+            <a:off x="725850" y="1135633"/>
             <a:ext cx="8134200" cy="3514500"/>
           </a:xfrm>
           <a:prstGeom prst="rect">
@@ -10276,12 +10372,12 @@
           </a:prstGeom>
         </p:spPr>
         <p:txBody>
-          <a:bodyPr anchorCtr="0" anchor="t" bIns="91425" lIns="91425" spcFirstLastPara="1" rIns="91425" wrap="square" tIns="91425">
+          <a:bodyPr spcFirstLastPara="1" wrap="square" lIns="91425" tIns="91425" rIns="91425" bIns="91425" anchor="t" anchorCtr="0">
             <a:noAutofit/>
           </a:bodyPr>
           <a:lstStyle/>
           <a:p>
-            <a:pPr indent="0" lvl="0" marL="0" rtl="0" algn="l">
+            <a:pPr marL="0" lvl="0" indent="0" algn="l" rtl="0">
               <a:spcBef>
                 <a:spcPts val="500"/>
               </a:spcBef>
@@ -10291,7 +10387,7 @@
               <a:buNone/>
             </a:pPr>
             <a:r>
-              <a:rPr lang="zh-CN" sz="1800">
+              <a:rPr lang="zh-CN" sz="1800" dirty="0">
                 <a:solidFill>
                   <a:srgbClr val="000000"/>
                 </a:solidFill>
@@ -10302,7 +10398,7 @@
               </a:rPr>
               <a:t>https://www.finereport.com/en/data-visualization/data-visualization-dashboard.html  </a:t>
             </a:r>
-            <a:endParaRPr sz="1800">
+            <a:endParaRPr sz="1800" dirty="0">
               <a:solidFill>
                 <a:srgbClr val="000000"/>
               </a:solidFill>
@@ -10313,7 +10409,7 @@
             </a:endParaRPr>
           </a:p>
           <a:p>
-            <a:pPr indent="0" lvl="0" marL="0" rtl="0" algn="l">
+            <a:pPr marL="0" lvl="0" indent="0" algn="l" rtl="0">
               <a:spcBef>
                 <a:spcPts val="500"/>
               </a:spcBef>
@@ -10323,7 +10419,7 @@
               <a:buNone/>
             </a:pPr>
             <a:r>
-              <a:rPr lang="zh-CN" sz="1800">
+              <a:rPr lang="zh-CN" sz="1800" dirty="0">
                 <a:solidFill>
                   <a:srgbClr val="000000"/>
                 </a:solidFill>
@@ -10334,7 +10430,7 @@
               </a:rPr>
               <a:t>https://envelio.com/smart-grid  </a:t>
             </a:r>
-            <a:endParaRPr sz="1800">
+            <a:endParaRPr sz="1800" dirty="0">
               <a:solidFill>
                 <a:srgbClr val="000000"/>
               </a:solidFill>
@@ -10345,7 +10441,7 @@
             </a:endParaRPr>
           </a:p>
           <a:p>
-            <a:pPr indent="0" lvl="0" marL="0" rtl="0" algn="l">
+            <a:pPr marL="0" lvl="0" indent="0" algn="l" rtl="0">
               <a:spcBef>
                 <a:spcPts val="500"/>
               </a:spcBef>
@@ -10355,7 +10451,7 @@
               <a:buNone/>
             </a:pPr>
             <a:r>
-              <a:rPr lang="zh-CN" sz="1800">
+              <a:rPr lang="zh-CN" sz="1800" dirty="0">
                 <a:solidFill>
                   <a:srgbClr val="000000"/>
                 </a:solidFill>
@@ -10366,7 +10462,7 @@
               </a:rPr>
               <a:t>https://btsconsultant.com/courseDetails/1546  </a:t>
             </a:r>
-            <a:endParaRPr sz="1800">
+            <a:endParaRPr sz="1800" dirty="0">
               <a:solidFill>
                 <a:srgbClr val="000000"/>
               </a:solidFill>
@@ -10377,7 +10473,7 @@
             </a:endParaRPr>
           </a:p>
           <a:p>
-            <a:pPr indent="0" lvl="0" marL="0" rtl="0" algn="l">
+            <a:pPr marL="0" lvl="0" indent="0" algn="l" rtl="0">
               <a:spcBef>
                 <a:spcPts val="500"/>
               </a:spcBef>
@@ -10387,7 +10483,7 @@
               <a:buNone/>
             </a:pPr>
             <a:r>
-              <a:rPr lang="zh-CN" sz="1800">
+              <a:rPr lang="zh-CN" sz="1800" dirty="0">
                 <a:solidFill>
                   <a:srgbClr val="000000"/>
                 </a:solidFill>
@@ -10398,7 +10494,7 @@
               </a:rPr>
               <a:t>Ma, Ruofei, et al. "Smart grid communication: Its challenges and opportunities." IEEE transactions on Smart Grid 4.1 (2013): 36-46.  </a:t>
             </a:r>
-            <a:endParaRPr sz="1800">
+            <a:endParaRPr sz="1800" dirty="0">
               <a:solidFill>
                 <a:srgbClr val="000000"/>
               </a:solidFill>
@@ -10409,7 +10505,7 @@
             </a:endParaRPr>
           </a:p>
           <a:p>
-            <a:pPr indent="0" lvl="0" marL="0" rtl="0" algn="l">
+            <a:pPr marL="0" lvl="0" indent="0" algn="l" rtl="0">
               <a:spcBef>
                 <a:spcPts val="500"/>
               </a:spcBef>
@@ -10419,7 +10515,7 @@
               <a:buNone/>
             </a:pPr>
             <a:r>
-              <a:rPr lang="zh-CN" sz="1800">
+              <a:rPr lang="zh-CN" sz="1800" dirty="0">
                 <a:solidFill>
                   <a:srgbClr val="000000"/>
                 </a:solidFill>
@@ -10430,7 +10526,7 @@
               </a:rPr>
               <a:t>Fang, Xi, et al. "Smart grid—The new and improved power grid: A survey." IEEE communications surveys &amp; tutorials 14.4 (2011): 944-980.  </a:t>
             </a:r>
-            <a:endParaRPr sz="1800">
+            <a:endParaRPr sz="1800" dirty="0">
               <a:solidFill>
                 <a:srgbClr val="000000"/>
               </a:solidFill>
@@ -10441,7 +10537,7 @@
             </a:endParaRPr>
           </a:p>
           <a:p>
-            <a:pPr indent="0" lvl="0" marL="0" rtl="0" algn="l">
+            <a:pPr marL="0" lvl="0" indent="0" algn="l" rtl="0">
               <a:spcBef>
                 <a:spcPts val="500"/>
               </a:spcBef>
@@ -10451,7 +10547,7 @@
               <a:buNone/>
             </a:pPr>
             <a:r>
-              <a:rPr lang="zh-CN" sz="1800">
+              <a:rPr lang="zh-CN" sz="1800" dirty="0">
                 <a:solidFill>
                   <a:srgbClr val="000000"/>
                 </a:solidFill>
@@ -10462,7 +10558,7 @@
               </a:rPr>
               <a:t>Rathor, Ketan, et al. "A Detailed View on Industrial Safety and Health Analytics using Machine Learning Hybrid Ensemble Techniques." 2022 International Conference on Edge Computing and Applications (ICECAA). IEEE, 2022.  </a:t>
             </a:r>
-            <a:endParaRPr sz="1800">
+            <a:endParaRPr sz="1800" dirty="0">
               <a:solidFill>
                 <a:srgbClr val="000000"/>
               </a:solidFill>
@@ -10483,11 +10579,11 @@
 </file>
 
 <file path=ppt/slides/slide15.xml><?xml version="1.0" encoding="utf-8"?>
-<p:sld xmlns:a="http://schemas.openxmlformats.org/drawingml/2006/main" xmlns:r="http://schemas.openxmlformats.org/officeDocument/2006/relationships" xmlns:mc="http://schemas.openxmlformats.org/markup-compatibility/2006" xmlns:mv="urn:schemas-microsoft-com:mac:vml" xmlns:p="http://schemas.openxmlformats.org/presentationml/2006/main" xmlns:c="http://schemas.openxmlformats.org/drawingml/2006/chart" xmlns:dgm="http://schemas.openxmlformats.org/drawingml/2006/diagram" xmlns:o="urn:schemas-microsoft-com:office:office" xmlns:v="urn:schemas-microsoft-com:vml" xmlns:pvml="urn:schemas-microsoft-com:office:powerpoint" xmlns:com="http://schemas.openxmlformats.org/drawingml/2006/compatibility" xmlns:p14="http://schemas.microsoft.com/office/powerpoint/2010/main" xmlns:p15="http://schemas.microsoft.com/office/powerpoint/2012/main" xmlns:ahyp="http://schemas.microsoft.com/office/drawing/2018/hyperlinkcolor">
+<p:sld xmlns:a="http://schemas.openxmlformats.org/drawingml/2006/main" xmlns:r="http://schemas.openxmlformats.org/officeDocument/2006/relationships" xmlns:p="http://schemas.openxmlformats.org/presentationml/2006/main">
   <p:cSld>
     <p:spTree>
       <p:nvGrpSpPr>
-        <p:cNvPr id="185" name="Shape 185"/>
+        <p:cNvPr id="1" name="Shape 185"/>
         <p:cNvGrpSpPr/>
         <p:nvPr/>
       </p:nvGrpSpPr>
@@ -10502,7 +10598,9 @@
       <p:sp>
         <p:nvSpPr>
           <p:cNvPr id="186" name="Google Shape;186;p27"/>
-          <p:cNvSpPr txBox="1"/>
+          <p:cNvSpPr txBox="1">
+            <a:spLocks noGrp="1"/>
+          </p:cNvSpPr>
           <p:nvPr>
             <p:ph type="title"/>
           </p:nvPr>
@@ -10517,12 +10615,12 @@
           </a:prstGeom>
         </p:spPr>
         <p:txBody>
-          <a:bodyPr anchorCtr="0" anchor="t" bIns="91425" lIns="91425" spcFirstLastPara="1" rIns="91425" wrap="square" tIns="91425">
+          <a:bodyPr spcFirstLastPara="1" wrap="square" lIns="91425" tIns="91425" rIns="91425" bIns="91425" anchor="t" anchorCtr="0">
             <a:noAutofit/>
           </a:bodyPr>
           <a:lstStyle/>
           <a:p>
-            <a:pPr indent="0" lvl="0" marL="0" rtl="0" algn="l">
+            <a:pPr marL="0" lvl="0" indent="0" algn="l" rtl="0">
               <a:spcBef>
                 <a:spcPts val="0"/>
               </a:spcBef>
@@ -10532,7 +10630,7 @@
               <a:buNone/>
             </a:pPr>
             <a:r>
-              <a:rPr b="0" lang="zh-CN" sz="2800">
+              <a:rPr lang="zh-CN" sz="2800" b="0">
                 <a:solidFill>
                   <a:srgbClr val="000000"/>
                 </a:solidFill>
@@ -10555,9 +10653,11 @@
       <p:sp>
         <p:nvSpPr>
           <p:cNvPr id="187" name="Google Shape;187;p27"/>
-          <p:cNvSpPr txBox="1"/>
+          <p:cNvSpPr txBox="1">
+            <a:spLocks noGrp="1"/>
+          </p:cNvSpPr>
           <p:nvPr>
-            <p:ph idx="1" type="body"/>
+            <p:ph type="body" idx="1"/>
           </p:nvPr>
         </p:nvSpPr>
         <p:spPr>
@@ -10570,12 +10670,12 @@
           </a:prstGeom>
         </p:spPr>
         <p:txBody>
-          <a:bodyPr anchorCtr="0" anchor="t" bIns="91425" lIns="91425" spcFirstLastPara="1" rIns="91425" wrap="square" tIns="91425">
+          <a:bodyPr spcFirstLastPara="1" wrap="square" lIns="91425" tIns="91425" rIns="91425" bIns="91425" anchor="t" anchorCtr="0">
             <a:noAutofit/>
           </a:bodyPr>
           <a:lstStyle/>
           <a:p>
-            <a:pPr indent="0" lvl="0" marL="0" rtl="0" algn="l">
+            <a:pPr marL="0" lvl="0" indent="0" algn="l" rtl="0">
               <a:spcBef>
                 <a:spcPts val="500"/>
               </a:spcBef>
@@ -10607,7 +10707,7 @@
             </a:endParaRPr>
           </a:p>
           <a:p>
-            <a:pPr indent="0" lvl="0" marL="0" rtl="0" algn="l">
+            <a:pPr marL="0" lvl="0" indent="0" algn="l" rtl="0">
               <a:spcBef>
                 <a:spcPts val="500"/>
               </a:spcBef>
@@ -10639,7 +10739,7 @@
             </a:endParaRPr>
           </a:p>
           <a:p>
-            <a:pPr indent="0" lvl="0" marL="0" rtl="0" algn="l">
+            <a:pPr marL="0" lvl="0" indent="0" algn="l" rtl="0">
               <a:spcBef>
                 <a:spcPts val="500"/>
               </a:spcBef>
@@ -10671,7 +10771,7 @@
             </a:endParaRPr>
           </a:p>
           <a:p>
-            <a:pPr indent="0" lvl="0" marL="0" rtl="0" algn="l">
+            <a:pPr marL="0" lvl="0" indent="0" algn="l" rtl="0">
               <a:spcBef>
                 <a:spcPts val="500"/>
               </a:spcBef>
@@ -10703,7 +10803,7 @@
             </a:endParaRPr>
           </a:p>
           <a:p>
-            <a:pPr indent="0" lvl="0" marL="0" rtl="0" algn="l">
+            <a:pPr marL="0" lvl="0" indent="0" algn="l" rtl="0">
               <a:spcBef>
                 <a:spcPts val="500"/>
               </a:spcBef>
@@ -10745,11 +10845,11 @@
 </file>
 
 <file path=ppt/slides/slide16.xml><?xml version="1.0" encoding="utf-8"?>
-<p:sld xmlns:a="http://schemas.openxmlformats.org/drawingml/2006/main" xmlns:r="http://schemas.openxmlformats.org/officeDocument/2006/relationships" xmlns:mc="http://schemas.openxmlformats.org/markup-compatibility/2006" xmlns:mv="urn:schemas-microsoft-com:mac:vml" xmlns:p="http://schemas.openxmlformats.org/presentationml/2006/main" xmlns:c="http://schemas.openxmlformats.org/drawingml/2006/chart" xmlns:dgm="http://schemas.openxmlformats.org/drawingml/2006/diagram" xmlns:o="urn:schemas-microsoft-com:office:office" xmlns:v="urn:schemas-microsoft-com:vml" xmlns:pvml="urn:schemas-microsoft-com:office:powerpoint" xmlns:com="http://schemas.openxmlformats.org/drawingml/2006/compatibility" xmlns:p14="http://schemas.microsoft.com/office/powerpoint/2010/main" xmlns:p15="http://schemas.microsoft.com/office/powerpoint/2012/main" xmlns:ahyp="http://schemas.microsoft.com/office/drawing/2018/hyperlinkcolor">
+<p:sld xmlns:a="http://schemas.openxmlformats.org/drawingml/2006/main" xmlns:r="http://schemas.openxmlformats.org/officeDocument/2006/relationships" xmlns:p="http://schemas.openxmlformats.org/presentationml/2006/main">
   <p:cSld>
     <p:spTree>
       <p:nvGrpSpPr>
-        <p:cNvPr id="191" name="Shape 191"/>
+        <p:cNvPr id="1" name="Shape 191"/>
         <p:cNvGrpSpPr/>
         <p:nvPr/>
       </p:nvGrpSpPr>
@@ -10764,7 +10864,9 @@
       <p:sp>
         <p:nvSpPr>
           <p:cNvPr id="192" name="Google Shape;192;p28"/>
-          <p:cNvSpPr txBox="1"/>
+          <p:cNvSpPr txBox="1">
+            <a:spLocks noGrp="1"/>
+          </p:cNvSpPr>
           <p:nvPr>
             <p:ph type="title"/>
           </p:nvPr>
@@ -10779,12 +10881,12 @@
           </a:prstGeom>
         </p:spPr>
         <p:txBody>
-          <a:bodyPr anchorCtr="0" anchor="t" bIns="91425" lIns="91425" spcFirstLastPara="1" rIns="91425" wrap="square" tIns="91425">
+          <a:bodyPr spcFirstLastPara="1" wrap="square" lIns="91425" tIns="91425" rIns="91425" bIns="91425" anchor="t" anchorCtr="0">
             <a:noAutofit/>
           </a:bodyPr>
           <a:lstStyle/>
           <a:p>
-            <a:pPr indent="0" lvl="0" marL="0" rtl="0" algn="l">
+            <a:pPr marL="0" lvl="0" indent="0" algn="l" rtl="0">
               <a:spcBef>
                 <a:spcPts val="0"/>
               </a:spcBef>
@@ -10794,7 +10896,7 @@
               <a:buNone/>
             </a:pPr>
             <a:r>
-              <a:rPr b="0" lang="zh-CN" sz="2800">
+              <a:rPr lang="zh-CN" sz="2800" b="0">
                 <a:solidFill>
                   <a:srgbClr val="000000"/>
                 </a:solidFill>
@@ -10817,9 +10919,11 @@
       <p:sp>
         <p:nvSpPr>
           <p:cNvPr id="193" name="Google Shape;193;p28"/>
-          <p:cNvSpPr txBox="1"/>
+          <p:cNvSpPr txBox="1">
+            <a:spLocks noGrp="1"/>
+          </p:cNvSpPr>
           <p:nvPr>
-            <p:ph idx="1" type="body"/>
+            <p:ph type="body" idx="1"/>
           </p:nvPr>
         </p:nvSpPr>
         <p:spPr>
@@ -10832,12 +10936,12 @@
           </a:prstGeom>
         </p:spPr>
         <p:txBody>
-          <a:bodyPr anchorCtr="0" anchor="t" bIns="91425" lIns="91425" spcFirstLastPara="1" rIns="91425" wrap="square" tIns="91425">
+          <a:bodyPr spcFirstLastPara="1" wrap="square" lIns="91425" tIns="91425" rIns="91425" bIns="91425" anchor="t" anchorCtr="0">
             <a:noAutofit/>
           </a:bodyPr>
           <a:lstStyle/>
           <a:p>
-            <a:pPr indent="0" lvl="0" marL="0" rtl="0" algn="l">
+            <a:pPr marL="0" lvl="0" indent="0" algn="l" rtl="0">
               <a:spcBef>
                 <a:spcPts val="500"/>
               </a:spcBef>
@@ -10869,7 +10973,7 @@
             </a:endParaRPr>
           </a:p>
           <a:p>
-            <a:pPr indent="0" lvl="0" marL="0" rtl="0" algn="l">
+            <a:pPr marL="0" lvl="0" indent="0" algn="l" rtl="0">
               <a:spcBef>
                 <a:spcPts val="500"/>
               </a:spcBef>
@@ -10901,7 +11005,7 @@
             </a:endParaRPr>
           </a:p>
           <a:p>
-            <a:pPr indent="0" lvl="0" marL="0" rtl="0" algn="l">
+            <a:pPr marL="0" lvl="0" indent="0" algn="l" rtl="0">
               <a:spcBef>
                 <a:spcPts val="500"/>
               </a:spcBef>
@@ -10933,7 +11037,7 @@
             </a:endParaRPr>
           </a:p>
           <a:p>
-            <a:pPr indent="0" lvl="0" marL="0" rtl="0" algn="l">
+            <a:pPr marL="0" lvl="0" indent="0" algn="l" rtl="0">
               <a:spcBef>
                 <a:spcPts val="500"/>
               </a:spcBef>
@@ -10942,9 +11046,6 @@
               </a:spcAft>
               <a:buNone/>
             </a:pPr>
-            <a:r>
-              <a:t/>
-            </a:r>
             <a:endParaRPr sz="1800">
               <a:solidFill>
                 <a:srgbClr val="000000"/>
@@ -10956,7 +11057,7 @@
             </a:endParaRPr>
           </a:p>
           <a:p>
-            <a:pPr indent="0" lvl="0" marL="0" rtl="0" algn="l">
+            <a:pPr marL="0" lvl="0" indent="0" algn="l" rtl="0">
               <a:spcBef>
                 <a:spcPts val="500"/>
               </a:spcBef>
@@ -10965,9 +11066,6 @@
               </a:spcAft>
               <a:buNone/>
             </a:pPr>
-            <a:r>
-              <a:t/>
-            </a:r>
             <a:endParaRPr sz="1800">
               <a:solidFill>
                 <a:srgbClr val="000000"/>
@@ -10979,7 +11077,7 @@
             </a:endParaRPr>
           </a:p>
           <a:p>
-            <a:pPr indent="0" lvl="0" marL="0" rtl="0" algn="l">
+            <a:pPr marL="0" lvl="0" indent="0" algn="l" rtl="0">
               <a:spcBef>
                 <a:spcPts val="0"/>
               </a:spcBef>
@@ -10989,9 +11087,6 @@
               <a:buSzPts val="688"/>
               <a:buNone/>
             </a:pPr>
-            <a:r>
-              <a:t/>
-            </a:r>
             <a:endParaRPr sz="1800">
               <a:solidFill>
                 <a:srgbClr val="000000"/>
@@ -11013,11 +11108,11 @@
 </file>
 
 <file path=ppt/slides/slide17.xml><?xml version="1.0" encoding="utf-8"?>
-<p:sld xmlns:a="http://schemas.openxmlformats.org/drawingml/2006/main" xmlns:r="http://schemas.openxmlformats.org/officeDocument/2006/relationships" xmlns:mc="http://schemas.openxmlformats.org/markup-compatibility/2006" xmlns:mv="urn:schemas-microsoft-com:mac:vml" xmlns:p="http://schemas.openxmlformats.org/presentationml/2006/main" xmlns:c="http://schemas.openxmlformats.org/drawingml/2006/chart" xmlns:dgm="http://schemas.openxmlformats.org/drawingml/2006/diagram" xmlns:o="urn:schemas-microsoft-com:office:office" xmlns:v="urn:schemas-microsoft-com:vml" xmlns:pvml="urn:schemas-microsoft-com:office:powerpoint" xmlns:com="http://schemas.openxmlformats.org/drawingml/2006/compatibility" xmlns:p14="http://schemas.microsoft.com/office/powerpoint/2010/main" xmlns:p15="http://schemas.microsoft.com/office/powerpoint/2012/main" xmlns:ahyp="http://schemas.microsoft.com/office/drawing/2018/hyperlinkcolor">
+<p:sld xmlns:a="http://schemas.openxmlformats.org/drawingml/2006/main" xmlns:r="http://schemas.openxmlformats.org/officeDocument/2006/relationships" xmlns:p="http://schemas.openxmlformats.org/presentationml/2006/main">
   <p:cSld>
     <p:spTree>
       <p:nvGrpSpPr>
-        <p:cNvPr id="197" name="Shape 197"/>
+        <p:cNvPr id="1" name="Shape 197"/>
         <p:cNvGrpSpPr/>
         <p:nvPr/>
       </p:nvGrpSpPr>
@@ -11032,7 +11127,9 @@
       <p:sp>
         <p:nvSpPr>
           <p:cNvPr id="198" name="Google Shape;198;p29"/>
-          <p:cNvSpPr txBox="1"/>
+          <p:cNvSpPr txBox="1">
+            <a:spLocks noGrp="1"/>
+          </p:cNvSpPr>
           <p:nvPr>
             <p:ph type="title"/>
           </p:nvPr>
@@ -11047,12 +11144,12 @@
           </a:prstGeom>
         </p:spPr>
         <p:txBody>
-          <a:bodyPr anchorCtr="0" anchor="t" bIns="91425" lIns="91425" spcFirstLastPara="1" rIns="91425" wrap="square" tIns="91425">
+          <a:bodyPr spcFirstLastPara="1" wrap="square" lIns="91425" tIns="91425" rIns="91425" bIns="91425" anchor="t" anchorCtr="0">
             <a:normAutofit/>
           </a:bodyPr>
           <a:lstStyle/>
           <a:p>
-            <a:pPr indent="0" lvl="0" marL="0" rtl="0" algn="l">
+            <a:pPr marL="0" lvl="0" indent="0" algn="l" rtl="0">
               <a:spcBef>
                 <a:spcPts val="0"/>
               </a:spcBef>
@@ -11088,11 +11185,11 @@
 </file>
 
 <file path=ppt/slides/slide2.xml><?xml version="1.0" encoding="utf-8"?>
-<p:sld xmlns:a="http://schemas.openxmlformats.org/drawingml/2006/main" xmlns:r="http://schemas.openxmlformats.org/officeDocument/2006/relationships" xmlns:mc="http://schemas.openxmlformats.org/markup-compatibility/2006" xmlns:mv="urn:schemas-microsoft-com:mac:vml" xmlns:p="http://schemas.openxmlformats.org/presentationml/2006/main" xmlns:c="http://schemas.openxmlformats.org/drawingml/2006/chart" xmlns:dgm="http://schemas.openxmlformats.org/drawingml/2006/diagram" xmlns:o="urn:schemas-microsoft-com:office:office" xmlns:v="urn:schemas-microsoft-com:vml" xmlns:pvml="urn:schemas-microsoft-com:office:powerpoint" xmlns:com="http://schemas.openxmlformats.org/drawingml/2006/compatibility" xmlns:p14="http://schemas.microsoft.com/office/powerpoint/2010/main" xmlns:p15="http://schemas.microsoft.com/office/powerpoint/2012/main" xmlns:ahyp="http://schemas.microsoft.com/office/drawing/2018/hyperlinkcolor">
+<p:sld xmlns:a="http://schemas.openxmlformats.org/drawingml/2006/main" xmlns:r="http://schemas.openxmlformats.org/officeDocument/2006/relationships" xmlns:p="http://schemas.openxmlformats.org/presentationml/2006/main">
   <p:cSld>
     <p:spTree>
       <p:nvGrpSpPr>
-        <p:cNvPr id="92" name="Shape 92"/>
+        <p:cNvPr id="1" name="Shape 92"/>
         <p:cNvGrpSpPr/>
         <p:nvPr/>
       </p:nvGrpSpPr>
@@ -11107,7 +11204,9 @@
       <p:sp>
         <p:nvSpPr>
           <p:cNvPr id="93" name="Google Shape;93;p14"/>
-          <p:cNvSpPr txBox="1"/>
+          <p:cNvSpPr txBox="1">
+            <a:spLocks noGrp="1"/>
+          </p:cNvSpPr>
           <p:nvPr>
             <p:ph type="title"/>
           </p:nvPr>
@@ -11122,12 +11221,12 @@
           </a:prstGeom>
         </p:spPr>
         <p:txBody>
-          <a:bodyPr anchorCtr="0" anchor="t" bIns="91425" lIns="91425" spcFirstLastPara="1" rIns="91425" wrap="square" tIns="91425">
+          <a:bodyPr spcFirstLastPara="1" wrap="square" lIns="91425" tIns="91425" rIns="91425" bIns="91425" anchor="t" anchorCtr="0">
             <a:noAutofit/>
           </a:bodyPr>
           <a:lstStyle/>
           <a:p>
-            <a:pPr indent="0" lvl="0" marL="0" rtl="0" algn="l">
+            <a:pPr marL="0" lvl="0" indent="0" algn="l" rtl="0">
               <a:spcBef>
                 <a:spcPts val="0"/>
               </a:spcBef>
@@ -11137,7 +11236,7 @@
               <a:buNone/>
             </a:pPr>
             <a:r>
-              <a:rPr b="0" lang="zh-CN" sz="2800">
+              <a:rPr lang="zh-CN" sz="2800" b="0">
                 <a:solidFill>
                   <a:srgbClr val="000000"/>
                 </a:solidFill>
@@ -11160,9 +11259,11 @@
       <p:sp>
         <p:nvSpPr>
           <p:cNvPr id="94" name="Google Shape;94;p14"/>
-          <p:cNvSpPr txBox="1"/>
+          <p:cNvSpPr txBox="1">
+            <a:spLocks noGrp="1"/>
+          </p:cNvSpPr>
           <p:nvPr>
-            <p:ph idx="1" type="body"/>
+            <p:ph type="body" idx="1"/>
           </p:nvPr>
         </p:nvSpPr>
         <p:spPr>
@@ -11175,12 +11276,12 @@
           </a:prstGeom>
         </p:spPr>
         <p:txBody>
-          <a:bodyPr anchorCtr="0" anchor="t" bIns="91425" lIns="91425" spcFirstLastPara="1" rIns="91425" wrap="square" tIns="91425">
+          <a:bodyPr spcFirstLastPara="1" wrap="square" lIns="91425" tIns="91425" rIns="91425" bIns="91425" anchor="t" anchorCtr="0">
             <a:noAutofit/>
           </a:bodyPr>
           <a:lstStyle/>
           <a:p>
-            <a:pPr indent="0" lvl="0" marL="0" rtl="0" algn="l">
+            <a:pPr marL="0" lvl="0" indent="0" algn="l" rtl="0">
               <a:spcBef>
                 <a:spcPts val="500"/>
               </a:spcBef>
@@ -11224,7 +11325,7 @@
             </a:endParaRPr>
           </a:p>
           <a:p>
-            <a:pPr indent="0" lvl="0" marL="0" rtl="0" algn="l">
+            <a:pPr marL="0" lvl="0" indent="0" algn="l" rtl="0">
               <a:spcBef>
                 <a:spcPts val="500"/>
               </a:spcBef>
@@ -11268,7 +11369,7 @@
             </a:endParaRPr>
           </a:p>
           <a:p>
-            <a:pPr indent="0" lvl="0" marL="0" rtl="0" algn="l">
+            <a:pPr marL="0" lvl="0" indent="0" algn="l" rtl="0">
               <a:spcBef>
                 <a:spcPts val="500"/>
               </a:spcBef>
@@ -11312,7 +11413,7 @@
             </a:endParaRPr>
           </a:p>
           <a:p>
-            <a:pPr indent="0" lvl="0" marL="0" rtl="0" algn="l">
+            <a:pPr marL="0" lvl="0" indent="0" algn="l" rtl="0">
               <a:spcBef>
                 <a:spcPts val="0"/>
               </a:spcBef>
@@ -11322,10 +11423,7 @@
               <a:buSzPts val="688"/>
               <a:buNone/>
             </a:pPr>
-            <a:r>
-              <a:t/>
-            </a:r>
-            <a:endParaRPr b="1" sz="2000">
+            <a:endParaRPr sz="2000" b="1">
               <a:latin typeface="Calibri"/>
               <a:ea typeface="Calibri"/>
               <a:cs typeface="Calibri"/>
@@ -11333,7 +11431,7 @@
             </a:endParaRPr>
           </a:p>
           <a:p>
-            <a:pPr indent="0" lvl="0" marL="0" rtl="0" algn="l">
+            <a:pPr marL="0" lvl="0" indent="0" algn="l" rtl="0">
               <a:spcBef>
                 <a:spcPts val="1200"/>
               </a:spcBef>
@@ -11343,9 +11441,6 @@
               <a:buSzPts val="688"/>
               <a:buNone/>
             </a:pPr>
-            <a:r>
-              <a:t/>
-            </a:r>
             <a:endParaRPr sz="2000">
               <a:latin typeface="Calibri"/>
               <a:ea typeface="Calibri"/>
@@ -11354,7 +11449,7 @@
             </a:endParaRPr>
           </a:p>
           <a:p>
-            <a:pPr indent="0" lvl="0" marL="0" rtl="0" algn="l">
+            <a:pPr marL="0" lvl="0" indent="0" algn="l" rtl="0">
               <a:spcBef>
                 <a:spcPts val="1200"/>
               </a:spcBef>
@@ -11364,9 +11459,6 @@
               <a:buSzPts val="688"/>
               <a:buNone/>
             </a:pPr>
-            <a:r>
-              <a:t/>
-            </a:r>
             <a:endParaRPr sz="2000">
               <a:latin typeface="Calibri"/>
               <a:ea typeface="Calibri"/>
@@ -11385,11 +11477,11 @@
 </file>
 
 <file path=ppt/slides/slide3.xml><?xml version="1.0" encoding="utf-8"?>
-<p:sld xmlns:a="http://schemas.openxmlformats.org/drawingml/2006/main" xmlns:r="http://schemas.openxmlformats.org/officeDocument/2006/relationships" xmlns:mc="http://schemas.openxmlformats.org/markup-compatibility/2006" xmlns:mv="urn:schemas-microsoft-com:mac:vml" xmlns:p="http://schemas.openxmlformats.org/presentationml/2006/main" xmlns:c="http://schemas.openxmlformats.org/drawingml/2006/chart" xmlns:dgm="http://schemas.openxmlformats.org/drawingml/2006/diagram" xmlns:o="urn:schemas-microsoft-com:office:office" xmlns:v="urn:schemas-microsoft-com:vml" xmlns:pvml="urn:schemas-microsoft-com:office:powerpoint" xmlns:com="http://schemas.openxmlformats.org/drawingml/2006/compatibility" xmlns:p14="http://schemas.microsoft.com/office/powerpoint/2010/main" xmlns:p15="http://schemas.microsoft.com/office/powerpoint/2012/main" xmlns:ahyp="http://schemas.microsoft.com/office/drawing/2018/hyperlinkcolor">
+<p:sld xmlns:a="http://schemas.openxmlformats.org/drawingml/2006/main" xmlns:r="http://schemas.openxmlformats.org/officeDocument/2006/relationships" xmlns:p="http://schemas.openxmlformats.org/presentationml/2006/main">
   <p:cSld>
     <p:spTree>
       <p:nvGrpSpPr>
-        <p:cNvPr id="98" name="Shape 98"/>
+        <p:cNvPr id="1" name="Shape 98"/>
         <p:cNvGrpSpPr/>
         <p:nvPr/>
       </p:nvGrpSpPr>
@@ -11404,7 +11496,9 @@
       <p:sp>
         <p:nvSpPr>
           <p:cNvPr id="99" name="Google Shape;99;p15"/>
-          <p:cNvSpPr txBox="1"/>
+          <p:cNvSpPr txBox="1">
+            <a:spLocks noGrp="1"/>
+          </p:cNvSpPr>
           <p:nvPr>
             <p:ph type="title"/>
           </p:nvPr>
@@ -11419,12 +11513,12 @@
           </a:prstGeom>
         </p:spPr>
         <p:txBody>
-          <a:bodyPr anchorCtr="0" anchor="t" bIns="91425" lIns="91425" spcFirstLastPara="1" rIns="91425" wrap="square" tIns="91425">
+          <a:bodyPr spcFirstLastPara="1" wrap="square" lIns="91425" tIns="91425" rIns="91425" bIns="91425" anchor="t" anchorCtr="0">
             <a:noAutofit/>
           </a:bodyPr>
           <a:lstStyle/>
           <a:p>
-            <a:pPr indent="0" lvl="0" marL="0" rtl="0" algn="l">
+            <a:pPr marL="0" lvl="0" indent="0" algn="l" rtl="0">
               <a:spcBef>
                 <a:spcPts val="0"/>
               </a:spcBef>
@@ -11434,7 +11528,7 @@
               <a:buNone/>
             </a:pPr>
             <a:r>
-              <a:rPr b="0" lang="zh-CN" sz="2800">
+              <a:rPr lang="zh-CN" sz="2800" b="0">
                 <a:solidFill>
                   <a:srgbClr val="000000"/>
                 </a:solidFill>
@@ -11457,9 +11551,11 @@
       <p:sp>
         <p:nvSpPr>
           <p:cNvPr id="100" name="Google Shape;100;p15"/>
-          <p:cNvSpPr txBox="1"/>
+          <p:cNvSpPr txBox="1">
+            <a:spLocks noGrp="1"/>
+          </p:cNvSpPr>
           <p:nvPr>
-            <p:ph idx="1" type="body"/>
+            <p:ph type="body" idx="1"/>
           </p:nvPr>
         </p:nvSpPr>
         <p:spPr>
@@ -11472,12 +11568,12 @@
           </a:prstGeom>
         </p:spPr>
         <p:txBody>
-          <a:bodyPr anchorCtr="0" anchor="t" bIns="91425" lIns="91425" spcFirstLastPara="1" rIns="91425" wrap="square" tIns="91425">
+          <a:bodyPr spcFirstLastPara="1" wrap="square" lIns="91425" tIns="91425" rIns="91425" bIns="91425" anchor="t" anchorCtr="0">
             <a:noAutofit/>
           </a:bodyPr>
           <a:lstStyle/>
           <a:p>
-            <a:pPr indent="0" lvl="0" marL="0" rtl="0" algn="l">
+            <a:pPr marL="0" lvl="0" indent="0" algn="l" rtl="0">
               <a:spcBef>
                 <a:spcPts val="500"/>
               </a:spcBef>
@@ -11521,7 +11617,7 @@
             </a:endParaRPr>
           </a:p>
           <a:p>
-            <a:pPr indent="0" lvl="0" marL="0" rtl="0" algn="l">
+            <a:pPr marL="0" lvl="0" indent="0" algn="l" rtl="0">
               <a:spcBef>
                 <a:spcPts val="500"/>
               </a:spcBef>
@@ -11565,7 +11661,7 @@
             </a:endParaRPr>
           </a:p>
           <a:p>
-            <a:pPr indent="0" lvl="0" marL="0" rtl="0" algn="l">
+            <a:pPr marL="0" lvl="0" indent="0" algn="l" rtl="0">
               <a:spcBef>
                 <a:spcPts val="500"/>
               </a:spcBef>
@@ -11609,7 +11705,7 @@
             </a:endParaRPr>
           </a:p>
           <a:p>
-            <a:pPr indent="0" lvl="0" marL="0" rtl="0" algn="l">
+            <a:pPr marL="0" lvl="0" indent="0" algn="l" rtl="0">
               <a:spcBef>
                 <a:spcPts val="500"/>
               </a:spcBef>
@@ -11618,9 +11714,6 @@
               </a:spcAft>
               <a:buNone/>
             </a:pPr>
-            <a:r>
-              <a:t/>
-            </a:r>
             <a:endParaRPr sz="2000">
               <a:solidFill>
                 <a:srgbClr val="000000"/>
@@ -11632,7 +11725,7 @@
             </a:endParaRPr>
           </a:p>
           <a:p>
-            <a:pPr indent="0" lvl="0" marL="0" rtl="0" algn="l">
+            <a:pPr marL="0" lvl="0" indent="0" algn="l" rtl="0">
               <a:spcBef>
                 <a:spcPts val="0"/>
               </a:spcBef>
@@ -11642,10 +11735,7 @@
               <a:buSzPts val="688"/>
               <a:buNone/>
             </a:pPr>
-            <a:r>
-              <a:t/>
-            </a:r>
-            <a:endParaRPr b="1" sz="2000">
+            <a:endParaRPr sz="2000" b="1">
               <a:latin typeface="Calibri"/>
               <a:ea typeface="Calibri"/>
               <a:cs typeface="Calibri"/>
@@ -11653,7 +11743,7 @@
             </a:endParaRPr>
           </a:p>
           <a:p>
-            <a:pPr indent="0" lvl="0" marL="0" rtl="0" algn="l">
+            <a:pPr marL="0" lvl="0" indent="0" algn="l" rtl="0">
               <a:spcBef>
                 <a:spcPts val="1200"/>
               </a:spcBef>
@@ -11663,9 +11753,6 @@
               <a:buSzPts val="688"/>
               <a:buNone/>
             </a:pPr>
-            <a:r>
-              <a:t/>
-            </a:r>
             <a:endParaRPr sz="2000">
               <a:latin typeface="Calibri"/>
               <a:ea typeface="Calibri"/>
@@ -11674,7 +11761,7 @@
             </a:endParaRPr>
           </a:p>
           <a:p>
-            <a:pPr indent="0" lvl="0" marL="0" rtl="0" algn="l">
+            <a:pPr marL="0" lvl="0" indent="0" algn="l" rtl="0">
               <a:spcBef>
                 <a:spcPts val="1200"/>
               </a:spcBef>
@@ -11684,9 +11771,6 @@
               <a:buSzPts val="688"/>
               <a:buNone/>
             </a:pPr>
-            <a:r>
-              <a:t/>
-            </a:r>
             <a:endParaRPr sz="2000">
               <a:latin typeface="Calibri"/>
               <a:ea typeface="Calibri"/>
@@ -11705,11 +11789,11 @@
 </file>
 
 <file path=ppt/slides/slide4.xml><?xml version="1.0" encoding="utf-8"?>
-<p:sld xmlns:a="http://schemas.openxmlformats.org/drawingml/2006/main" xmlns:r="http://schemas.openxmlformats.org/officeDocument/2006/relationships" xmlns:mc="http://schemas.openxmlformats.org/markup-compatibility/2006" xmlns:mv="urn:schemas-microsoft-com:mac:vml" xmlns:p="http://schemas.openxmlformats.org/presentationml/2006/main" xmlns:c="http://schemas.openxmlformats.org/drawingml/2006/chart" xmlns:dgm="http://schemas.openxmlformats.org/drawingml/2006/diagram" xmlns:o="urn:schemas-microsoft-com:office:office" xmlns:v="urn:schemas-microsoft-com:vml" xmlns:pvml="urn:schemas-microsoft-com:office:powerpoint" xmlns:com="http://schemas.openxmlformats.org/drawingml/2006/compatibility" xmlns:p14="http://schemas.microsoft.com/office/powerpoint/2010/main" xmlns:p15="http://schemas.microsoft.com/office/powerpoint/2012/main" xmlns:ahyp="http://schemas.microsoft.com/office/drawing/2018/hyperlinkcolor">
+<p:sld xmlns:a="http://schemas.openxmlformats.org/drawingml/2006/main" xmlns:r="http://schemas.openxmlformats.org/officeDocument/2006/relationships" xmlns:p="http://schemas.openxmlformats.org/presentationml/2006/main">
   <p:cSld>
     <p:spTree>
       <p:nvGrpSpPr>
-        <p:cNvPr id="104" name="Shape 104"/>
+        <p:cNvPr id="1" name="Shape 104"/>
         <p:cNvGrpSpPr/>
         <p:nvPr/>
       </p:nvGrpSpPr>
@@ -11724,7 +11808,9 @@
       <p:sp>
         <p:nvSpPr>
           <p:cNvPr id="105" name="Google Shape;105;p16"/>
-          <p:cNvSpPr txBox="1"/>
+          <p:cNvSpPr txBox="1">
+            <a:spLocks noGrp="1"/>
+          </p:cNvSpPr>
           <p:nvPr>
             <p:ph type="title"/>
           </p:nvPr>
@@ -11739,12 +11825,12 @@
           </a:prstGeom>
         </p:spPr>
         <p:txBody>
-          <a:bodyPr anchorCtr="0" anchor="t" bIns="91425" lIns="91425" spcFirstLastPara="1" rIns="91425" wrap="square" tIns="91425">
+          <a:bodyPr spcFirstLastPara="1" wrap="square" lIns="91425" tIns="91425" rIns="91425" bIns="91425" anchor="t" anchorCtr="0">
             <a:noAutofit/>
           </a:bodyPr>
           <a:lstStyle/>
           <a:p>
-            <a:pPr indent="0" lvl="0" marL="0" rtl="0" algn="l">
+            <a:pPr marL="0" lvl="0" indent="0" algn="l" rtl="0">
               <a:spcBef>
                 <a:spcPts val="0"/>
               </a:spcBef>
@@ -11754,7 +11840,7 @@
               <a:buNone/>
             </a:pPr>
             <a:r>
-              <a:rPr b="0" lang="zh-CN" sz="2800">
+              <a:rPr lang="zh-CN" sz="2800" b="0">
                 <a:solidFill>
                   <a:srgbClr val="000000"/>
                 </a:solidFill>
@@ -11777,9 +11863,11 @@
       <p:sp>
         <p:nvSpPr>
           <p:cNvPr id="106" name="Google Shape;106;p16"/>
-          <p:cNvSpPr txBox="1"/>
+          <p:cNvSpPr txBox="1">
+            <a:spLocks noGrp="1"/>
+          </p:cNvSpPr>
           <p:nvPr>
-            <p:ph idx="1" type="body"/>
+            <p:ph type="body" idx="1"/>
           </p:nvPr>
         </p:nvSpPr>
         <p:spPr>
@@ -11792,12 +11880,12 @@
           </a:prstGeom>
         </p:spPr>
         <p:txBody>
-          <a:bodyPr anchorCtr="0" anchor="t" bIns="91425" lIns="91425" spcFirstLastPara="1" rIns="91425" wrap="square" tIns="91425">
+          <a:bodyPr spcFirstLastPara="1" wrap="square" lIns="91425" tIns="91425" rIns="91425" bIns="91425" anchor="t" anchorCtr="0">
             <a:noAutofit/>
           </a:bodyPr>
           <a:lstStyle/>
           <a:p>
-            <a:pPr indent="0" lvl="0" marL="0" rtl="0" algn="l">
+            <a:pPr marL="0" lvl="0" indent="0" algn="l" rtl="0">
               <a:spcBef>
                 <a:spcPts val="500"/>
               </a:spcBef>
@@ -11831,7 +11919,7 @@
               <a:t> </a:t>
             </a:r>
             <a:r>
-              <a:rPr b="1" lang="zh-CN" sz="2000">
+              <a:rPr lang="zh-CN" sz="2000" b="1">
                 <a:solidFill>
                   <a:srgbClr val="000000"/>
                 </a:solidFill>
@@ -11865,7 +11953,7 @@
             </a:endParaRPr>
           </a:p>
           <a:p>
-            <a:pPr indent="0" lvl="0" marL="0" rtl="0" algn="l">
+            <a:pPr marL="0" lvl="0" indent="0" algn="l" rtl="0">
               <a:spcBef>
                 <a:spcPts val="500"/>
               </a:spcBef>
@@ -11899,7 +11987,7 @@
               <a:t> </a:t>
             </a:r>
             <a:r>
-              <a:rPr b="1" lang="zh-CN" sz="2000">
+              <a:rPr lang="zh-CN" sz="2000" b="1">
                 <a:solidFill>
                   <a:srgbClr val="000000"/>
                 </a:solidFill>
@@ -11933,7 +12021,7 @@
             </a:endParaRPr>
           </a:p>
           <a:p>
-            <a:pPr indent="0" lvl="0" marL="0" rtl="0" algn="l">
+            <a:pPr marL="0" lvl="0" indent="0" algn="l" rtl="0">
               <a:spcBef>
                 <a:spcPts val="500"/>
               </a:spcBef>
@@ -11967,7 +12055,7 @@
               <a:t> </a:t>
             </a:r>
             <a:r>
-              <a:rPr b="1" lang="zh-CN" sz="2000">
+              <a:rPr lang="zh-CN" sz="2000" b="1">
                 <a:solidFill>
                   <a:srgbClr val="000000"/>
                 </a:solidFill>
@@ -12001,7 +12089,7 @@
             </a:endParaRPr>
           </a:p>
           <a:p>
-            <a:pPr indent="-355600" lvl="0" marL="457200" rtl="0" algn="l">
+            <a:pPr marL="457200" lvl="0" indent="-355600" algn="l" rtl="0">
               <a:spcBef>
                 <a:spcPts val="500"/>
               </a:spcBef>
@@ -12038,7 +12126,7 @@
             </a:endParaRPr>
           </a:p>
           <a:p>
-            <a:pPr indent="-355600" lvl="0" marL="457200" rtl="0" algn="l">
+            <a:pPr marL="457200" lvl="0" indent="-355600" algn="l" rtl="0">
               <a:spcBef>
                 <a:spcPts val="0"/>
               </a:spcBef>
@@ -12075,7 +12163,7 @@
             </a:endParaRPr>
           </a:p>
           <a:p>
-            <a:pPr indent="-355600" lvl="0" marL="457200" rtl="0" algn="l">
+            <a:pPr marL="457200" lvl="0" indent="-355600" algn="l" rtl="0">
               <a:spcBef>
                 <a:spcPts val="0"/>
               </a:spcBef>
@@ -12112,7 +12200,7 @@
             </a:endParaRPr>
           </a:p>
           <a:p>
-            <a:pPr indent="0" lvl="0" marL="0" rtl="0" algn="l">
+            <a:pPr marL="0" lvl="0" indent="0" algn="l" rtl="0">
               <a:spcBef>
                 <a:spcPts val="0"/>
               </a:spcBef>
@@ -12122,9 +12210,6 @@
               <a:buSzPts val="688"/>
               <a:buNone/>
             </a:pPr>
-            <a:r>
-              <a:t/>
-            </a:r>
             <a:endParaRPr sz="2000">
               <a:solidFill>
                 <a:srgbClr val="000000"/>
@@ -12146,11 +12231,11 @@
 </file>
 
 <file path=ppt/slides/slide5.xml><?xml version="1.0" encoding="utf-8"?>
-<p:sld xmlns:a="http://schemas.openxmlformats.org/drawingml/2006/main" xmlns:r="http://schemas.openxmlformats.org/officeDocument/2006/relationships" xmlns:mc="http://schemas.openxmlformats.org/markup-compatibility/2006" xmlns:mv="urn:schemas-microsoft-com:mac:vml" xmlns:p="http://schemas.openxmlformats.org/presentationml/2006/main" xmlns:c="http://schemas.openxmlformats.org/drawingml/2006/chart" xmlns:dgm="http://schemas.openxmlformats.org/drawingml/2006/diagram" xmlns:o="urn:schemas-microsoft-com:office:office" xmlns:v="urn:schemas-microsoft-com:vml" xmlns:pvml="urn:schemas-microsoft-com:office:powerpoint" xmlns:com="http://schemas.openxmlformats.org/drawingml/2006/compatibility" xmlns:p14="http://schemas.microsoft.com/office/powerpoint/2010/main" xmlns:p15="http://schemas.microsoft.com/office/powerpoint/2012/main" xmlns:ahyp="http://schemas.microsoft.com/office/drawing/2018/hyperlinkcolor">
+<p:sld xmlns:a="http://schemas.openxmlformats.org/drawingml/2006/main" xmlns:r="http://schemas.openxmlformats.org/officeDocument/2006/relationships" xmlns:p="http://schemas.openxmlformats.org/presentationml/2006/main">
   <p:cSld>
     <p:spTree>
       <p:nvGrpSpPr>
-        <p:cNvPr id="110" name="Shape 110"/>
+        <p:cNvPr id="1" name="Shape 110"/>
         <p:cNvGrpSpPr/>
         <p:nvPr/>
       </p:nvGrpSpPr>
@@ -12165,7 +12250,9 @@
       <p:sp>
         <p:nvSpPr>
           <p:cNvPr id="111" name="Google Shape;111;p17"/>
-          <p:cNvSpPr txBox="1"/>
+          <p:cNvSpPr txBox="1">
+            <a:spLocks noGrp="1"/>
+          </p:cNvSpPr>
           <p:nvPr>
             <p:ph type="title"/>
           </p:nvPr>
@@ -12180,12 +12267,12 @@
           </a:prstGeom>
         </p:spPr>
         <p:txBody>
-          <a:bodyPr anchorCtr="0" anchor="t" bIns="91425" lIns="91425" spcFirstLastPara="1" rIns="91425" wrap="square" tIns="91425">
+          <a:bodyPr spcFirstLastPara="1" wrap="square" lIns="91425" tIns="91425" rIns="91425" bIns="91425" anchor="t" anchorCtr="0">
             <a:noAutofit/>
           </a:bodyPr>
           <a:lstStyle/>
           <a:p>
-            <a:pPr indent="0" lvl="0" marL="0" rtl="0" algn="l">
+            <a:pPr marL="0" lvl="0" indent="0" algn="l" rtl="0">
               <a:spcBef>
                 <a:spcPts val="0"/>
               </a:spcBef>
@@ -12195,7 +12282,7 @@
               <a:buNone/>
             </a:pPr>
             <a:r>
-              <a:rPr b="0" lang="zh-CN" sz="2800">
+              <a:rPr lang="zh-CN" sz="2800" b="0">
                 <a:solidFill>
                   <a:srgbClr val="000000"/>
                 </a:solidFill>
@@ -12218,9 +12305,11 @@
       <p:sp>
         <p:nvSpPr>
           <p:cNvPr id="112" name="Google Shape;112;p17"/>
-          <p:cNvSpPr txBox="1"/>
+          <p:cNvSpPr txBox="1">
+            <a:spLocks noGrp="1"/>
+          </p:cNvSpPr>
           <p:nvPr>
-            <p:ph idx="1" type="body"/>
+            <p:ph type="body" idx="1"/>
           </p:nvPr>
         </p:nvSpPr>
         <p:spPr>
@@ -12233,12 +12322,12 @@
           </a:prstGeom>
         </p:spPr>
         <p:txBody>
-          <a:bodyPr anchorCtr="0" anchor="t" bIns="91425" lIns="91425" spcFirstLastPara="1" rIns="91425" wrap="square" tIns="91425">
+          <a:bodyPr spcFirstLastPara="1" wrap="square" lIns="91425" tIns="91425" rIns="91425" bIns="91425" anchor="t" anchorCtr="0">
             <a:noAutofit/>
           </a:bodyPr>
           <a:lstStyle/>
           <a:p>
-            <a:pPr indent="0" lvl="0" marL="0" rtl="0" algn="l">
+            <a:pPr marL="0" lvl="0" indent="0" algn="l" rtl="0">
               <a:spcBef>
                 <a:spcPts val="500"/>
               </a:spcBef>
@@ -12282,7 +12371,7 @@
             </a:endParaRPr>
           </a:p>
           <a:p>
-            <a:pPr indent="0" lvl="0" marL="0" rtl="0" algn="l">
+            <a:pPr marL="0" lvl="0" indent="0" algn="l" rtl="0">
               <a:spcBef>
                 <a:spcPts val="500"/>
               </a:spcBef>
@@ -12326,7 +12415,7 @@
             </a:endParaRPr>
           </a:p>
           <a:p>
-            <a:pPr indent="0" lvl="0" marL="0" rtl="0" algn="l">
+            <a:pPr marL="0" lvl="0" indent="0" algn="l" rtl="0">
               <a:spcBef>
                 <a:spcPts val="500"/>
               </a:spcBef>
@@ -12370,7 +12459,7 @@
             </a:endParaRPr>
           </a:p>
           <a:p>
-            <a:pPr indent="0" lvl="0" marL="0" rtl="0" algn="l">
+            <a:pPr marL="0" lvl="0" indent="0" algn="l" rtl="0">
               <a:spcBef>
                 <a:spcPts val="500"/>
               </a:spcBef>
@@ -12414,7 +12503,7 @@
             </a:endParaRPr>
           </a:p>
           <a:p>
-            <a:pPr indent="0" lvl="0" marL="0" rtl="0" algn="l">
+            <a:pPr marL="0" lvl="0" indent="0" algn="l" rtl="0">
               <a:spcBef>
                 <a:spcPts val="0"/>
               </a:spcBef>
@@ -12424,9 +12513,6 @@
               <a:buSzPts val="688"/>
               <a:buNone/>
             </a:pPr>
-            <a:r>
-              <a:t/>
-            </a:r>
             <a:endParaRPr sz="2000">
               <a:solidFill>
                 <a:srgbClr val="000000"/>
@@ -12448,11 +12534,11 @@
 </file>
 
 <file path=ppt/slides/slide6.xml><?xml version="1.0" encoding="utf-8"?>
-<p:sld xmlns:a="http://schemas.openxmlformats.org/drawingml/2006/main" xmlns:r="http://schemas.openxmlformats.org/officeDocument/2006/relationships" xmlns:mc="http://schemas.openxmlformats.org/markup-compatibility/2006" xmlns:mv="urn:schemas-microsoft-com:mac:vml" xmlns:p="http://schemas.openxmlformats.org/presentationml/2006/main" xmlns:c="http://schemas.openxmlformats.org/drawingml/2006/chart" xmlns:dgm="http://schemas.openxmlformats.org/drawingml/2006/diagram" xmlns:o="urn:schemas-microsoft-com:office:office" xmlns:v="urn:schemas-microsoft-com:vml" xmlns:pvml="urn:schemas-microsoft-com:office:powerpoint" xmlns:com="http://schemas.openxmlformats.org/drawingml/2006/compatibility" xmlns:p14="http://schemas.microsoft.com/office/powerpoint/2010/main" xmlns:p15="http://schemas.microsoft.com/office/powerpoint/2012/main" xmlns:ahyp="http://schemas.microsoft.com/office/drawing/2018/hyperlinkcolor">
+<p:sld xmlns:a="http://schemas.openxmlformats.org/drawingml/2006/main" xmlns:r="http://schemas.openxmlformats.org/officeDocument/2006/relationships" xmlns:p="http://schemas.openxmlformats.org/presentationml/2006/main">
   <p:cSld>
     <p:spTree>
       <p:nvGrpSpPr>
-        <p:cNvPr id="116" name="Shape 116"/>
+        <p:cNvPr id="1" name="Shape 116"/>
         <p:cNvGrpSpPr/>
         <p:nvPr/>
       </p:nvGrpSpPr>
@@ -12467,7 +12553,9 @@
       <p:sp>
         <p:nvSpPr>
           <p:cNvPr id="117" name="Google Shape;117;p18"/>
-          <p:cNvSpPr txBox="1"/>
+          <p:cNvSpPr txBox="1">
+            <a:spLocks noGrp="1"/>
+          </p:cNvSpPr>
           <p:nvPr>
             <p:ph type="title"/>
           </p:nvPr>
@@ -12482,12 +12570,12 @@
           </a:prstGeom>
         </p:spPr>
         <p:txBody>
-          <a:bodyPr anchorCtr="0" anchor="t" bIns="91425" lIns="91425" spcFirstLastPara="1" rIns="91425" wrap="square" tIns="91425">
+          <a:bodyPr spcFirstLastPara="1" wrap="square" lIns="91425" tIns="91425" rIns="91425" bIns="91425" anchor="t" anchorCtr="0">
             <a:noAutofit/>
           </a:bodyPr>
           <a:lstStyle/>
           <a:p>
-            <a:pPr indent="0" lvl="0" marL="0" rtl="0" algn="l">
+            <a:pPr marL="0" lvl="0" indent="0" algn="l" rtl="0">
               <a:spcBef>
                 <a:spcPts val="0"/>
               </a:spcBef>
@@ -12497,7 +12585,7 @@
               <a:buNone/>
             </a:pPr>
             <a:r>
-              <a:rPr b="0" lang="zh-CN" sz="2800">
+              <a:rPr lang="zh-CN" sz="2800" b="0">
                 <a:solidFill>
                   <a:srgbClr val="000000"/>
                 </a:solidFill>
@@ -12520,9 +12608,11 @@
       <p:sp>
         <p:nvSpPr>
           <p:cNvPr id="118" name="Google Shape;118;p18"/>
-          <p:cNvSpPr txBox="1"/>
+          <p:cNvSpPr txBox="1">
+            <a:spLocks noGrp="1"/>
+          </p:cNvSpPr>
           <p:nvPr>
-            <p:ph idx="1" type="body"/>
+            <p:ph type="body" idx="1"/>
           </p:nvPr>
         </p:nvSpPr>
         <p:spPr>
@@ -12535,12 +12625,12 @@
           </a:prstGeom>
         </p:spPr>
         <p:txBody>
-          <a:bodyPr anchorCtr="0" anchor="t" bIns="91425" lIns="91425" spcFirstLastPara="1" rIns="91425" wrap="square" tIns="91425">
+          <a:bodyPr spcFirstLastPara="1" wrap="square" lIns="91425" tIns="91425" rIns="91425" bIns="91425" anchor="t" anchorCtr="0">
             <a:noAutofit/>
           </a:bodyPr>
           <a:lstStyle/>
           <a:p>
-            <a:pPr indent="0" lvl="0" marL="0" rtl="0" algn="l">
+            <a:pPr marL="0" lvl="0" indent="0" algn="l" rtl="0">
               <a:spcBef>
                 <a:spcPts val="500"/>
               </a:spcBef>
@@ -12584,7 +12674,7 @@
             </a:endParaRPr>
           </a:p>
           <a:p>
-            <a:pPr indent="0" lvl="0" marL="0" rtl="0" algn="l">
+            <a:pPr marL="0" lvl="0" indent="0" algn="l" rtl="0">
               <a:spcBef>
                 <a:spcPts val="500"/>
               </a:spcBef>
@@ -12628,7 +12718,7 @@
             </a:endParaRPr>
           </a:p>
           <a:p>
-            <a:pPr indent="0" lvl="0" marL="0" rtl="0" algn="l">
+            <a:pPr marL="0" lvl="0" indent="0" algn="l" rtl="0">
               <a:spcBef>
                 <a:spcPts val="500"/>
               </a:spcBef>
@@ -12672,7 +12762,7 @@
             </a:endParaRPr>
           </a:p>
           <a:p>
-            <a:pPr indent="0" lvl="0" marL="0" rtl="0" algn="l">
+            <a:pPr marL="0" lvl="0" indent="0" algn="l" rtl="0">
               <a:spcBef>
                 <a:spcPts val="500"/>
               </a:spcBef>
@@ -12716,7 +12806,7 @@
             </a:endParaRPr>
           </a:p>
           <a:p>
-            <a:pPr indent="0" lvl="0" marL="0" rtl="0" algn="l">
+            <a:pPr marL="0" lvl="0" indent="0" algn="l" rtl="0">
               <a:spcBef>
                 <a:spcPts val="500"/>
               </a:spcBef>
@@ -12760,7 +12850,7 @@
             </a:endParaRPr>
           </a:p>
           <a:p>
-            <a:pPr indent="0" lvl="0" marL="0" rtl="0" algn="l">
+            <a:pPr marL="0" lvl="0" indent="0" algn="l" rtl="0">
               <a:spcBef>
                 <a:spcPts val="500"/>
               </a:spcBef>
@@ -12804,7 +12894,7 @@
             </a:endParaRPr>
           </a:p>
           <a:p>
-            <a:pPr indent="0" lvl="0" marL="0" rtl="0" algn="l">
+            <a:pPr marL="0" lvl="0" indent="0" algn="l" rtl="0">
               <a:spcBef>
                 <a:spcPts val="500"/>
               </a:spcBef>
@@ -12813,9 +12903,6 @@
               </a:spcAft>
               <a:buNone/>
             </a:pPr>
-            <a:r>
-              <a:t/>
-            </a:r>
             <a:endParaRPr sz="2000">
               <a:solidFill>
                 <a:srgbClr val="000000"/>
@@ -12827,7 +12914,7 @@
             </a:endParaRPr>
           </a:p>
           <a:p>
-            <a:pPr indent="0" lvl="0" marL="0" rtl="0" algn="l">
+            <a:pPr marL="0" lvl="0" indent="0" algn="l" rtl="0">
               <a:spcBef>
                 <a:spcPts val="0"/>
               </a:spcBef>
@@ -12837,9 +12924,6 @@
               <a:buSzPts val="688"/>
               <a:buNone/>
             </a:pPr>
-            <a:r>
-              <a:t/>
-            </a:r>
             <a:endParaRPr sz="2000">
               <a:solidFill>
                 <a:srgbClr val="000000"/>
@@ -12861,11 +12945,11 @@
 </file>
 
 <file path=ppt/slides/slide7.xml><?xml version="1.0" encoding="utf-8"?>
-<p:sld xmlns:a="http://schemas.openxmlformats.org/drawingml/2006/main" xmlns:r="http://schemas.openxmlformats.org/officeDocument/2006/relationships" xmlns:mc="http://schemas.openxmlformats.org/markup-compatibility/2006" xmlns:mv="urn:schemas-microsoft-com:mac:vml" xmlns:p="http://schemas.openxmlformats.org/presentationml/2006/main" xmlns:c="http://schemas.openxmlformats.org/drawingml/2006/chart" xmlns:dgm="http://schemas.openxmlformats.org/drawingml/2006/diagram" xmlns:o="urn:schemas-microsoft-com:office:office" xmlns:v="urn:schemas-microsoft-com:vml" xmlns:pvml="urn:schemas-microsoft-com:office:powerpoint" xmlns:com="http://schemas.openxmlformats.org/drawingml/2006/compatibility" xmlns:p14="http://schemas.microsoft.com/office/powerpoint/2010/main" xmlns:p15="http://schemas.microsoft.com/office/powerpoint/2012/main" xmlns:ahyp="http://schemas.microsoft.com/office/drawing/2018/hyperlinkcolor">
+<p:sld xmlns:a="http://schemas.openxmlformats.org/drawingml/2006/main" xmlns:r="http://schemas.openxmlformats.org/officeDocument/2006/relationships" xmlns:p="http://schemas.openxmlformats.org/presentationml/2006/main">
   <p:cSld>
     <p:spTree>
       <p:nvGrpSpPr>
-        <p:cNvPr id="122" name="Shape 122"/>
+        <p:cNvPr id="1" name="Shape 122"/>
         <p:cNvGrpSpPr/>
         <p:nvPr/>
       </p:nvGrpSpPr>
@@ -12887,7 +12971,7 @@
           <a:blip r:embed="rId3">
             <a:alphaModFix/>
           </a:blip>
-          <a:srcRect b="1195" l="0" r="970" t="0"/>
+          <a:srcRect r="970" b="1195"/>
           <a:stretch/>
         </p:blipFill>
         <p:spPr>
@@ -12907,7 +12991,9 @@
       <p:sp>
         <p:nvSpPr>
           <p:cNvPr id="124" name="Google Shape;124;p19"/>
-          <p:cNvSpPr txBox="1"/>
+          <p:cNvSpPr txBox="1">
+            <a:spLocks noGrp="1"/>
+          </p:cNvSpPr>
           <p:nvPr>
             <p:ph type="title"/>
           </p:nvPr>
@@ -12922,12 +13008,12 @@
           </a:prstGeom>
         </p:spPr>
         <p:txBody>
-          <a:bodyPr anchorCtr="0" anchor="t" bIns="91425" lIns="91425" spcFirstLastPara="1" rIns="91425" wrap="square" tIns="91425">
+          <a:bodyPr spcFirstLastPara="1" wrap="square" lIns="91425" tIns="91425" rIns="91425" bIns="91425" anchor="t" anchorCtr="0">
             <a:noAutofit/>
           </a:bodyPr>
           <a:lstStyle/>
           <a:p>
-            <a:pPr indent="0" lvl="0" marL="0" rtl="0" algn="l">
+            <a:pPr marL="0" lvl="0" indent="0" algn="l" rtl="0">
               <a:spcBef>
                 <a:spcPts val="0"/>
               </a:spcBef>
@@ -12937,7 +13023,7 @@
               <a:buNone/>
             </a:pPr>
             <a:r>
-              <a:rPr b="0" lang="zh-CN" sz="2800">
+              <a:rPr lang="zh-CN" sz="2800" b="0">
                 <a:solidFill>
                   <a:srgbClr val="000000"/>
                 </a:solidFill>
@@ -12960,9 +13046,11 @@
       <p:sp>
         <p:nvSpPr>
           <p:cNvPr id="125" name="Google Shape;125;p19"/>
-          <p:cNvSpPr txBox="1"/>
+          <p:cNvSpPr txBox="1">
+            <a:spLocks noGrp="1"/>
+          </p:cNvSpPr>
           <p:nvPr>
-            <p:ph idx="1" type="body"/>
+            <p:ph type="body" idx="1"/>
           </p:nvPr>
         </p:nvSpPr>
         <p:spPr>
@@ -12975,12 +13063,12 @@
           </a:prstGeom>
         </p:spPr>
         <p:txBody>
-          <a:bodyPr anchorCtr="0" anchor="t" bIns="91425" lIns="91425" spcFirstLastPara="1" rIns="91425" wrap="square" tIns="91425">
+          <a:bodyPr spcFirstLastPara="1" wrap="square" lIns="91425" tIns="91425" rIns="91425" bIns="91425" anchor="t" anchorCtr="0">
             <a:noAutofit/>
           </a:bodyPr>
           <a:lstStyle/>
           <a:p>
-            <a:pPr indent="0" lvl="0" marL="0" rtl="0" algn="l">
+            <a:pPr marL="0" lvl="0" indent="0" algn="l" rtl="0">
               <a:spcBef>
                 <a:spcPts val="500"/>
               </a:spcBef>
@@ -13012,7 +13100,7 @@
             </a:endParaRPr>
           </a:p>
           <a:p>
-            <a:pPr indent="0" lvl="0" marL="0" rtl="0" algn="l">
+            <a:pPr marL="0" lvl="0" indent="0" algn="l" rtl="0">
               <a:spcBef>
                 <a:spcPts val="0"/>
               </a:spcBef>
@@ -13022,9 +13110,6 @@
               <a:buSzPts val="688"/>
               <a:buNone/>
             </a:pPr>
-            <a:r>
-              <a:t/>
-            </a:r>
             <a:endParaRPr sz="2000">
               <a:solidFill>
                 <a:srgbClr val="000000"/>
@@ -13052,14 +13137,14 @@
             <a:avLst/>
           </a:prstGeom>
           <a:noFill/>
-          <a:ln cap="flat" cmpd="sng" w="10075">
+          <a:ln w="10075" cap="flat" cmpd="sng">
             <a:solidFill>
               <a:srgbClr val="EB5601"/>
             </a:solidFill>
             <a:prstDash val="solid"/>
             <a:round/>
-            <a:headEnd len="med" w="med" type="none"/>
-            <a:tailEnd len="med" w="med" type="none"/>
+            <a:headEnd type="none" w="med" len="med"/>
+            <a:tailEnd type="none" w="med" len="med"/>
           </a:ln>
         </p:spPr>
       </p:cxnSp>
@@ -13078,14 +13163,14 @@
             <a:avLst/>
           </a:prstGeom>
           <a:noFill/>
-          <a:ln cap="flat" cmpd="sng" w="10075">
+          <a:ln w="10075" cap="flat" cmpd="sng">
             <a:solidFill>
               <a:srgbClr val="EB5601"/>
             </a:solidFill>
             <a:prstDash val="solid"/>
             <a:round/>
-            <a:headEnd len="med" w="med" type="none"/>
-            <a:tailEnd len="med" w="med" type="none"/>
+            <a:headEnd type="none" w="med" len="med"/>
+            <a:tailEnd type="none" w="med" len="med"/>
           </a:ln>
         </p:spPr>
       </p:cxnSp>
@@ -13104,14 +13189,14 @@
             <a:avLst/>
           </a:prstGeom>
           <a:noFill/>
-          <a:ln cap="flat" cmpd="sng" w="10075">
+          <a:ln w="10075" cap="flat" cmpd="sng">
             <a:solidFill>
               <a:srgbClr val="EB5601"/>
             </a:solidFill>
             <a:prstDash val="solid"/>
             <a:round/>
-            <a:headEnd len="med" w="med" type="none"/>
-            <a:tailEnd len="med" w="med" type="none"/>
+            <a:headEnd type="none" w="med" len="med"/>
+            <a:tailEnd type="none" w="med" len="med"/>
           </a:ln>
         </p:spPr>
       </p:cxnSp>
@@ -13124,11 +13209,11 @@
 </file>
 
 <file path=ppt/slides/slide8.xml><?xml version="1.0" encoding="utf-8"?>
-<p:sld xmlns:a="http://schemas.openxmlformats.org/drawingml/2006/main" xmlns:r="http://schemas.openxmlformats.org/officeDocument/2006/relationships" xmlns:mc="http://schemas.openxmlformats.org/markup-compatibility/2006" xmlns:mv="urn:schemas-microsoft-com:mac:vml" xmlns:p="http://schemas.openxmlformats.org/presentationml/2006/main" xmlns:c="http://schemas.openxmlformats.org/drawingml/2006/chart" xmlns:dgm="http://schemas.openxmlformats.org/drawingml/2006/diagram" xmlns:o="urn:schemas-microsoft-com:office:office" xmlns:v="urn:schemas-microsoft-com:vml" xmlns:pvml="urn:schemas-microsoft-com:office:powerpoint" xmlns:com="http://schemas.openxmlformats.org/drawingml/2006/compatibility" xmlns:p14="http://schemas.microsoft.com/office/powerpoint/2010/main" xmlns:p15="http://schemas.microsoft.com/office/powerpoint/2012/main" xmlns:ahyp="http://schemas.microsoft.com/office/drawing/2018/hyperlinkcolor">
+<p:sld xmlns:a="http://schemas.openxmlformats.org/drawingml/2006/main" xmlns:r="http://schemas.openxmlformats.org/officeDocument/2006/relationships" xmlns:p="http://schemas.openxmlformats.org/presentationml/2006/main">
   <p:cSld>
     <p:spTree>
       <p:nvGrpSpPr>
-        <p:cNvPr id="132" name="Shape 132"/>
+        <p:cNvPr id="1" name="Shape 132"/>
         <p:cNvGrpSpPr/>
         <p:nvPr/>
       </p:nvGrpSpPr>
@@ -13143,7 +13228,9 @@
       <p:sp>
         <p:nvSpPr>
           <p:cNvPr id="133" name="Google Shape;133;p20"/>
-          <p:cNvSpPr txBox="1"/>
+          <p:cNvSpPr txBox="1">
+            <a:spLocks noGrp="1"/>
+          </p:cNvSpPr>
           <p:nvPr>
             <p:ph type="title"/>
           </p:nvPr>
@@ -13158,12 +13245,12 @@
           </a:prstGeom>
         </p:spPr>
         <p:txBody>
-          <a:bodyPr anchorCtr="0" anchor="t" bIns="91425" lIns="91425" spcFirstLastPara="1" rIns="91425" wrap="square" tIns="91425">
+          <a:bodyPr spcFirstLastPara="1" wrap="square" lIns="91425" tIns="91425" rIns="91425" bIns="91425" anchor="t" anchorCtr="0">
             <a:noAutofit/>
           </a:bodyPr>
           <a:lstStyle/>
           <a:p>
-            <a:pPr indent="0" lvl="0" marL="0" rtl="0" algn="l">
+            <a:pPr marL="0" lvl="0" indent="0" algn="l" rtl="0">
               <a:spcBef>
                 <a:spcPts val="0"/>
               </a:spcBef>
@@ -13173,7 +13260,7 @@
               <a:buNone/>
             </a:pPr>
             <a:r>
-              <a:rPr b="0" lang="zh-CN" sz="2800">
+              <a:rPr lang="zh-CN" sz="2800" b="0">
                 <a:solidFill>
                   <a:srgbClr val="000000"/>
                 </a:solidFill>
@@ -13182,31 +13269,7 @@
                 <a:cs typeface="Calibri"/>
                 <a:sym typeface="Calibri"/>
               </a:rPr>
-              <a:t>Analysis and Results - </a:t>
-            </a:r>
-            <a:r>
-              <a:rPr b="0" lang="zh-CN" sz="2800">
-                <a:solidFill>
-                  <a:srgbClr val="000000"/>
-                </a:solidFill>
-                <a:latin typeface="Calibri"/>
-                <a:ea typeface="Calibri"/>
-                <a:cs typeface="Calibri"/>
-                <a:sym typeface="Calibri"/>
-              </a:rPr>
-              <a:t>Dashboard </a:t>
-            </a:r>
-            <a:r>
-              <a:rPr b="0" lang="zh-CN" sz="2800">
-                <a:solidFill>
-                  <a:srgbClr val="000000"/>
-                </a:solidFill>
-                <a:latin typeface="Calibri"/>
-                <a:ea typeface="Calibri"/>
-                <a:cs typeface="Calibri"/>
-                <a:sym typeface="Calibri"/>
-              </a:rPr>
-              <a:t>Overview</a:t>
+              <a:t>Analysis and Results - Dashboard Overview</a:t>
             </a:r>
             <a:endParaRPr sz="2800">
               <a:latin typeface="Calibri"/>
@@ -13293,12 +13356,12 @@
           </a:ln>
         </p:spPr>
         <p:txBody>
-          <a:bodyPr anchorCtr="0" anchor="t" bIns="91425" lIns="91425" spcFirstLastPara="1" rIns="91425" wrap="square" tIns="91425">
+          <a:bodyPr spcFirstLastPara="1" wrap="square" lIns="91425" tIns="91425" rIns="91425" bIns="91425" anchor="t" anchorCtr="0">
             <a:spAutoFit/>
           </a:bodyPr>
           <a:lstStyle/>
           <a:p>
-            <a:pPr indent="0" lvl="0" marL="0" rtl="0" algn="l">
+            <a:pPr marL="0" lvl="0" indent="0" algn="l" rtl="0">
               <a:spcBef>
                 <a:spcPts val="0"/>
               </a:spcBef>
@@ -13345,12 +13408,12 @@
           </a:ln>
         </p:spPr>
         <p:txBody>
-          <a:bodyPr anchorCtr="0" anchor="t" bIns="91425" lIns="91425" spcFirstLastPara="1" rIns="91425" wrap="square" tIns="91425">
+          <a:bodyPr spcFirstLastPara="1" wrap="square" lIns="91425" tIns="91425" rIns="91425" bIns="91425" anchor="t" anchorCtr="0">
             <a:spAutoFit/>
           </a:bodyPr>
           <a:lstStyle/>
           <a:p>
-            <a:pPr indent="0" lvl="0" marL="0" rtl="0" algn="l">
+            <a:pPr marL="0" lvl="0" indent="0" algn="l" rtl="0">
               <a:spcBef>
                 <a:spcPts val="0"/>
               </a:spcBef>
@@ -13397,12 +13460,12 @@
           </a:ln>
         </p:spPr>
         <p:txBody>
-          <a:bodyPr anchorCtr="0" anchor="t" bIns="91425" lIns="91425" spcFirstLastPara="1" rIns="91425" wrap="square" tIns="91425">
+          <a:bodyPr spcFirstLastPara="1" wrap="square" lIns="91425" tIns="91425" rIns="91425" bIns="91425" anchor="t" anchorCtr="0">
             <a:spAutoFit/>
           </a:bodyPr>
           <a:lstStyle/>
           <a:p>
-            <a:pPr indent="0" lvl="0" marL="0" rtl="0" algn="l">
+            <a:pPr marL="0" lvl="0" indent="0" algn="l" rtl="0">
               <a:spcBef>
                 <a:spcPts val="500"/>
               </a:spcBef>
@@ -13412,22 +13475,13 @@
               <a:buNone/>
             </a:pPr>
             <a:r>
-              <a:rPr b="1" lang="zh-CN" sz="2000">
+              <a:rPr lang="zh-CN" sz="2000" b="1">
                 <a:latin typeface="Calibri"/>
                 <a:ea typeface="Calibri"/>
                 <a:cs typeface="Calibri"/>
                 <a:sym typeface="Calibri"/>
               </a:rPr>
-              <a:t>Both</a:t>
-            </a:r>
-            <a:r>
-              <a:rPr b="1" lang="zh-CN" sz="2000">
-                <a:latin typeface="Calibri"/>
-                <a:ea typeface="Calibri"/>
-                <a:cs typeface="Calibri"/>
-                <a:sym typeface="Calibri"/>
-              </a:rPr>
-              <a:t>:</a:t>
+              <a:t>Both:</a:t>
             </a:r>
             <a:endParaRPr sz="2000">
               <a:latin typeface="Calibri"/>
@@ -13437,7 +13491,7 @@
             </a:endParaRPr>
           </a:p>
           <a:p>
-            <a:pPr indent="0" lvl="0" marL="0" rtl="0" algn="l">
+            <a:pPr marL="0" lvl="0" indent="0" algn="l" rtl="0">
               <a:spcBef>
                 <a:spcPts val="500"/>
               </a:spcBef>
@@ -13463,7 +13517,7 @@
             </a:endParaRPr>
           </a:p>
           <a:p>
-            <a:pPr indent="0" lvl="0" marL="0" rtl="0" algn="l">
+            <a:pPr marL="0" lvl="0" indent="0" algn="l" rtl="0">
               <a:spcBef>
                 <a:spcPts val="500"/>
               </a:spcBef>
@@ -13489,7 +13543,7 @@
             </a:endParaRPr>
           </a:p>
           <a:p>
-            <a:pPr indent="0" lvl="0" marL="0" rtl="0" algn="l">
+            <a:pPr marL="0" lvl="0" indent="0" algn="l" rtl="0">
               <a:spcBef>
                 <a:spcPts val="500"/>
               </a:spcBef>
@@ -13499,7 +13553,7 @@
               <a:buNone/>
             </a:pPr>
             <a:r>
-              <a:rPr b="1" lang="zh-CN" sz="2000">
+              <a:rPr lang="zh-CN" sz="2000" b="1">
                 <a:latin typeface="Calibri"/>
                 <a:ea typeface="Calibri"/>
                 <a:cs typeface="Calibri"/>
@@ -13507,7 +13561,7 @@
               </a:rPr>
               <a:t>“Smart-Grid”:</a:t>
             </a:r>
-            <a:endParaRPr b="1" sz="2000">
+            <a:endParaRPr sz="2000" b="1">
               <a:latin typeface="Calibri"/>
               <a:ea typeface="Calibri"/>
               <a:cs typeface="Calibri"/>
@@ -13515,7 +13569,7 @@
             </a:endParaRPr>
           </a:p>
           <a:p>
-            <a:pPr indent="0" lvl="0" marL="0" rtl="0" algn="l">
+            <a:pPr marL="0" lvl="0" indent="0" algn="l" rtl="0">
               <a:spcBef>
                 <a:spcPts val="500"/>
               </a:spcBef>
@@ -13541,7 +13595,7 @@
             </a:endParaRPr>
           </a:p>
           <a:p>
-            <a:pPr indent="0" lvl="0" marL="0" rtl="0" algn="l">
+            <a:pPr marL="0" lvl="0" indent="0" algn="l" rtl="0">
               <a:spcBef>
                 <a:spcPts val="500"/>
               </a:spcBef>
@@ -13551,7 +13605,7 @@
               <a:buNone/>
             </a:pPr>
             <a:r>
-              <a:rPr b="1" lang="zh-CN" sz="2000">
+              <a:rPr lang="zh-CN" sz="2000" b="1">
                 <a:latin typeface="Calibri"/>
                 <a:ea typeface="Calibri"/>
                 <a:cs typeface="Calibri"/>
@@ -13559,7 +13613,7 @@
               </a:rPr>
               <a:t>"Industrial-Safety":</a:t>
             </a:r>
-            <a:endParaRPr b="1" sz="2000">
+            <a:endParaRPr sz="2000" b="1">
               <a:latin typeface="Calibri"/>
               <a:ea typeface="Calibri"/>
               <a:cs typeface="Calibri"/>
@@ -13567,7 +13621,7 @@
             </a:endParaRPr>
           </a:p>
           <a:p>
-            <a:pPr indent="0" lvl="0" marL="0" rtl="0" algn="l">
+            <a:pPr marL="0" lvl="0" indent="0" algn="l" rtl="0">
               <a:spcBef>
                 <a:spcPts val="500"/>
               </a:spcBef>
@@ -13603,11 +13657,11 @@
 </file>
 
 <file path=ppt/slides/slide9.xml><?xml version="1.0" encoding="utf-8"?>
-<p:sld xmlns:a="http://schemas.openxmlformats.org/drawingml/2006/main" xmlns:r="http://schemas.openxmlformats.org/officeDocument/2006/relationships" xmlns:mc="http://schemas.openxmlformats.org/markup-compatibility/2006" xmlns:mv="urn:schemas-microsoft-com:mac:vml" xmlns:p="http://schemas.openxmlformats.org/presentationml/2006/main" xmlns:c="http://schemas.openxmlformats.org/drawingml/2006/chart" xmlns:dgm="http://schemas.openxmlformats.org/drawingml/2006/diagram" xmlns:o="urn:schemas-microsoft-com:office:office" xmlns:v="urn:schemas-microsoft-com:vml" xmlns:pvml="urn:schemas-microsoft-com:office:powerpoint" xmlns:com="http://schemas.openxmlformats.org/drawingml/2006/compatibility" xmlns:p14="http://schemas.microsoft.com/office/powerpoint/2010/main" xmlns:p15="http://schemas.microsoft.com/office/powerpoint/2012/main" xmlns:ahyp="http://schemas.microsoft.com/office/drawing/2018/hyperlinkcolor">
+<p:sld xmlns:a="http://schemas.openxmlformats.org/drawingml/2006/main" xmlns:r="http://schemas.openxmlformats.org/officeDocument/2006/relationships" xmlns:p="http://schemas.openxmlformats.org/presentationml/2006/main">
   <p:cSld>
     <p:spTree>
       <p:nvGrpSpPr>
-        <p:cNvPr id="142" name="Shape 142"/>
+        <p:cNvPr id="1" name="Shape 142"/>
         <p:cNvGrpSpPr/>
         <p:nvPr/>
       </p:nvGrpSpPr>
@@ -13622,7 +13676,9 @@
       <p:sp>
         <p:nvSpPr>
           <p:cNvPr id="143" name="Google Shape;143;p21"/>
-          <p:cNvSpPr txBox="1"/>
+          <p:cNvSpPr txBox="1">
+            <a:spLocks noGrp="1"/>
+          </p:cNvSpPr>
           <p:nvPr>
             <p:ph type="title"/>
           </p:nvPr>
@@ -13637,12 +13693,12 @@
           </a:prstGeom>
         </p:spPr>
         <p:txBody>
-          <a:bodyPr anchorCtr="0" anchor="t" bIns="91425" lIns="91425" spcFirstLastPara="1" rIns="91425" wrap="square" tIns="91425">
+          <a:bodyPr spcFirstLastPara="1" wrap="square" lIns="91425" tIns="91425" rIns="91425" bIns="91425" anchor="t" anchorCtr="0">
             <a:noAutofit/>
           </a:bodyPr>
           <a:lstStyle/>
           <a:p>
-            <a:pPr indent="0" lvl="0" marL="0" rtl="0" algn="l">
+            <a:pPr marL="0" lvl="0" indent="0" algn="l" rtl="0">
               <a:lnSpc>
                 <a:spcPct val="150000"/>
               </a:lnSpc>
@@ -13655,7 +13711,7 @@
               <a:buNone/>
             </a:pPr>
             <a:r>
-              <a:rPr b="0" lang="zh-CN" sz="2800">
+              <a:rPr lang="zh-CN" sz="2800" b="0">
                 <a:solidFill>
                   <a:srgbClr val="000000"/>
                 </a:solidFill>
@@ -13664,19 +13720,7 @@
                 <a:cs typeface="Calibri"/>
                 <a:sym typeface="Calibri"/>
               </a:rPr>
-              <a:t>Analysis and Results - </a:t>
-            </a:r>
-            <a:r>
-              <a:rPr b="0" lang="zh-CN" sz="2800">
-                <a:solidFill>
-                  <a:srgbClr val="000000"/>
-                </a:solidFill>
-                <a:latin typeface="Calibri"/>
-                <a:ea typeface="Calibri"/>
-                <a:cs typeface="Calibri"/>
-                <a:sym typeface="Calibri"/>
-              </a:rPr>
-              <a:t>Accident Forecasting</a:t>
+              <a:t>Analysis and Results - Accident Forecasting</a:t>
             </a:r>
             <a:endParaRPr sz="2800">
               <a:latin typeface="Calibri"/>
@@ -13690,9 +13734,11 @@
       <p:sp>
         <p:nvSpPr>
           <p:cNvPr id="144" name="Google Shape;144;p21"/>
-          <p:cNvSpPr txBox="1"/>
+          <p:cNvSpPr txBox="1">
+            <a:spLocks noGrp="1"/>
+          </p:cNvSpPr>
           <p:nvPr>
-            <p:ph idx="1" type="body"/>
+            <p:ph type="body" idx="1"/>
           </p:nvPr>
         </p:nvSpPr>
         <p:spPr>
@@ -13705,12 +13751,12 @@
           </a:prstGeom>
         </p:spPr>
         <p:txBody>
-          <a:bodyPr anchorCtr="0" anchor="t" bIns="91425" lIns="91425" spcFirstLastPara="1" rIns="91425" wrap="square" tIns="91425">
+          <a:bodyPr spcFirstLastPara="1" wrap="square" lIns="91425" tIns="91425" rIns="91425" bIns="91425" anchor="t" anchorCtr="0">
             <a:noAutofit/>
           </a:bodyPr>
           <a:lstStyle/>
           <a:p>
-            <a:pPr indent="0" lvl="0" marL="0" rtl="0" algn="l">
+            <a:pPr marL="0" lvl="0" indent="0" algn="l" rtl="0">
               <a:spcBef>
                 <a:spcPts val="500"/>
               </a:spcBef>
@@ -13729,19 +13775,7 @@
                 <a:cs typeface="Calibri"/>
                 <a:sym typeface="Calibri"/>
               </a:rPr>
-              <a:t>• Forecasts monthly accident counts using historical data.</a:t>
-            </a:r>
-            <a:r>
-              <a:rPr lang="zh-CN" sz="2000">
-                <a:solidFill>
-                  <a:srgbClr val="000000"/>
-                </a:solidFill>
-                <a:latin typeface="Calibri"/>
-                <a:ea typeface="Calibri"/>
-                <a:cs typeface="Calibri"/>
-                <a:sym typeface="Calibri"/>
-              </a:rPr>
-              <a:t> </a:t>
+              <a:t>• Forecasts monthly accident counts using historical data. </a:t>
             </a:r>
             <a:endParaRPr sz="2000">
               <a:solidFill>
@@ -13754,7 +13788,7 @@
             </a:endParaRPr>
           </a:p>
           <a:p>
-            <a:pPr indent="0" lvl="0" marL="0" rtl="0" algn="l">
+            <a:pPr marL="0" lvl="0" indent="0" algn="l" rtl="0">
               <a:spcBef>
                 <a:spcPts val="500"/>
               </a:spcBef>
@@ -13776,7 +13810,7 @@
               <a:t>• </a:t>
             </a:r>
             <a:r>
-              <a:rPr b="1" lang="zh-CN" sz="2000">
+              <a:rPr lang="zh-CN" sz="2000" b="1">
                 <a:solidFill>
                   <a:srgbClr val="000000"/>
                 </a:solidFill>
@@ -13810,7 +13844,7 @@
             </a:endParaRPr>
           </a:p>
           <a:p>
-            <a:pPr indent="0" lvl="0" marL="0" rtl="0" algn="l">
+            <a:pPr marL="0" lvl="0" indent="0" algn="l" rtl="0">
               <a:spcBef>
                 <a:spcPts val="500"/>
               </a:spcBef>
@@ -13832,7 +13866,7 @@
               <a:t>• </a:t>
             </a:r>
             <a:r>
-              <a:rPr b="1" lang="zh-CN" sz="2000">
+              <a:rPr lang="zh-CN" sz="2000" b="1">
                 <a:solidFill>
                   <a:srgbClr val="000000"/>
                 </a:solidFill>
@@ -13932,7 +13966,7 @@
 </file>
 
 <file path=ppt/theme/theme1.xml><?xml version="1.0" encoding="utf-8"?>
-<a:theme xmlns:a="http://schemas.openxmlformats.org/drawingml/2006/main" xmlns:r="http://schemas.openxmlformats.org/officeDocument/2006/relationships" name="Streamline">
+<a:theme xmlns:a="http://schemas.openxmlformats.org/drawingml/2006/main" name="Streamline">
   <a:themeElements>
     <a:clrScheme name="Streamline">
       <a:dk1>
@@ -14207,11 +14241,13 @@
       </a:bgFillStyleLst>
     </a:fmtScheme>
   </a:themeElements>
+  <a:objectDefaults/>
+  <a:extraClrSchemeLst/>
 </a:theme>
 </file>
 
 <file path=ppt/theme/theme2.xml><?xml version="1.0" encoding="utf-8"?>
-<a:theme xmlns:a="http://schemas.openxmlformats.org/drawingml/2006/main" xmlns:r="http://schemas.openxmlformats.org/officeDocument/2006/relationships">
+<a:theme xmlns:a="http://schemas.openxmlformats.org/drawingml/2006/main">
   <a:themeElements>
     <a:clrScheme name="Default">
       <a:dk1>
@@ -14486,5 +14522,7 @@
       </a:bgFillStyleLst>
     </a:fmtScheme>
   </a:themeElements>
+  <a:objectDefaults/>
+  <a:extraClrSchemeLst/>
 </a:theme>
 </file>